--- a/Expo WEB.pptx
+++ b/Expo WEB.pptx
@@ -4,8 +4,16 @@
   <p:sldMasterIdLst>
     <p:sldMasterId id="2147483648" r:id="rId1"/>
   </p:sldMasterIdLst>
+  <p:notesMasterIdLst>
+    <p:notesMasterId r:id="rId8"/>
+  </p:notesMasterIdLst>
   <p:sldIdLst>
-    <p:sldId id="256" r:id="rId2"/>
+    <p:sldId id="257" r:id="rId2"/>
+    <p:sldId id="256" r:id="rId3"/>
+    <p:sldId id="260" r:id="rId4"/>
+    <p:sldId id="259" r:id="rId5"/>
+    <p:sldId id="258" r:id="rId6"/>
+    <p:sldId id="261" r:id="rId7"/>
   </p:sldIdLst>
   <p:sldSz cx="12192000" cy="6858000"/>
   <p:notesSz cx="6858000" cy="9144000"/>
@@ -104,7 +112,692 @@
       </a:defRPr>
     </a:lvl9pPr>
   </p:defaultTextStyle>
+  <p:extLst>
+    <p:ext uri="{EFAFB233-063F-42B5-8137-9DF3F51BA10A}">
+      <p15:sldGuideLst xmlns:p15="http://schemas.microsoft.com/office/powerpoint/2012/main"/>
+    </p:ext>
+  </p:extLst>
 </p:presentation>
+</file>
+
+<file path=ppt/revisionInfo.xml><?xml version="1.0" encoding="utf-8"?>
+<p1510:revInfo xmlns:a="http://schemas.openxmlformats.org/drawingml/2006/main" xmlns:r="http://schemas.openxmlformats.org/officeDocument/2006/relationships" xmlns:p1510="http://schemas.microsoft.com/office/powerpoint/2015/10/main">
+  <p1510:revLst>
+    <p1510:client id="{056970AA-C0AA-46A1-9312-A78E5A543916}" v="8" dt="2026-04-23T20:51:18.239"/>
+  </p1510:revLst>
+</p1510:revInfo>
+</file>
+
+<file path=ppt/changesInfos/changesInfo1.xml><?xml version="1.0" encoding="utf-8"?>
+<pc:chgInfo xmlns:a="http://schemas.openxmlformats.org/drawingml/2006/main" xmlns:r="http://schemas.openxmlformats.org/officeDocument/2006/relationships" xmlns:ac="http://schemas.microsoft.com/office/drawing/2013/main/command" xmlns:pc="http://schemas.microsoft.com/office/powerpoint/2013/main/command">
+  <pc:docChgLst>
+    <pc:chgData name="EDGAR GAEL REYES QUEVEDO" userId="04ed7362-a71f-4db0-bacd-f9d8a9a1242d" providerId="ADAL" clId="{D38D3931-CCEA-4AEF-96D6-0218BD802E44}"/>
+    <pc:docChg chg="custSel addSld modSld sldOrd">
+      <pc:chgData name="EDGAR GAEL REYES QUEVEDO" userId="04ed7362-a71f-4db0-bacd-f9d8a9a1242d" providerId="ADAL" clId="{D38D3931-CCEA-4AEF-96D6-0218BD802E44}" dt="2026-04-23T20:51:18.239" v="994"/>
+      <pc:docMkLst>
+        <pc:docMk/>
+      </pc:docMkLst>
+      <pc:sldChg chg="modSp mod">
+        <pc:chgData name="EDGAR GAEL REYES QUEVEDO" userId="04ed7362-a71f-4db0-bacd-f9d8a9a1242d" providerId="ADAL" clId="{D38D3931-CCEA-4AEF-96D6-0218BD802E44}" dt="2026-04-23T20:33:00.646" v="26" actId="1440"/>
+        <pc:sldMkLst>
+          <pc:docMk/>
+          <pc:sldMk cId="37386645" sldId="256"/>
+        </pc:sldMkLst>
+        <pc:spChg chg="mod">
+          <ac:chgData name="EDGAR GAEL REYES QUEVEDO" userId="04ed7362-a71f-4db0-bacd-f9d8a9a1242d" providerId="ADAL" clId="{D38D3931-CCEA-4AEF-96D6-0218BD802E44}" dt="2026-04-23T20:32:09.888" v="21" actId="1076"/>
+          <ac:spMkLst>
+            <pc:docMk/>
+            <pc:sldMk cId="37386645" sldId="256"/>
+            <ac:spMk id="23" creationId="{A0EC82D6-A456-F2F9-EE92-9C2A4B0C735E}"/>
+          </ac:spMkLst>
+        </pc:spChg>
+        <pc:spChg chg="mod">
+          <ac:chgData name="EDGAR GAEL REYES QUEVEDO" userId="04ed7362-a71f-4db0-bacd-f9d8a9a1242d" providerId="ADAL" clId="{D38D3931-CCEA-4AEF-96D6-0218BD802E44}" dt="2026-04-23T20:32:17.289" v="25" actId="14100"/>
+          <ac:spMkLst>
+            <pc:docMk/>
+            <pc:sldMk cId="37386645" sldId="256"/>
+            <ac:spMk id="24" creationId="{5BE440BD-55AA-C78A-9B03-A99CC44DF0A8}"/>
+          </ac:spMkLst>
+        </pc:spChg>
+        <pc:picChg chg="mod">
+          <ac:chgData name="EDGAR GAEL REYES QUEVEDO" userId="04ed7362-a71f-4db0-bacd-f9d8a9a1242d" providerId="ADAL" clId="{D38D3931-CCEA-4AEF-96D6-0218BD802E44}" dt="2026-04-23T20:33:00.646" v="26" actId="1440"/>
+          <ac:picMkLst>
+            <pc:docMk/>
+            <pc:sldMk cId="37386645" sldId="256"/>
+            <ac:picMk id="5" creationId="{D45CEF27-422B-64F5-DF6F-400AAE732A45}"/>
+          </ac:picMkLst>
+        </pc:picChg>
+      </pc:sldChg>
+      <pc:sldChg chg="modSp mod">
+        <pc:chgData name="EDGAR GAEL REYES QUEVEDO" userId="04ed7362-a71f-4db0-bacd-f9d8a9a1242d" providerId="ADAL" clId="{D38D3931-CCEA-4AEF-96D6-0218BD802E44}" dt="2026-04-23T20:33:15.409" v="28" actId="1440"/>
+        <pc:sldMkLst>
+          <pc:docMk/>
+          <pc:sldMk cId="1195846946" sldId="257"/>
+        </pc:sldMkLst>
+        <pc:picChg chg="mod">
+          <ac:chgData name="EDGAR GAEL REYES QUEVEDO" userId="04ed7362-a71f-4db0-bacd-f9d8a9a1242d" providerId="ADAL" clId="{D38D3931-CCEA-4AEF-96D6-0218BD802E44}" dt="2026-04-23T20:33:15.409" v="28" actId="1440"/>
+          <ac:picMkLst>
+            <pc:docMk/>
+            <pc:sldMk cId="1195846946" sldId="257"/>
+            <ac:picMk id="52" creationId="{A95C7DD7-3CE8-EE6A-5BC0-1BC0FC328A2A}"/>
+          </ac:picMkLst>
+        </pc:picChg>
+      </pc:sldChg>
+      <pc:sldChg chg="addSp delSp modSp mod">
+        <pc:chgData name="EDGAR GAEL REYES QUEVEDO" userId="04ed7362-a71f-4db0-bacd-f9d8a9a1242d" providerId="ADAL" clId="{D38D3931-CCEA-4AEF-96D6-0218BD802E44}" dt="2026-04-23T20:38:57.481" v="56" actId="1076"/>
+        <pc:sldMkLst>
+          <pc:docMk/>
+          <pc:sldMk cId="1296508524" sldId="258"/>
+        </pc:sldMkLst>
+        <pc:grpChg chg="del">
+          <ac:chgData name="EDGAR GAEL REYES QUEVEDO" userId="04ed7362-a71f-4db0-bacd-f9d8a9a1242d" providerId="ADAL" clId="{D38D3931-CCEA-4AEF-96D6-0218BD802E44}" dt="2026-04-23T20:38:48.866" v="51" actId="478"/>
+          <ac:grpSpMkLst>
+            <pc:docMk/>
+            <pc:sldMk cId="1296508524" sldId="258"/>
+            <ac:grpSpMk id="14" creationId="{917E8A1D-F9D7-B3A8-211B-A83A2E23E596}"/>
+          </ac:grpSpMkLst>
+        </pc:grpChg>
+        <pc:picChg chg="add mod">
+          <ac:chgData name="EDGAR GAEL REYES QUEVEDO" userId="04ed7362-a71f-4db0-bacd-f9d8a9a1242d" providerId="ADAL" clId="{D38D3931-CCEA-4AEF-96D6-0218BD802E44}" dt="2026-04-23T20:38:57.481" v="56" actId="1076"/>
+          <ac:picMkLst>
+            <pc:docMk/>
+            <pc:sldMk cId="1296508524" sldId="258"/>
+            <ac:picMk id="2" creationId="{A2DEBB5F-EAB2-9437-7838-0011FBA01893}"/>
+          </ac:picMkLst>
+        </pc:picChg>
+      </pc:sldChg>
+      <pc:sldChg chg="addSp modSp mod ord">
+        <pc:chgData name="EDGAR GAEL REYES QUEVEDO" userId="04ed7362-a71f-4db0-bacd-f9d8a9a1242d" providerId="ADAL" clId="{D38D3931-CCEA-4AEF-96D6-0218BD802E44}" dt="2026-04-23T20:45:03.583" v="970" actId="14100"/>
+        <pc:sldMkLst>
+          <pc:docMk/>
+          <pc:sldMk cId="3089912078" sldId="259"/>
+        </pc:sldMkLst>
+        <pc:spChg chg="mod">
+          <ac:chgData name="EDGAR GAEL REYES QUEVEDO" userId="04ed7362-a71f-4db0-bacd-f9d8a9a1242d" providerId="ADAL" clId="{D38D3931-CCEA-4AEF-96D6-0218BD802E44}" dt="2026-04-23T20:39:41.710" v="81" actId="1076"/>
+          <ac:spMkLst>
+            <pc:docMk/>
+            <pc:sldMk cId="3089912078" sldId="259"/>
+            <ac:spMk id="5" creationId="{6CBE37A4-CE5E-7CEA-E13E-5BB05EDDFE2E}"/>
+          </ac:spMkLst>
+        </pc:spChg>
+        <pc:spChg chg="mod">
+          <ac:chgData name="EDGAR GAEL REYES QUEVEDO" userId="04ed7362-a71f-4db0-bacd-f9d8a9a1242d" providerId="ADAL" clId="{D38D3931-CCEA-4AEF-96D6-0218BD802E44}" dt="2026-04-23T20:39:33.706" v="80" actId="14100"/>
+          <ac:spMkLst>
+            <pc:docMk/>
+            <pc:sldMk cId="3089912078" sldId="259"/>
+            <ac:spMk id="6" creationId="{571F7FB1-CBB0-8FBA-64C9-BFA1053A61CB}"/>
+          </ac:spMkLst>
+        </pc:spChg>
+        <pc:spChg chg="add mod">
+          <ac:chgData name="EDGAR GAEL REYES QUEVEDO" userId="04ed7362-a71f-4db0-bacd-f9d8a9a1242d" providerId="ADAL" clId="{D38D3931-CCEA-4AEF-96D6-0218BD802E44}" dt="2026-04-23T20:45:03.583" v="970" actId="14100"/>
+          <ac:spMkLst>
+            <pc:docMk/>
+            <pc:sldMk cId="3089912078" sldId="259"/>
+            <ac:spMk id="7" creationId="{5F9B59F0-9B76-1AE5-A7F8-27326BAC028A}"/>
+          </ac:spMkLst>
+        </pc:spChg>
+        <pc:grpChg chg="add mod">
+          <ac:chgData name="EDGAR GAEL REYES QUEVEDO" userId="04ed7362-a71f-4db0-bacd-f9d8a9a1242d" providerId="ADAL" clId="{D38D3931-CCEA-4AEF-96D6-0218BD802E44}" dt="2026-04-23T20:39:31.252" v="79" actId="1076"/>
+          <ac:grpSpMkLst>
+            <pc:docMk/>
+            <pc:sldMk cId="3089912078" sldId="259"/>
+            <ac:grpSpMk id="4" creationId="{4CDA9A3C-E827-C168-2103-A76AFC50E562}"/>
+          </ac:grpSpMkLst>
+        </pc:grpChg>
+        <pc:grpChg chg="mod">
+          <ac:chgData name="EDGAR GAEL REYES QUEVEDO" userId="04ed7362-a71f-4db0-bacd-f9d8a9a1242d" providerId="ADAL" clId="{D38D3931-CCEA-4AEF-96D6-0218BD802E44}" dt="2026-04-23T20:33:34.695" v="29" actId="1076"/>
+          <ac:grpSpMkLst>
+            <pc:docMk/>
+            <pc:sldMk cId="3089912078" sldId="259"/>
+            <ac:grpSpMk id="19" creationId="{F2D1CDF2-A6E7-1731-3AD1-ACF0F9BBAEB8}"/>
+          </ac:grpSpMkLst>
+        </pc:grpChg>
+        <pc:picChg chg="add mod">
+          <ac:chgData name="EDGAR GAEL REYES QUEVEDO" userId="04ed7362-a71f-4db0-bacd-f9d8a9a1242d" providerId="ADAL" clId="{D38D3931-CCEA-4AEF-96D6-0218BD802E44}" dt="2026-04-23T20:39:47.643" v="83" actId="14100"/>
+          <ac:picMkLst>
+            <pc:docMk/>
+            <pc:sldMk cId="3089912078" sldId="259"/>
+            <ac:picMk id="3" creationId="{CDBEA1B8-A4B8-9FD2-49A9-9320F6F05AB8}"/>
+          </ac:picMkLst>
+        </pc:picChg>
+      </pc:sldChg>
+      <pc:sldChg chg="addSp delSp modSp new mod">
+        <pc:chgData name="EDGAR GAEL REYES QUEVEDO" userId="04ed7362-a71f-4db0-bacd-f9d8a9a1242d" providerId="ADAL" clId="{D38D3931-CCEA-4AEF-96D6-0218BD802E44}" dt="2026-04-23T20:38:33.891" v="43" actId="1076"/>
+        <pc:sldMkLst>
+          <pc:docMk/>
+          <pc:sldMk cId="2935144419" sldId="260"/>
+        </pc:sldMkLst>
+        <pc:spChg chg="del">
+          <ac:chgData name="EDGAR GAEL REYES QUEVEDO" userId="04ed7362-a71f-4db0-bacd-f9d8a9a1242d" providerId="ADAL" clId="{D38D3931-CCEA-4AEF-96D6-0218BD802E44}" dt="2026-04-23T20:38:24.281" v="35" actId="478"/>
+          <ac:spMkLst>
+            <pc:docMk/>
+            <pc:sldMk cId="2935144419" sldId="260"/>
+            <ac:spMk id="2" creationId="{CDF709F5-4E93-EFD6-02E1-B76342AD6D17}"/>
+          </ac:spMkLst>
+        </pc:spChg>
+        <pc:spChg chg="del">
+          <ac:chgData name="EDGAR GAEL REYES QUEVEDO" userId="04ed7362-a71f-4db0-bacd-f9d8a9a1242d" providerId="ADAL" clId="{D38D3931-CCEA-4AEF-96D6-0218BD802E44}" dt="2026-04-23T20:38:25" v="36" actId="478"/>
+          <ac:spMkLst>
+            <pc:docMk/>
+            <pc:sldMk cId="2935144419" sldId="260"/>
+            <ac:spMk id="3" creationId="{7D6A75FC-D6DB-EAAB-7FF9-10BD60859338}"/>
+          </ac:spMkLst>
+        </pc:spChg>
+        <pc:picChg chg="add mod">
+          <ac:chgData name="EDGAR GAEL REYES QUEVEDO" userId="04ed7362-a71f-4db0-bacd-f9d8a9a1242d" providerId="ADAL" clId="{D38D3931-CCEA-4AEF-96D6-0218BD802E44}" dt="2026-04-23T20:38:33.891" v="43" actId="1076"/>
+          <ac:picMkLst>
+            <pc:docMk/>
+            <pc:sldMk cId="2935144419" sldId="260"/>
+            <ac:picMk id="4" creationId="{E8ADAF69-31B7-105E-09CB-8CADD4F27A9E}"/>
+          </ac:picMkLst>
+        </pc:picChg>
+      </pc:sldChg>
+      <pc:sldChg chg="addSp modSp new mod modTransition">
+        <pc:chgData name="EDGAR GAEL REYES QUEVEDO" userId="04ed7362-a71f-4db0-bacd-f9d8a9a1242d" providerId="ADAL" clId="{D38D3931-CCEA-4AEF-96D6-0218BD802E44}" dt="2026-04-23T20:51:18.239" v="994"/>
+        <pc:sldMkLst>
+          <pc:docMk/>
+          <pc:sldMk cId="3621507805" sldId="261"/>
+        </pc:sldMkLst>
+        <pc:spChg chg="mod">
+          <ac:chgData name="EDGAR GAEL REYES QUEVEDO" userId="04ed7362-a71f-4db0-bacd-f9d8a9a1242d" providerId="ADAL" clId="{D38D3931-CCEA-4AEF-96D6-0218BD802E44}" dt="2026-04-23T20:51:09.831" v="991" actId="1076"/>
+          <ac:spMkLst>
+            <pc:docMk/>
+            <pc:sldMk cId="3621507805" sldId="261"/>
+            <ac:spMk id="2" creationId="{B2A93777-73F4-5111-2916-5106EFD24E1C}"/>
+          </ac:spMkLst>
+        </pc:spChg>
+        <pc:spChg chg="mod">
+          <ac:chgData name="EDGAR GAEL REYES QUEVEDO" userId="04ed7362-a71f-4db0-bacd-f9d8a9a1242d" providerId="ADAL" clId="{D38D3931-CCEA-4AEF-96D6-0218BD802E44}" dt="2026-04-23T20:51:01.029" v="990" actId="5793"/>
+          <ac:spMkLst>
+            <pc:docMk/>
+            <pc:sldMk cId="3621507805" sldId="261"/>
+            <ac:spMk id="3" creationId="{FBB19DCD-A0A6-ACEC-BEAA-87F89C73E6C6}"/>
+          </ac:spMkLst>
+        </pc:spChg>
+        <pc:spChg chg="mod">
+          <ac:chgData name="EDGAR GAEL REYES QUEVEDO" userId="04ed7362-a71f-4db0-bacd-f9d8a9a1242d" providerId="ADAL" clId="{D38D3931-CCEA-4AEF-96D6-0218BD802E44}" dt="2026-04-23T20:51:12.280" v="992"/>
+          <ac:spMkLst>
+            <pc:docMk/>
+            <pc:sldMk cId="3621507805" sldId="261"/>
+            <ac:spMk id="5" creationId="{9C7B51B4-94DD-0A23-154A-40C4DED5F91E}"/>
+          </ac:spMkLst>
+        </pc:spChg>
+        <pc:spChg chg="mod">
+          <ac:chgData name="EDGAR GAEL REYES QUEVEDO" userId="04ed7362-a71f-4db0-bacd-f9d8a9a1242d" providerId="ADAL" clId="{D38D3931-CCEA-4AEF-96D6-0218BD802E44}" dt="2026-04-23T20:51:12.280" v="992"/>
+          <ac:spMkLst>
+            <pc:docMk/>
+            <pc:sldMk cId="3621507805" sldId="261"/>
+            <ac:spMk id="6" creationId="{0D6F7EA9-7402-4E1E-1CCD-5738BB02B99D}"/>
+          </ac:spMkLst>
+        </pc:spChg>
+        <pc:spChg chg="mod">
+          <ac:chgData name="EDGAR GAEL REYES QUEVEDO" userId="04ed7362-a71f-4db0-bacd-f9d8a9a1242d" providerId="ADAL" clId="{D38D3931-CCEA-4AEF-96D6-0218BD802E44}" dt="2026-04-23T20:51:12.280" v="992"/>
+          <ac:spMkLst>
+            <pc:docMk/>
+            <pc:sldMk cId="3621507805" sldId="261"/>
+            <ac:spMk id="7" creationId="{6E2FAFB2-0E4A-7D55-291F-235A2735320A}"/>
+          </ac:spMkLst>
+        </pc:spChg>
+        <pc:spChg chg="mod">
+          <ac:chgData name="EDGAR GAEL REYES QUEVEDO" userId="04ed7362-a71f-4db0-bacd-f9d8a9a1242d" providerId="ADAL" clId="{D38D3931-CCEA-4AEF-96D6-0218BD802E44}" dt="2026-04-23T20:51:12.280" v="992"/>
+          <ac:spMkLst>
+            <pc:docMk/>
+            <pc:sldMk cId="3621507805" sldId="261"/>
+            <ac:spMk id="8" creationId="{662802C4-9A78-B9CB-DA37-C79DD5CDEF59}"/>
+          </ac:spMkLst>
+        </pc:spChg>
+        <pc:grpChg chg="add mod">
+          <ac:chgData name="EDGAR GAEL REYES QUEVEDO" userId="04ed7362-a71f-4db0-bacd-f9d8a9a1242d" providerId="ADAL" clId="{D38D3931-CCEA-4AEF-96D6-0218BD802E44}" dt="2026-04-23T20:51:14.741" v="993" actId="1076"/>
+          <ac:grpSpMkLst>
+            <pc:docMk/>
+            <pc:sldMk cId="3621507805" sldId="261"/>
+            <ac:grpSpMk id="4" creationId="{07004641-7523-1BEC-62A9-4372F3E6332B}"/>
+          </ac:grpSpMkLst>
+        </pc:grpChg>
+      </pc:sldChg>
+    </pc:docChg>
+  </pc:docChgLst>
+</pc:chgInfo>
+</file>
+
+<file path=ppt/notesMasters/notesMaster1.xml><?xml version="1.0" encoding="utf-8"?>
+<p:notesMaster xmlns:a="http://schemas.openxmlformats.org/drawingml/2006/main" xmlns:r="http://schemas.openxmlformats.org/officeDocument/2006/relationships" xmlns:p="http://schemas.openxmlformats.org/presentationml/2006/main">
+  <p:cSld>
+    <p:bg>
+      <p:bgRef idx="1001">
+        <a:schemeClr val="bg1"/>
+      </p:bgRef>
+    </p:bg>
+    <p:spTree>
+      <p:nvGrpSpPr>
+        <p:cNvPr id="1" name=""/>
+        <p:cNvGrpSpPr/>
+        <p:nvPr/>
+      </p:nvGrpSpPr>
+      <p:grpSpPr>
+        <a:xfrm>
+          <a:off x="0" y="0"/>
+          <a:ext cx="0" cy="0"/>
+          <a:chOff x="0" y="0"/>
+          <a:chExt cx="0" cy="0"/>
+        </a:xfrm>
+      </p:grpSpPr>
+      <p:sp>
+        <p:nvSpPr>
+          <p:cNvPr id="2" name="Marcador de encabezado 1"/>
+          <p:cNvSpPr>
+            <a:spLocks noGrp="1"/>
+          </p:cNvSpPr>
+          <p:nvPr>
+            <p:ph type="hdr" sz="quarter"/>
+          </p:nvPr>
+        </p:nvSpPr>
+        <p:spPr>
+          <a:xfrm>
+            <a:off x="0" y="0"/>
+            <a:ext cx="2971800" cy="458788"/>
+          </a:xfrm>
+          <a:prstGeom prst="rect">
+            <a:avLst/>
+          </a:prstGeom>
+        </p:spPr>
+        <p:txBody>
+          <a:bodyPr vert="horz" lIns="91440" tIns="45720" rIns="91440" bIns="45720" rtlCol="0"/>
+          <a:lstStyle>
+            <a:lvl1pPr algn="l">
+              <a:defRPr sz="1200"/>
+            </a:lvl1pPr>
+          </a:lstStyle>
+          <a:p>
+            <a:endParaRPr lang="es-MX"/>
+          </a:p>
+        </p:txBody>
+      </p:sp>
+      <p:sp>
+        <p:nvSpPr>
+          <p:cNvPr id="3" name="Marcador de fecha 2"/>
+          <p:cNvSpPr>
+            <a:spLocks noGrp="1"/>
+          </p:cNvSpPr>
+          <p:nvPr>
+            <p:ph type="dt" idx="1"/>
+          </p:nvPr>
+        </p:nvSpPr>
+        <p:spPr>
+          <a:xfrm>
+            <a:off x="3884613" y="0"/>
+            <a:ext cx="2971800" cy="458788"/>
+          </a:xfrm>
+          <a:prstGeom prst="rect">
+            <a:avLst/>
+          </a:prstGeom>
+        </p:spPr>
+        <p:txBody>
+          <a:bodyPr vert="horz" lIns="91440" tIns="45720" rIns="91440" bIns="45720" rtlCol="0"/>
+          <a:lstStyle>
+            <a:lvl1pPr algn="r">
+              <a:defRPr sz="1200"/>
+            </a:lvl1pPr>
+          </a:lstStyle>
+          <a:p>
+            <a:fld id="{EBCFCD7E-F3EC-41C1-B937-A5A2090DE6FC}" type="datetimeFigureOut">
+              <a:rPr lang="es-MX" smtClean="0"/>
+              <a:t>23/04/2026</a:t>
+            </a:fld>
+            <a:endParaRPr lang="es-MX"/>
+          </a:p>
+        </p:txBody>
+      </p:sp>
+      <p:sp>
+        <p:nvSpPr>
+          <p:cNvPr id="4" name="Marcador de imagen de diapositiva 3"/>
+          <p:cNvSpPr>
+            <a:spLocks noGrp="1" noRot="1" noChangeAspect="1"/>
+          </p:cNvSpPr>
+          <p:nvPr>
+            <p:ph type="sldImg" idx="2"/>
+          </p:nvPr>
+        </p:nvSpPr>
+        <p:spPr>
+          <a:xfrm>
+            <a:off x="685800" y="1143000"/>
+            <a:ext cx="5486400" cy="3086100"/>
+          </a:xfrm>
+          <a:prstGeom prst="rect">
+            <a:avLst/>
+          </a:prstGeom>
+          <a:noFill/>
+          <a:ln w="12700">
+            <a:solidFill>
+              <a:prstClr val="black"/>
+            </a:solidFill>
+          </a:ln>
+        </p:spPr>
+        <p:txBody>
+          <a:bodyPr vert="horz" lIns="91440" tIns="45720" rIns="91440" bIns="45720" rtlCol="0" anchor="ctr"/>
+          <a:lstStyle/>
+          <a:p>
+            <a:endParaRPr lang="es-MX"/>
+          </a:p>
+        </p:txBody>
+      </p:sp>
+      <p:sp>
+        <p:nvSpPr>
+          <p:cNvPr id="5" name="Marcador de notas 4"/>
+          <p:cNvSpPr>
+            <a:spLocks noGrp="1"/>
+          </p:cNvSpPr>
+          <p:nvPr>
+            <p:ph type="body" sz="quarter" idx="3"/>
+          </p:nvPr>
+        </p:nvSpPr>
+        <p:spPr>
+          <a:xfrm>
+            <a:off x="685800" y="4400550"/>
+            <a:ext cx="5486400" cy="3600450"/>
+          </a:xfrm>
+          <a:prstGeom prst="rect">
+            <a:avLst/>
+          </a:prstGeom>
+        </p:spPr>
+        <p:txBody>
+          <a:bodyPr vert="horz" lIns="91440" tIns="45720" rIns="91440" bIns="45720" rtlCol="0"/>
+          <a:lstStyle/>
+          <a:p>
+            <a:pPr lvl="0"/>
+            <a:r>
+              <a:rPr lang="es-MX"/>
+              <a:t>Haga clic para modificar los estilos de texto del patrón</a:t>
+            </a:r>
+          </a:p>
+          <a:p>
+            <a:pPr lvl="1"/>
+            <a:r>
+              <a:rPr lang="es-MX"/>
+              <a:t>Segundo nivel</a:t>
+            </a:r>
+          </a:p>
+          <a:p>
+            <a:pPr lvl="2"/>
+            <a:r>
+              <a:rPr lang="es-MX"/>
+              <a:t>Tercer nivel</a:t>
+            </a:r>
+          </a:p>
+          <a:p>
+            <a:pPr lvl="3"/>
+            <a:r>
+              <a:rPr lang="es-MX"/>
+              <a:t>Cuarto nivel</a:t>
+            </a:r>
+          </a:p>
+          <a:p>
+            <a:pPr lvl="4"/>
+            <a:r>
+              <a:rPr lang="es-MX"/>
+              <a:t>Quinto nivel</a:t>
+            </a:r>
+          </a:p>
+        </p:txBody>
+      </p:sp>
+      <p:sp>
+        <p:nvSpPr>
+          <p:cNvPr id="6" name="Marcador de pie de página 5"/>
+          <p:cNvSpPr>
+            <a:spLocks noGrp="1"/>
+          </p:cNvSpPr>
+          <p:nvPr>
+            <p:ph type="ftr" sz="quarter" idx="4"/>
+          </p:nvPr>
+        </p:nvSpPr>
+        <p:spPr>
+          <a:xfrm>
+            <a:off x="0" y="8685213"/>
+            <a:ext cx="2971800" cy="458787"/>
+          </a:xfrm>
+          <a:prstGeom prst="rect">
+            <a:avLst/>
+          </a:prstGeom>
+        </p:spPr>
+        <p:txBody>
+          <a:bodyPr vert="horz" lIns="91440" tIns="45720" rIns="91440" bIns="45720" rtlCol="0" anchor="b"/>
+          <a:lstStyle>
+            <a:lvl1pPr algn="l">
+              <a:defRPr sz="1200"/>
+            </a:lvl1pPr>
+          </a:lstStyle>
+          <a:p>
+            <a:endParaRPr lang="es-MX"/>
+          </a:p>
+        </p:txBody>
+      </p:sp>
+      <p:sp>
+        <p:nvSpPr>
+          <p:cNvPr id="7" name="Marcador de número de diapositiva 6"/>
+          <p:cNvSpPr>
+            <a:spLocks noGrp="1"/>
+          </p:cNvSpPr>
+          <p:nvPr>
+            <p:ph type="sldNum" sz="quarter" idx="5"/>
+          </p:nvPr>
+        </p:nvSpPr>
+        <p:spPr>
+          <a:xfrm>
+            <a:off x="3884613" y="8685213"/>
+            <a:ext cx="2971800" cy="458787"/>
+          </a:xfrm>
+          <a:prstGeom prst="rect">
+            <a:avLst/>
+          </a:prstGeom>
+        </p:spPr>
+        <p:txBody>
+          <a:bodyPr vert="horz" lIns="91440" tIns="45720" rIns="91440" bIns="45720" rtlCol="0" anchor="b"/>
+          <a:lstStyle>
+            <a:lvl1pPr algn="r">
+              <a:defRPr sz="1200"/>
+            </a:lvl1pPr>
+          </a:lstStyle>
+          <a:p>
+            <a:fld id="{68263180-F1E6-497C-8622-EE7C8B38226A}" type="slidenum">
+              <a:rPr lang="es-MX" smtClean="0"/>
+              <a:t>‹Nº›</a:t>
+            </a:fld>
+            <a:endParaRPr lang="es-MX"/>
+          </a:p>
+        </p:txBody>
+      </p:sp>
+    </p:spTree>
+    <p:extLst>
+      <p:ext uri="{BB962C8B-B14F-4D97-AF65-F5344CB8AC3E}">
+        <p14:creationId xmlns:p14="http://schemas.microsoft.com/office/powerpoint/2010/main" val="2829381320"/>
+      </p:ext>
+    </p:extLst>
+  </p:cSld>
+  <p:clrMap bg1="lt1" tx1="dk1" bg2="lt2" tx2="dk2" accent1="accent1" accent2="accent2" accent3="accent3" accent4="accent4" accent5="accent5" accent6="accent6" hlink="hlink" folHlink="folHlink"/>
+  <p:notesStyle>
+    <a:lvl1pPr marL="0" algn="l" defTabSz="914400" rtl="0" eaLnBrk="1" latinLnBrk="0" hangingPunct="1">
+      <a:defRPr sz="1200" kern="1200">
+        <a:solidFill>
+          <a:schemeClr val="tx1"/>
+        </a:solidFill>
+        <a:latin typeface="+mn-lt"/>
+        <a:ea typeface="+mn-ea"/>
+        <a:cs typeface="+mn-cs"/>
+      </a:defRPr>
+    </a:lvl1pPr>
+    <a:lvl2pPr marL="457200" algn="l" defTabSz="914400" rtl="0" eaLnBrk="1" latinLnBrk="0" hangingPunct="1">
+      <a:defRPr sz="1200" kern="1200">
+        <a:solidFill>
+          <a:schemeClr val="tx1"/>
+        </a:solidFill>
+        <a:latin typeface="+mn-lt"/>
+        <a:ea typeface="+mn-ea"/>
+        <a:cs typeface="+mn-cs"/>
+      </a:defRPr>
+    </a:lvl2pPr>
+    <a:lvl3pPr marL="914400" algn="l" defTabSz="914400" rtl="0" eaLnBrk="1" latinLnBrk="0" hangingPunct="1">
+      <a:defRPr sz="1200" kern="1200">
+        <a:solidFill>
+          <a:schemeClr val="tx1"/>
+        </a:solidFill>
+        <a:latin typeface="+mn-lt"/>
+        <a:ea typeface="+mn-ea"/>
+        <a:cs typeface="+mn-cs"/>
+      </a:defRPr>
+    </a:lvl3pPr>
+    <a:lvl4pPr marL="1371600" algn="l" defTabSz="914400" rtl="0" eaLnBrk="1" latinLnBrk="0" hangingPunct="1">
+      <a:defRPr sz="1200" kern="1200">
+        <a:solidFill>
+          <a:schemeClr val="tx1"/>
+        </a:solidFill>
+        <a:latin typeface="+mn-lt"/>
+        <a:ea typeface="+mn-ea"/>
+        <a:cs typeface="+mn-cs"/>
+      </a:defRPr>
+    </a:lvl4pPr>
+    <a:lvl5pPr marL="1828800" algn="l" defTabSz="914400" rtl="0" eaLnBrk="1" latinLnBrk="0" hangingPunct="1">
+      <a:defRPr sz="1200" kern="1200">
+        <a:solidFill>
+          <a:schemeClr val="tx1"/>
+        </a:solidFill>
+        <a:latin typeface="+mn-lt"/>
+        <a:ea typeface="+mn-ea"/>
+        <a:cs typeface="+mn-cs"/>
+      </a:defRPr>
+    </a:lvl5pPr>
+    <a:lvl6pPr marL="2286000" algn="l" defTabSz="914400" rtl="0" eaLnBrk="1" latinLnBrk="0" hangingPunct="1">
+      <a:defRPr sz="1200" kern="1200">
+        <a:solidFill>
+          <a:schemeClr val="tx1"/>
+        </a:solidFill>
+        <a:latin typeface="+mn-lt"/>
+        <a:ea typeface="+mn-ea"/>
+        <a:cs typeface="+mn-cs"/>
+      </a:defRPr>
+    </a:lvl6pPr>
+    <a:lvl7pPr marL="2743200" algn="l" defTabSz="914400" rtl="0" eaLnBrk="1" latinLnBrk="0" hangingPunct="1">
+      <a:defRPr sz="1200" kern="1200">
+        <a:solidFill>
+          <a:schemeClr val="tx1"/>
+        </a:solidFill>
+        <a:latin typeface="+mn-lt"/>
+        <a:ea typeface="+mn-ea"/>
+        <a:cs typeface="+mn-cs"/>
+      </a:defRPr>
+    </a:lvl7pPr>
+    <a:lvl8pPr marL="3200400" algn="l" defTabSz="914400" rtl="0" eaLnBrk="1" latinLnBrk="0" hangingPunct="1">
+      <a:defRPr sz="1200" kern="1200">
+        <a:solidFill>
+          <a:schemeClr val="tx1"/>
+        </a:solidFill>
+        <a:latin typeface="+mn-lt"/>
+        <a:ea typeface="+mn-ea"/>
+        <a:cs typeface="+mn-cs"/>
+      </a:defRPr>
+    </a:lvl8pPr>
+    <a:lvl9pPr marL="3657600" algn="l" defTabSz="914400" rtl="0" eaLnBrk="1" latinLnBrk="0" hangingPunct="1">
+      <a:defRPr sz="1200" kern="1200">
+        <a:solidFill>
+          <a:schemeClr val="tx1"/>
+        </a:solidFill>
+        <a:latin typeface="+mn-lt"/>
+        <a:ea typeface="+mn-ea"/>
+        <a:cs typeface="+mn-cs"/>
+      </a:defRPr>
+    </a:lvl9pPr>
+  </p:notesStyle>
+</p:notesMaster>
+</file>
+
+<file path=ppt/notesSlides/notesSlide1.xml><?xml version="1.0" encoding="utf-8"?>
+<p:notes xmlns:a="http://schemas.openxmlformats.org/drawingml/2006/main" xmlns:r="http://schemas.openxmlformats.org/officeDocument/2006/relationships" xmlns:p="http://schemas.openxmlformats.org/presentationml/2006/main">
+  <p:cSld>
+    <p:spTree>
+      <p:nvGrpSpPr>
+        <p:cNvPr id="1" name=""/>
+        <p:cNvGrpSpPr/>
+        <p:nvPr/>
+      </p:nvGrpSpPr>
+      <p:grpSpPr>
+        <a:xfrm>
+          <a:off x="0" y="0"/>
+          <a:ext cx="0" cy="0"/>
+          <a:chOff x="0" y="0"/>
+          <a:chExt cx="0" cy="0"/>
+        </a:xfrm>
+      </p:grpSpPr>
+      <p:sp>
+        <p:nvSpPr>
+          <p:cNvPr id="2" name="Marcador de imagen de diapositiva 1"/>
+          <p:cNvSpPr>
+            <a:spLocks noGrp="1" noRot="1" noChangeAspect="1"/>
+          </p:cNvSpPr>
+          <p:nvPr>
+            <p:ph type="sldImg"/>
+          </p:nvPr>
+        </p:nvSpPr>
+        <p:spPr/>
+        <p:txBody>
+          <a:bodyPr/>
+          <a:lstStyle/>
+          <a:p>
+            <a:endParaRPr lang="es-MX"/>
+          </a:p>
+        </p:txBody>
+      </p:sp>
+      <p:sp>
+        <p:nvSpPr>
+          <p:cNvPr id="3" name="Marcador de notas 2"/>
+          <p:cNvSpPr>
+            <a:spLocks noGrp="1"/>
+          </p:cNvSpPr>
+          <p:nvPr>
+            <p:ph type="body" idx="1"/>
+          </p:nvPr>
+        </p:nvSpPr>
+        <p:spPr/>
+        <p:txBody>
+          <a:bodyPr/>
+          <a:lstStyle/>
+          <a:p>
+            <a:endParaRPr lang="es-MX" dirty="0"/>
+          </a:p>
+        </p:txBody>
+      </p:sp>
+      <p:sp>
+        <p:nvSpPr>
+          <p:cNvPr id="4" name="Marcador de número de diapositiva 3"/>
+          <p:cNvSpPr>
+            <a:spLocks noGrp="1"/>
+          </p:cNvSpPr>
+          <p:nvPr>
+            <p:ph type="sldNum" sz="quarter" idx="5"/>
+          </p:nvPr>
+        </p:nvSpPr>
+        <p:spPr/>
+        <p:txBody>
+          <a:bodyPr/>
+          <a:lstStyle/>
+          <a:p>
+            <a:fld id="{68263180-F1E6-497C-8622-EE7C8B38226A}" type="slidenum">
+              <a:rPr lang="es-MX" smtClean="0"/>
+              <a:t>4</a:t>
+            </a:fld>
+            <a:endParaRPr lang="es-MX"/>
+          </a:p>
+        </p:txBody>
+      </p:sp>
+    </p:spTree>
+    <p:extLst>
+      <p:ext uri="{BB962C8B-B14F-4D97-AF65-F5344CB8AC3E}">
+        <p14:creationId xmlns:p14="http://schemas.microsoft.com/office/powerpoint/2010/main" val="183316147"/>
+      </p:ext>
+    </p:extLst>
+  </p:cSld>
+  <p:clrMapOvr>
+    <a:masterClrMapping/>
+  </p:clrMapOvr>
+</p:notes>
 </file>
 
 <file path=ppt/slideLayouts/slideLayout1.xml><?xml version="1.0" encoding="utf-8"?>
@@ -254,7 +947,7 @@
           <a:p>
             <a:fld id="{3A0812E6-FF2F-4EE5-94A3-B41C09DA71CD}" type="datetimeFigureOut">
               <a:rPr lang="es-MX" smtClean="0"/>
-              <a:t>22/04/2026</a:t>
+              <a:t>23/04/2026</a:t>
             </a:fld>
             <a:endParaRPr lang="es-MX"/>
           </a:p>
@@ -452,7 +1145,7 @@
           <a:p>
             <a:fld id="{3A0812E6-FF2F-4EE5-94A3-B41C09DA71CD}" type="datetimeFigureOut">
               <a:rPr lang="es-MX" smtClean="0"/>
-              <a:t>22/04/2026</a:t>
+              <a:t>23/04/2026</a:t>
             </a:fld>
             <a:endParaRPr lang="es-MX"/>
           </a:p>
@@ -660,7 +1353,7 @@
           <a:p>
             <a:fld id="{3A0812E6-FF2F-4EE5-94A3-B41C09DA71CD}" type="datetimeFigureOut">
               <a:rPr lang="es-MX" smtClean="0"/>
-              <a:t>22/04/2026</a:t>
+              <a:t>23/04/2026</a:t>
             </a:fld>
             <a:endParaRPr lang="es-MX"/>
           </a:p>
@@ -858,7 +1551,7 @@
           <a:p>
             <a:fld id="{3A0812E6-FF2F-4EE5-94A3-B41C09DA71CD}" type="datetimeFigureOut">
               <a:rPr lang="es-MX" smtClean="0"/>
-              <a:t>22/04/2026</a:t>
+              <a:t>23/04/2026</a:t>
             </a:fld>
             <a:endParaRPr lang="es-MX"/>
           </a:p>
@@ -1133,7 +1826,7 @@
           <a:p>
             <a:fld id="{3A0812E6-FF2F-4EE5-94A3-B41C09DA71CD}" type="datetimeFigureOut">
               <a:rPr lang="es-MX" smtClean="0"/>
-              <a:t>22/04/2026</a:t>
+              <a:t>23/04/2026</a:t>
             </a:fld>
             <a:endParaRPr lang="es-MX"/>
           </a:p>
@@ -1398,7 +2091,7 @@
           <a:p>
             <a:fld id="{3A0812E6-FF2F-4EE5-94A3-B41C09DA71CD}" type="datetimeFigureOut">
               <a:rPr lang="es-MX" smtClean="0"/>
-              <a:t>22/04/2026</a:t>
+              <a:t>23/04/2026</a:t>
             </a:fld>
             <a:endParaRPr lang="es-MX"/>
           </a:p>
@@ -1810,7 +2503,7 @@
           <a:p>
             <a:fld id="{3A0812E6-FF2F-4EE5-94A3-B41C09DA71CD}" type="datetimeFigureOut">
               <a:rPr lang="es-MX" smtClean="0"/>
-              <a:t>22/04/2026</a:t>
+              <a:t>23/04/2026</a:t>
             </a:fld>
             <a:endParaRPr lang="es-MX"/>
           </a:p>
@@ -1951,7 +2644,7 @@
           <a:p>
             <a:fld id="{3A0812E6-FF2F-4EE5-94A3-B41C09DA71CD}" type="datetimeFigureOut">
               <a:rPr lang="es-MX" smtClean="0"/>
-              <a:t>22/04/2026</a:t>
+              <a:t>23/04/2026</a:t>
             </a:fld>
             <a:endParaRPr lang="es-MX"/>
           </a:p>
@@ -2064,7 +2757,7 @@
           <a:p>
             <a:fld id="{3A0812E6-FF2F-4EE5-94A3-B41C09DA71CD}" type="datetimeFigureOut">
               <a:rPr lang="es-MX" smtClean="0"/>
-              <a:t>22/04/2026</a:t>
+              <a:t>23/04/2026</a:t>
             </a:fld>
             <a:endParaRPr lang="es-MX"/>
           </a:p>
@@ -2375,7 +3068,7 @@
           <a:p>
             <a:fld id="{3A0812E6-FF2F-4EE5-94A3-B41C09DA71CD}" type="datetimeFigureOut">
               <a:rPr lang="es-MX" smtClean="0"/>
-              <a:t>22/04/2026</a:t>
+              <a:t>23/04/2026</a:t>
             </a:fld>
             <a:endParaRPr lang="es-MX"/>
           </a:p>
@@ -2663,7 +3356,7 @@
           <a:p>
             <a:fld id="{3A0812E6-FF2F-4EE5-94A3-B41C09DA71CD}" type="datetimeFigureOut">
               <a:rPr lang="es-MX" smtClean="0"/>
-              <a:t>22/04/2026</a:t>
+              <a:t>23/04/2026</a:t>
             </a:fld>
             <a:endParaRPr lang="es-MX"/>
           </a:p>
@@ -2740,9 +3433,14 @@
 <p:sldMaster xmlns:a="http://schemas.openxmlformats.org/drawingml/2006/main" xmlns:r="http://schemas.openxmlformats.org/officeDocument/2006/relationships" xmlns:p="http://schemas.openxmlformats.org/presentationml/2006/main">
   <p:cSld>
     <p:bg>
-      <p:bgRef idx="1001">
-        <a:schemeClr val="bg1"/>
-      </p:bgRef>
+      <p:bgPr>
+        <a:solidFill>
+          <a:schemeClr val="accent1">
+            <a:lumMod val="50000"/>
+          </a:schemeClr>
+        </a:solidFill>
+        <a:effectLst/>
+      </p:bgPr>
     </p:bg>
     <p:spTree>
       <p:nvGrpSpPr>
@@ -2904,7 +3602,7 @@
           <a:p>
             <a:fld id="{3A0812E6-FF2F-4EE5-94A3-B41C09DA71CD}" type="datetimeFigureOut">
               <a:rPr lang="es-MX" smtClean="0"/>
-              <a:t>22/04/2026</a:t>
+              <a:t>23/04/2026</a:t>
             </a:fld>
             <a:endParaRPr lang="es-MX"/>
           </a:p>
@@ -3321,41 +4019,837 @@
           <a:chExt cx="0" cy="0"/>
         </a:xfrm>
       </p:grpSpPr>
-      <p:sp>
-        <p:nvSpPr>
-          <p:cNvPr id="2" name="Título 1">
+      <p:grpSp>
+        <p:nvGrpSpPr>
+          <p:cNvPr id="59" name="Grupo 58">
             <a:extLst>
               <a:ext uri="{FF2B5EF4-FFF2-40B4-BE49-F238E27FC236}">
-                <a16:creationId xmlns:a16="http://schemas.microsoft.com/office/drawing/2014/main" id="{905EF4A3-04E3-6D35-25DB-C35468A14AEF}"/>
+                <a16:creationId xmlns:a16="http://schemas.microsoft.com/office/drawing/2014/main" id="{C7E6EA07-D366-8BCB-0699-C09E3B5DFCC0}"/>
               </a:ext>
             </a:extLst>
           </p:cNvPr>
-          <p:cNvSpPr>
-            <a:spLocks noGrp="1"/>
-          </p:cNvSpPr>
-          <p:nvPr>
-            <p:ph type="ctrTitle"/>
-          </p:nvPr>
+          <p:cNvGrpSpPr/>
+          <p:nvPr/>
+        </p:nvGrpSpPr>
+        <p:grpSpPr>
+          <a:xfrm>
+            <a:off x="1784883" y="576440"/>
+            <a:ext cx="12007317" cy="1143288"/>
+            <a:chOff x="1784883" y="576440"/>
+            <a:chExt cx="12007317" cy="1143288"/>
+          </a:xfrm>
+        </p:grpSpPr>
+        <p:sp>
+          <p:nvSpPr>
+            <p:cNvPr id="34" name="CuadroTexto 33">
+              <a:extLst>
+                <a:ext uri="{FF2B5EF4-FFF2-40B4-BE49-F238E27FC236}">
+                  <a16:creationId xmlns:a16="http://schemas.microsoft.com/office/drawing/2014/main" id="{EFBD169F-F637-31FA-E5CB-5E5B04277D2C}"/>
+                </a:ext>
+              </a:extLst>
+            </p:cNvPr>
+            <p:cNvSpPr txBox="1"/>
+            <p:nvPr/>
+          </p:nvSpPr>
+          <p:spPr>
+            <a:xfrm>
+              <a:off x="3994690" y="576440"/>
+              <a:ext cx="8197310" cy="584775"/>
+            </a:xfrm>
+            <a:prstGeom prst="rect">
+              <a:avLst/>
+            </a:prstGeom>
+            <a:noFill/>
+          </p:spPr>
+          <p:txBody>
+            <a:bodyPr wrap="square" rtlCol="0">
+              <a:spAutoFit/>
+            </a:bodyPr>
+            <a:lstStyle/>
+            <a:p>
+              <a:r>
+                <a:rPr lang="es-MX" sz="3200" b="1" noProof="0" dirty="0">
+                  <a:solidFill>
+                    <a:schemeClr val="bg1"/>
+                  </a:solidFill>
+                </a:rPr>
+                <a:t>Universidad Autónoma de Chimalhuacán</a:t>
+              </a:r>
+            </a:p>
+          </p:txBody>
+        </p:sp>
+        <p:sp>
+          <p:nvSpPr>
+            <p:cNvPr id="40" name="Signo menos 39">
+              <a:extLst>
+                <a:ext uri="{FF2B5EF4-FFF2-40B4-BE49-F238E27FC236}">
+                  <a16:creationId xmlns:a16="http://schemas.microsoft.com/office/drawing/2014/main" id="{8BEDDF55-14BB-E217-4558-34906505ECA3}"/>
+                </a:ext>
+              </a:extLst>
+            </p:cNvPr>
+            <p:cNvSpPr/>
+            <p:nvPr/>
+          </p:nvSpPr>
+          <p:spPr>
+            <a:xfrm>
+              <a:off x="1784883" y="868828"/>
+              <a:ext cx="12007317" cy="850900"/>
+            </a:xfrm>
+            <a:prstGeom prst="mathMinus">
+              <a:avLst/>
+            </a:prstGeom>
+            <a:solidFill>
+              <a:schemeClr val="bg1"/>
+            </a:solidFill>
+          </p:spPr>
+          <p:style>
+            <a:lnRef idx="2">
+              <a:schemeClr val="accent1">
+                <a:shade val="15000"/>
+              </a:schemeClr>
+            </a:lnRef>
+            <a:fillRef idx="1">
+              <a:schemeClr val="accent1"/>
+            </a:fillRef>
+            <a:effectRef idx="0">
+              <a:schemeClr val="accent1"/>
+            </a:effectRef>
+            <a:fontRef idx="minor">
+              <a:schemeClr val="lt1"/>
+            </a:fontRef>
+          </p:style>
+          <p:txBody>
+            <a:bodyPr rtlCol="0" anchor="ctr"/>
+            <a:lstStyle/>
+            <a:p>
+              <a:pPr algn="ctr"/>
+              <a:endParaRPr lang="es-MX" noProof="0" dirty="0"/>
+            </a:p>
+          </p:txBody>
+        </p:sp>
+      </p:grpSp>
+      <p:pic>
+        <p:nvPicPr>
+          <p:cNvPr id="52" name="Imagen 51">
+            <a:extLst>
+              <a:ext uri="{FF2B5EF4-FFF2-40B4-BE49-F238E27FC236}">
+                <a16:creationId xmlns:a16="http://schemas.microsoft.com/office/drawing/2014/main" id="{A95C7DD7-3CE8-EE6A-5BC0-1BC0FC328A2A}"/>
+              </a:ext>
+            </a:extLst>
+          </p:cNvPr>
+          <p:cNvPicPr>
+            <a:picLocks noChangeAspect="1"/>
+          </p:cNvPicPr>
+          <p:nvPr/>
+        </p:nvPicPr>
+        <p:blipFill>
+          <a:blip r:embed="rId2">
+            <a:alphaModFix/>
+            <a:extLst>
+              <a:ext uri="{28A0092B-C50C-407E-A947-70E740481C1C}">
+                <a14:useLocalDpi xmlns:a14="http://schemas.microsoft.com/office/drawing/2010/main" val="0"/>
+              </a:ext>
+            </a:extLst>
+          </a:blip>
+          <a:stretch>
+            <a:fillRect/>
+          </a:stretch>
+        </p:blipFill>
+        <p:spPr>
+          <a:xfrm>
+            <a:off x="5765800" y="1600170"/>
+            <a:ext cx="6337300" cy="3911630"/>
+          </a:xfrm>
+          <a:prstGeom prst="roundRect">
+            <a:avLst>
+              <a:gd name="adj" fmla="val 8594"/>
+            </a:avLst>
+          </a:prstGeom>
+          <a:solidFill>
+            <a:srgbClr val="FFFFFF">
+              <a:shade val="85000"/>
+            </a:srgbClr>
+          </a:solidFill>
+          <a:ln>
+            <a:noFill/>
+          </a:ln>
+          <a:effectLst>
+            <a:reflection blurRad="12700" stA="38000" endPos="28000" dist="5000" dir="5400000" sy="-100000" algn="bl" rotWithShape="0"/>
+          </a:effectLst>
+        </p:spPr>
+      </p:pic>
+      <p:sp>
+        <p:nvSpPr>
+          <p:cNvPr id="53" name="CuadroTexto 52">
+            <a:extLst>
+              <a:ext uri="{FF2B5EF4-FFF2-40B4-BE49-F238E27FC236}">
+                <a16:creationId xmlns:a16="http://schemas.microsoft.com/office/drawing/2014/main" id="{8BC7D8B2-26F4-578D-4D9E-F121942943FF}"/>
+              </a:ext>
+            </a:extLst>
+          </p:cNvPr>
+          <p:cNvSpPr txBox="1"/>
+          <p:nvPr/>
         </p:nvSpPr>
         <p:spPr>
           <a:xfrm>
-            <a:off x="-200026" y="981074"/>
-            <a:ext cx="5572125" cy="542925"/>
+            <a:off x="1587500" y="2621481"/>
+            <a:ext cx="3721100" cy="2308324"/>
           </a:xfrm>
+          <a:prstGeom prst="rect">
+            <a:avLst/>
+          </a:prstGeom>
+          <a:noFill/>
         </p:spPr>
         <p:txBody>
-          <a:bodyPr>
-            <a:noAutofit/>
+          <a:bodyPr wrap="square" rtlCol="0">
+            <a:spAutoFit/>
           </a:bodyPr>
           <a:lstStyle/>
           <a:p>
-            <a:r>
-              <a:rPr lang="es-MX" sz="3200" dirty="0"/>
-              <a:t> Inicio de sesión</a:t>
+            <a:pPr algn="just"/>
+            <a:r>
+              <a:rPr lang="es-MX" sz="2400" noProof="0" dirty="0">
+                <a:solidFill>
+                  <a:schemeClr val="bg1"/>
+                </a:solidFill>
+              </a:rPr>
+              <a:t>A continuación les presentaremos el proyecto del </a:t>
+            </a:r>
+            <a:r>
+              <a:rPr lang="es-MX" sz="2400" noProof="0" dirty="0" err="1">
+                <a:solidFill>
+                  <a:schemeClr val="bg1"/>
+                </a:solidFill>
+              </a:rPr>
+              <a:t>layout</a:t>
+            </a:r>
+            <a:r>
+              <a:rPr lang="es-MX" sz="2400" noProof="0" dirty="0">
+                <a:solidFill>
+                  <a:schemeClr val="bg1"/>
+                </a:solidFill>
+              </a:rPr>
+              <a:t> que realizamos, tomando como inspiración a la unidad académica de Chimalhuacán </a:t>
             </a:r>
           </a:p>
         </p:txBody>
       </p:sp>
+      <p:grpSp>
+        <p:nvGrpSpPr>
+          <p:cNvPr id="54" name="Grupo 53">
+            <a:extLst>
+              <a:ext uri="{FF2B5EF4-FFF2-40B4-BE49-F238E27FC236}">
+                <a16:creationId xmlns:a16="http://schemas.microsoft.com/office/drawing/2014/main" id="{D3EF9314-79B2-0BB1-BCEA-296DBD1D8C82}"/>
+              </a:ext>
+            </a:extLst>
+          </p:cNvPr>
+          <p:cNvGrpSpPr/>
+          <p:nvPr/>
+        </p:nvGrpSpPr>
+        <p:grpSpPr>
+          <a:xfrm rot="10357571">
+            <a:off x="-2696177" y="-2130872"/>
+            <a:ext cx="4990758" cy="4814628"/>
+            <a:chOff x="3193545" y="755695"/>
+            <a:chExt cx="5631572" cy="5162331"/>
+          </a:xfrm>
+        </p:grpSpPr>
+        <p:sp>
+          <p:nvSpPr>
+            <p:cNvPr id="55" name="Forma libre: forma 54">
+              <a:extLst>
+                <a:ext uri="{FF2B5EF4-FFF2-40B4-BE49-F238E27FC236}">
+                  <a16:creationId xmlns:a16="http://schemas.microsoft.com/office/drawing/2014/main" id="{2BD0941E-095F-5BE9-0805-BA84356139E3}"/>
+                </a:ext>
+              </a:extLst>
+            </p:cNvPr>
+            <p:cNvSpPr/>
+            <p:nvPr/>
+          </p:nvSpPr>
+          <p:spPr>
+            <a:xfrm rot="16200000">
+              <a:off x="6252808" y="619749"/>
+              <a:ext cx="2431751" cy="2703643"/>
+            </a:xfrm>
+            <a:custGeom>
+              <a:avLst/>
+              <a:gdLst>
+                <a:gd name="csX0" fmla="*/ 2431751 w 2431751"/>
+                <a:gd name="csY0" fmla="*/ 0 h 2703643"/>
+                <a:gd name="csX1" fmla="*/ 2423380 w 2431751"/>
+                <a:gd name="csY1" fmla="*/ 180735 h 2703643"/>
+                <a:gd name="csX2" fmla="*/ 115004 w 2431751"/>
+                <a:gd name="csY2" fmla="*/ 2697312 h 2703643"/>
+                <a:gd name="csX3" fmla="*/ 0 w 2431751"/>
+                <a:gd name="csY3" fmla="*/ 2703643 h 2703643"/>
+                <a:gd name="csX4" fmla="*/ 0 w 2431751"/>
+                <a:gd name="csY4" fmla="*/ 2058844 h 2703643"/>
+                <a:gd name="csX5" fmla="*/ 49100 w 2431751"/>
+                <a:gd name="csY5" fmla="*/ 2056067 h 2703643"/>
+                <a:gd name="csX6" fmla="*/ 1782136 w 2431751"/>
+                <a:gd name="csY6" fmla="*/ 114830 h 2703643"/>
+                <a:gd name="csX7" fmla="*/ 1787313 w 2431751"/>
+                <a:gd name="csY7" fmla="*/ 0 h 2703643"/>
+                <a:gd name="csX8" fmla="*/ 2431751 w 2431751"/>
+                <a:gd name="csY8" fmla="*/ 0 h 2703643"/>
+              </a:gdLst>
+              <a:ahLst/>
+              <a:cxnLst>
+                <a:cxn ang="0">
+                  <a:pos x="csX0" y="csY0"/>
+                </a:cxn>
+                <a:cxn ang="0">
+                  <a:pos x="csX1" y="csY1"/>
+                </a:cxn>
+                <a:cxn ang="0">
+                  <a:pos x="csX2" y="csY2"/>
+                </a:cxn>
+                <a:cxn ang="0">
+                  <a:pos x="csX3" y="csY3"/>
+                </a:cxn>
+                <a:cxn ang="0">
+                  <a:pos x="csX4" y="csY4"/>
+                </a:cxn>
+                <a:cxn ang="0">
+                  <a:pos x="csX5" y="csY5"/>
+                </a:cxn>
+                <a:cxn ang="0">
+                  <a:pos x="csX6" y="csY6"/>
+                </a:cxn>
+                <a:cxn ang="0">
+                  <a:pos x="csX7" y="csY7"/>
+                </a:cxn>
+                <a:cxn ang="0">
+                  <a:pos x="csX8" y="csY8"/>
+                </a:cxn>
+              </a:cxnLst>
+              <a:rect l="l" t="t" r="r" b="b"/>
+              <a:pathLst>
+                <a:path w="2431751" h="2703643">
+                  <a:moveTo>
+                    <a:pt x="2431751" y="0"/>
+                  </a:moveTo>
+                  <a:lnTo>
+                    <a:pt x="2423380" y="180735"/>
+                  </a:lnTo>
+                  <a:cubicBezTo>
+                    <a:pt x="2299773" y="1507655"/>
+                    <a:pt x="1332145" y="2562556"/>
+                    <a:pt x="115004" y="2697312"/>
+                  </a:cubicBezTo>
+                  <a:lnTo>
+                    <a:pt x="0" y="2703643"/>
+                  </a:lnTo>
+                  <a:lnTo>
+                    <a:pt x="0" y="2058844"/>
+                  </a:lnTo>
+                  <a:lnTo>
+                    <a:pt x="49100" y="2056067"/>
+                  </a:lnTo>
+                  <a:cubicBezTo>
+                    <a:pt x="962881" y="1952119"/>
+                    <a:pt x="1689336" y="1138389"/>
+                    <a:pt x="1782136" y="114830"/>
+                  </a:cubicBezTo>
+                  <a:lnTo>
+                    <a:pt x="1787313" y="0"/>
+                  </a:lnTo>
+                  <a:lnTo>
+                    <a:pt x="2431751" y="0"/>
+                  </a:lnTo>
+                  <a:close/>
+                </a:path>
+              </a:pathLst>
+            </a:custGeom>
+          </p:spPr>
+          <p:style>
+            <a:lnRef idx="2">
+              <a:schemeClr val="accent1">
+                <a:shade val="15000"/>
+              </a:schemeClr>
+            </a:lnRef>
+            <a:fillRef idx="1">
+              <a:schemeClr val="accent1"/>
+            </a:fillRef>
+            <a:effectRef idx="0">
+              <a:schemeClr val="accent1"/>
+            </a:effectRef>
+            <a:fontRef idx="minor">
+              <a:schemeClr val="lt1"/>
+            </a:fontRef>
+          </p:style>
+          <p:txBody>
+            <a:bodyPr wrap="square" rtlCol="0" anchor="ctr">
+              <a:noAutofit/>
+            </a:bodyPr>
+            <a:lstStyle/>
+            <a:p>
+              <a:pPr algn="ctr"/>
+              <a:endParaRPr lang="es-MX" noProof="0" dirty="0"/>
+            </a:p>
+          </p:txBody>
+        </p:sp>
+        <p:sp>
+          <p:nvSpPr>
+            <p:cNvPr id="56" name="Forma libre: forma 55">
+              <a:extLst>
+                <a:ext uri="{FF2B5EF4-FFF2-40B4-BE49-F238E27FC236}">
+                  <a16:creationId xmlns:a16="http://schemas.microsoft.com/office/drawing/2014/main" id="{87E06037-D494-6E9F-9986-85B22C13A20A}"/>
+                </a:ext>
+              </a:extLst>
+            </p:cNvPr>
+            <p:cNvSpPr/>
+            <p:nvPr/>
+          </p:nvSpPr>
+          <p:spPr>
+            <a:xfrm rot="16200000">
+              <a:off x="3334100" y="619750"/>
+              <a:ext cx="2431751" cy="2703641"/>
+            </a:xfrm>
+            <a:custGeom>
+              <a:avLst/>
+              <a:gdLst>
+                <a:gd name="csX0" fmla="*/ 2431751 w 2431751"/>
+                <a:gd name="csY0" fmla="*/ 2703641 h 2703641"/>
+                <a:gd name="csX1" fmla="*/ 1787313 w 2431751"/>
+                <a:gd name="csY1" fmla="*/ 2703641 h 2703641"/>
+                <a:gd name="csX2" fmla="*/ 1782136 w 2431751"/>
+                <a:gd name="csY2" fmla="*/ 2588811 h 2703641"/>
+                <a:gd name="csX3" fmla="*/ 49100 w 2431751"/>
+                <a:gd name="csY3" fmla="*/ 647574 h 2703641"/>
+                <a:gd name="csX4" fmla="*/ 0 w 2431751"/>
+                <a:gd name="csY4" fmla="*/ 644797 h 2703641"/>
+                <a:gd name="csX5" fmla="*/ 0 w 2431751"/>
+                <a:gd name="csY5" fmla="*/ 0 h 2703641"/>
+                <a:gd name="csX6" fmla="*/ 115004 w 2431751"/>
+                <a:gd name="csY6" fmla="*/ 6331 h 2703641"/>
+                <a:gd name="csX7" fmla="*/ 2423380 w 2431751"/>
+                <a:gd name="csY7" fmla="*/ 2522908 h 2703641"/>
+                <a:gd name="csX8" fmla="*/ 2431751 w 2431751"/>
+                <a:gd name="csY8" fmla="*/ 2703641 h 2703641"/>
+              </a:gdLst>
+              <a:ahLst/>
+              <a:cxnLst>
+                <a:cxn ang="0">
+                  <a:pos x="csX0" y="csY0"/>
+                </a:cxn>
+                <a:cxn ang="0">
+                  <a:pos x="csX1" y="csY1"/>
+                </a:cxn>
+                <a:cxn ang="0">
+                  <a:pos x="csX2" y="csY2"/>
+                </a:cxn>
+                <a:cxn ang="0">
+                  <a:pos x="csX3" y="csY3"/>
+                </a:cxn>
+                <a:cxn ang="0">
+                  <a:pos x="csX4" y="csY4"/>
+                </a:cxn>
+                <a:cxn ang="0">
+                  <a:pos x="csX5" y="csY5"/>
+                </a:cxn>
+                <a:cxn ang="0">
+                  <a:pos x="csX6" y="csY6"/>
+                </a:cxn>
+                <a:cxn ang="0">
+                  <a:pos x="csX7" y="csY7"/>
+                </a:cxn>
+                <a:cxn ang="0">
+                  <a:pos x="csX8" y="csY8"/>
+                </a:cxn>
+              </a:cxnLst>
+              <a:rect l="l" t="t" r="r" b="b"/>
+              <a:pathLst>
+                <a:path w="2431751" h="2703641">
+                  <a:moveTo>
+                    <a:pt x="2431751" y="2703641"/>
+                  </a:moveTo>
+                  <a:lnTo>
+                    <a:pt x="1787313" y="2703641"/>
+                  </a:lnTo>
+                  <a:lnTo>
+                    <a:pt x="1782136" y="2588811"/>
+                  </a:lnTo>
+                  <a:cubicBezTo>
+                    <a:pt x="1689336" y="1565252"/>
+                    <a:pt x="962881" y="751523"/>
+                    <a:pt x="49100" y="647574"/>
+                  </a:cubicBezTo>
+                  <a:lnTo>
+                    <a:pt x="0" y="644797"/>
+                  </a:lnTo>
+                  <a:lnTo>
+                    <a:pt x="0" y="0"/>
+                  </a:lnTo>
+                  <a:lnTo>
+                    <a:pt x="115004" y="6331"/>
+                  </a:lnTo>
+                  <a:cubicBezTo>
+                    <a:pt x="1332146" y="141087"/>
+                    <a:pt x="2299773" y="1195988"/>
+                    <a:pt x="2423380" y="2522908"/>
+                  </a:cubicBezTo>
+                  <a:lnTo>
+                    <a:pt x="2431751" y="2703641"/>
+                  </a:lnTo>
+                  <a:close/>
+                </a:path>
+              </a:pathLst>
+            </a:custGeom>
+            <a:blipFill dpi="0" rotWithShape="1">
+              <a:blip r:embed="rId2">
+                <a:extLst>
+                  <a:ext uri="{28A0092B-C50C-407E-A947-70E740481C1C}">
+                    <a14:useLocalDpi xmlns:a14="http://schemas.microsoft.com/office/drawing/2010/main" val="0"/>
+                  </a:ext>
+                </a:extLst>
+              </a:blip>
+              <a:srcRect/>
+              <a:stretch>
+                <a:fillRect/>
+              </a:stretch>
+            </a:blipFill>
+          </p:spPr>
+          <p:style>
+            <a:lnRef idx="2">
+              <a:schemeClr val="accent1">
+                <a:shade val="15000"/>
+              </a:schemeClr>
+            </a:lnRef>
+            <a:fillRef idx="1">
+              <a:schemeClr val="accent1"/>
+            </a:fillRef>
+            <a:effectRef idx="0">
+              <a:schemeClr val="accent1"/>
+            </a:effectRef>
+            <a:fontRef idx="minor">
+              <a:schemeClr val="lt1"/>
+            </a:fontRef>
+          </p:style>
+          <p:txBody>
+            <a:bodyPr wrap="square" rtlCol="0" anchor="ctr">
+              <a:noAutofit/>
+            </a:bodyPr>
+            <a:lstStyle/>
+            <a:p>
+              <a:pPr algn="ctr"/>
+              <a:endParaRPr lang="es-MX" noProof="0" dirty="0"/>
+            </a:p>
+          </p:txBody>
+        </p:sp>
+        <p:sp>
+          <p:nvSpPr>
+            <p:cNvPr id="57" name="Forma libre: forma 56">
+              <a:extLst>
+                <a:ext uri="{FF2B5EF4-FFF2-40B4-BE49-F238E27FC236}">
+                  <a16:creationId xmlns:a16="http://schemas.microsoft.com/office/drawing/2014/main" id="{B9FE3636-C524-8C9E-13ED-DF907135BBB9}"/>
+                </a:ext>
+              </a:extLst>
+            </p:cNvPr>
+            <p:cNvSpPr/>
+            <p:nvPr/>
+          </p:nvSpPr>
+          <p:spPr>
+            <a:xfrm rot="16200000">
+              <a:off x="3289913" y="3306143"/>
+              <a:ext cx="2515515" cy="2708252"/>
+            </a:xfrm>
+            <a:custGeom>
+              <a:avLst/>
+              <a:gdLst>
+                <a:gd name="csX0" fmla="*/ 2515515 w 2515515"/>
+                <a:gd name="csY0" fmla="*/ 0 h 2708252"/>
+                <a:gd name="csX1" fmla="*/ 2515515 w 2515515"/>
+                <a:gd name="csY1" fmla="*/ 644670 h 2708252"/>
+                <a:gd name="csX2" fmla="*/ 2382651 w 2515515"/>
+                <a:gd name="csY2" fmla="*/ 652185 h 2708252"/>
+                <a:gd name="csX3" fmla="*/ 649615 w 2515515"/>
+                <a:gd name="csY3" fmla="*/ 2593422 h 2708252"/>
+                <a:gd name="csX4" fmla="*/ 644439 w 2515515"/>
+                <a:gd name="csY4" fmla="*/ 2708252 h 2708252"/>
+                <a:gd name="csX5" fmla="*/ 0 w 2515515"/>
+                <a:gd name="csY5" fmla="*/ 2708252 h 2708252"/>
+                <a:gd name="csX6" fmla="*/ 8371 w 2515515"/>
+                <a:gd name="csY6" fmla="*/ 2527519 h 2708252"/>
+                <a:gd name="csX7" fmla="*/ 2316747 w 2515515"/>
+                <a:gd name="csY7" fmla="*/ 10942 h 2708252"/>
+                <a:gd name="csX8" fmla="*/ 2515515 w 2515515"/>
+                <a:gd name="csY8" fmla="*/ 0 h 2708252"/>
+              </a:gdLst>
+              <a:ahLst/>
+              <a:cxnLst>
+                <a:cxn ang="0">
+                  <a:pos x="csX0" y="csY0"/>
+                </a:cxn>
+                <a:cxn ang="0">
+                  <a:pos x="csX1" y="csY1"/>
+                </a:cxn>
+                <a:cxn ang="0">
+                  <a:pos x="csX2" y="csY2"/>
+                </a:cxn>
+                <a:cxn ang="0">
+                  <a:pos x="csX3" y="csY3"/>
+                </a:cxn>
+                <a:cxn ang="0">
+                  <a:pos x="csX4" y="csY4"/>
+                </a:cxn>
+                <a:cxn ang="0">
+                  <a:pos x="csX5" y="csY5"/>
+                </a:cxn>
+                <a:cxn ang="0">
+                  <a:pos x="csX6" y="csY6"/>
+                </a:cxn>
+                <a:cxn ang="0">
+                  <a:pos x="csX7" y="csY7"/>
+                </a:cxn>
+                <a:cxn ang="0">
+                  <a:pos x="csX8" y="csY8"/>
+                </a:cxn>
+              </a:cxnLst>
+              <a:rect l="l" t="t" r="r" b="b"/>
+              <a:pathLst>
+                <a:path w="2515515" h="2708252">
+                  <a:moveTo>
+                    <a:pt x="2515515" y="0"/>
+                  </a:moveTo>
+                  <a:lnTo>
+                    <a:pt x="2515515" y="644670"/>
+                  </a:lnTo>
+                  <a:lnTo>
+                    <a:pt x="2382651" y="652185"/>
+                  </a:lnTo>
+                  <a:cubicBezTo>
+                    <a:pt x="1468871" y="756133"/>
+                    <a:pt x="742415" y="1569863"/>
+                    <a:pt x="649615" y="2593422"/>
+                  </a:cubicBezTo>
+                  <a:lnTo>
+                    <a:pt x="644439" y="2708252"/>
+                  </a:lnTo>
+                  <a:lnTo>
+                    <a:pt x="0" y="2708252"/>
+                  </a:lnTo>
+                  <a:lnTo>
+                    <a:pt x="8371" y="2527519"/>
+                  </a:lnTo>
+                  <a:cubicBezTo>
+                    <a:pt x="131979" y="1200599"/>
+                    <a:pt x="1099606" y="145698"/>
+                    <a:pt x="2316747" y="10942"/>
+                  </a:cubicBezTo>
+                  <a:lnTo>
+                    <a:pt x="2515515" y="0"/>
+                  </a:lnTo>
+                  <a:close/>
+                </a:path>
+              </a:pathLst>
+            </a:custGeom>
+          </p:spPr>
+          <p:style>
+            <a:lnRef idx="2">
+              <a:schemeClr val="accent1">
+                <a:shade val="15000"/>
+              </a:schemeClr>
+            </a:lnRef>
+            <a:fillRef idx="1">
+              <a:schemeClr val="accent1"/>
+            </a:fillRef>
+            <a:effectRef idx="0">
+              <a:schemeClr val="accent1"/>
+            </a:effectRef>
+            <a:fontRef idx="minor">
+              <a:schemeClr val="lt1"/>
+            </a:fontRef>
+          </p:style>
+          <p:txBody>
+            <a:bodyPr wrap="square" rtlCol="0" anchor="ctr">
+              <a:noAutofit/>
+            </a:bodyPr>
+            <a:lstStyle/>
+            <a:p>
+              <a:pPr algn="ctr"/>
+              <a:endParaRPr lang="es-MX" noProof="0" dirty="0"/>
+            </a:p>
+          </p:txBody>
+        </p:sp>
+        <p:sp>
+          <p:nvSpPr>
+            <p:cNvPr id="58" name="Forma libre: forma 57">
+              <a:extLst>
+                <a:ext uri="{FF2B5EF4-FFF2-40B4-BE49-F238E27FC236}">
+                  <a16:creationId xmlns:a16="http://schemas.microsoft.com/office/drawing/2014/main" id="{A05EEB58-AB6F-AD69-F0D6-BD43185CB2AA}"/>
+                </a:ext>
+              </a:extLst>
+            </p:cNvPr>
+            <p:cNvSpPr/>
+            <p:nvPr/>
+          </p:nvSpPr>
+          <p:spPr>
+            <a:xfrm rot="16200000">
+              <a:off x="6213232" y="3306142"/>
+              <a:ext cx="2515515" cy="2708254"/>
+            </a:xfrm>
+            <a:custGeom>
+              <a:avLst/>
+              <a:gdLst>
+                <a:gd name="csX0" fmla="*/ 2515515 w 2515515"/>
+                <a:gd name="csY0" fmla="*/ 2063582 h 2708254"/>
+                <a:gd name="csX1" fmla="*/ 2515515 w 2515515"/>
+                <a:gd name="csY1" fmla="*/ 2708254 h 2708254"/>
+                <a:gd name="csX2" fmla="*/ 2316747 w 2515515"/>
+                <a:gd name="csY2" fmla="*/ 2697312 h 2708254"/>
+                <a:gd name="csX3" fmla="*/ 8371 w 2515515"/>
+                <a:gd name="csY3" fmla="*/ 180735 h 2708254"/>
+                <a:gd name="csX4" fmla="*/ 0 w 2515515"/>
+                <a:gd name="csY4" fmla="*/ 0 h 2708254"/>
+                <a:gd name="csX5" fmla="*/ 644439 w 2515515"/>
+                <a:gd name="csY5" fmla="*/ 0 h 2708254"/>
+                <a:gd name="csX6" fmla="*/ 649615 w 2515515"/>
+                <a:gd name="csY6" fmla="*/ 114830 h 2708254"/>
+                <a:gd name="csX7" fmla="*/ 2382651 w 2515515"/>
+                <a:gd name="csY7" fmla="*/ 2056067 h 2708254"/>
+                <a:gd name="csX8" fmla="*/ 2515515 w 2515515"/>
+                <a:gd name="csY8" fmla="*/ 2063582 h 2708254"/>
+              </a:gdLst>
+              <a:ahLst/>
+              <a:cxnLst>
+                <a:cxn ang="0">
+                  <a:pos x="csX0" y="csY0"/>
+                </a:cxn>
+                <a:cxn ang="0">
+                  <a:pos x="csX1" y="csY1"/>
+                </a:cxn>
+                <a:cxn ang="0">
+                  <a:pos x="csX2" y="csY2"/>
+                </a:cxn>
+                <a:cxn ang="0">
+                  <a:pos x="csX3" y="csY3"/>
+                </a:cxn>
+                <a:cxn ang="0">
+                  <a:pos x="csX4" y="csY4"/>
+                </a:cxn>
+                <a:cxn ang="0">
+                  <a:pos x="csX5" y="csY5"/>
+                </a:cxn>
+                <a:cxn ang="0">
+                  <a:pos x="csX6" y="csY6"/>
+                </a:cxn>
+                <a:cxn ang="0">
+                  <a:pos x="csX7" y="csY7"/>
+                </a:cxn>
+                <a:cxn ang="0">
+                  <a:pos x="csX8" y="csY8"/>
+                </a:cxn>
+              </a:cxnLst>
+              <a:rect l="l" t="t" r="r" b="b"/>
+              <a:pathLst>
+                <a:path w="2515515" h="2708254">
+                  <a:moveTo>
+                    <a:pt x="2515515" y="2063582"/>
+                  </a:moveTo>
+                  <a:lnTo>
+                    <a:pt x="2515515" y="2708254"/>
+                  </a:lnTo>
+                  <a:lnTo>
+                    <a:pt x="2316747" y="2697312"/>
+                  </a:lnTo>
+                  <a:cubicBezTo>
+                    <a:pt x="1099605" y="2562556"/>
+                    <a:pt x="131978" y="1507655"/>
+                    <a:pt x="8371" y="180735"/>
+                  </a:cubicBezTo>
+                  <a:lnTo>
+                    <a:pt x="0" y="0"/>
+                  </a:lnTo>
+                  <a:lnTo>
+                    <a:pt x="644439" y="0"/>
+                  </a:lnTo>
+                  <a:lnTo>
+                    <a:pt x="649615" y="114830"/>
+                  </a:lnTo>
+                  <a:cubicBezTo>
+                    <a:pt x="742415" y="1138389"/>
+                    <a:pt x="1468870" y="1952119"/>
+                    <a:pt x="2382651" y="2056067"/>
+                  </a:cubicBezTo>
+                  <a:lnTo>
+                    <a:pt x="2515515" y="2063582"/>
+                  </a:lnTo>
+                  <a:close/>
+                </a:path>
+              </a:pathLst>
+            </a:custGeom>
+          </p:spPr>
+          <p:style>
+            <a:lnRef idx="2">
+              <a:schemeClr val="accent1">
+                <a:shade val="15000"/>
+              </a:schemeClr>
+            </a:lnRef>
+            <a:fillRef idx="1">
+              <a:schemeClr val="accent1"/>
+            </a:fillRef>
+            <a:effectRef idx="0">
+              <a:schemeClr val="accent1"/>
+            </a:effectRef>
+            <a:fontRef idx="minor">
+              <a:schemeClr val="lt1"/>
+            </a:fontRef>
+          </p:style>
+          <p:txBody>
+            <a:bodyPr wrap="square" rtlCol="0" anchor="ctr">
+              <a:noAutofit/>
+            </a:bodyPr>
+            <a:lstStyle/>
+            <a:p>
+              <a:pPr algn="ctr"/>
+              <a:endParaRPr lang="es-MX" noProof="0" dirty="0"/>
+            </a:p>
+          </p:txBody>
+        </p:sp>
+      </p:grpSp>
+    </p:spTree>
+    <p:extLst>
+      <p:ext uri="{BB962C8B-B14F-4D97-AF65-F5344CB8AC3E}">
+        <p14:creationId xmlns:p14="http://schemas.microsoft.com/office/powerpoint/2010/main" val="1195846946"/>
+      </p:ext>
+    </p:extLst>
+  </p:cSld>
+  <p:clrMapOvr>
+    <a:masterClrMapping/>
+  </p:clrMapOvr>
+  <mc:AlternateContent xmlns:mc="http://schemas.openxmlformats.org/markup-compatibility/2006" xmlns:p159="http://schemas.microsoft.com/office/powerpoint/2015/09/main">
+    <mc:Choice Requires="p159">
+      <p:transition xmlns:p14="http://schemas.microsoft.com/office/powerpoint/2010/main" spd="slow" p14:dur="2000">
+        <p159:morph option="byObject"/>
+      </p:transition>
+    </mc:Choice>
+    <mc:Fallback xmlns="">
+      <p:transition spd="slow">
+        <p:fade/>
+      </p:transition>
+    </mc:Fallback>
+  </mc:AlternateContent>
+</p:sld>
+</file>
+
+<file path=ppt/slides/slide2.xml><?xml version="1.0" encoding="utf-8"?>
+<p:sld xmlns:a="http://schemas.openxmlformats.org/drawingml/2006/main" xmlns:r="http://schemas.openxmlformats.org/officeDocument/2006/relationships" xmlns:p="http://schemas.openxmlformats.org/presentationml/2006/main">
+  <p:cSld>
+    <p:spTree>
+      <p:nvGrpSpPr>
+        <p:cNvPr id="1" name=""/>
+        <p:cNvGrpSpPr/>
+        <p:nvPr/>
+      </p:nvGrpSpPr>
+      <p:grpSpPr>
+        <a:xfrm>
+          <a:off x="0" y="0"/>
+          <a:ext cx="0" cy="0"/>
+          <a:chOff x="0" y="0"/>
+          <a:chExt cx="0" cy="0"/>
+        </a:xfrm>
+      </p:grpSpPr>
       <p:pic>
         <p:nvPicPr>
           <p:cNvPr id="5" name="Imagen 4">
@@ -3378,12 +4872,25 @@
         </p:blipFill>
         <p:spPr>
           <a:xfrm>
-            <a:off x="5624248" y="1754279"/>
-            <a:ext cx="6465073" cy="3170145"/>
+            <a:off x="6096000" y="1843927"/>
+            <a:ext cx="5993321" cy="3170145"/>
           </a:xfrm>
-          <a:prstGeom prst="rect">
-            <a:avLst/>
+          <a:prstGeom prst="roundRect">
+            <a:avLst>
+              <a:gd name="adj" fmla="val 8594"/>
+            </a:avLst>
           </a:prstGeom>
+          <a:solidFill>
+            <a:srgbClr val="FFFFFF">
+              <a:shade val="85000"/>
+            </a:srgbClr>
+          </a:solidFill>
+          <a:ln>
+            <a:noFill/>
+          </a:ln>
+          <a:effectLst>
+            <a:reflection blurRad="12700" stA="38000" endPos="28000" dist="5000" dir="5400000" sy="-100000" algn="bl" rotWithShape="0"/>
+          </a:effectLst>
         </p:spPr>
       </p:pic>
       <p:sp>
@@ -3400,8 +4907,8 @@
         </p:nvSpPr>
         <p:spPr>
           <a:xfrm>
-            <a:off x="338328" y="2600687"/>
-            <a:ext cx="4894707" cy="1754326"/>
+            <a:off x="1482801" y="2125526"/>
+            <a:ext cx="3911043" cy="2585323"/>
           </a:xfrm>
           <a:prstGeom prst="rect">
             <a:avLst/>
@@ -3415,30 +4922,761 @@
           <a:lstStyle/>
           <a:p>
             <a:r>
-              <a:rPr lang="es-MX" dirty="0"/>
+              <a:rPr lang="es-MX" noProof="0" dirty="0">
+                <a:solidFill>
+                  <a:schemeClr val="bg1"/>
+                </a:solidFill>
+              </a:rPr>
               <a:t>La pagina de inicio de sesión cuenta con:</a:t>
             </a:r>
           </a:p>
           <a:p>
             <a:r>
-              <a:rPr lang="es-MX" dirty="0"/>
+              <a:rPr lang="es-MX" noProof="0" dirty="0">
+                <a:solidFill>
+                  <a:schemeClr val="bg1"/>
+                </a:solidFill>
+              </a:rPr>
               <a:t>Del lado izquierdo cuenta con un formulario para iniciar sesión con usuario y contraseña</a:t>
             </a:r>
           </a:p>
           <a:p>
             <a:r>
-              <a:rPr lang="es-MX" dirty="0"/>
+              <a:rPr lang="es-MX" noProof="0" dirty="0">
+                <a:solidFill>
+                  <a:schemeClr val="bg1"/>
+                </a:solidFill>
+              </a:rPr>
               <a:t>Cuenta con opciones para recuperar contraseña o entrar sin cuenta</a:t>
             </a:r>
           </a:p>
           <a:p>
             <a:r>
-              <a:rPr lang="es-MX" dirty="0"/>
+              <a:rPr lang="es-MX" noProof="0" dirty="0">
+                <a:solidFill>
+                  <a:schemeClr val="bg1"/>
+                </a:solidFill>
+              </a:rPr>
               <a:t>Del lado derecho, un slider con fotos del plantel</a:t>
             </a:r>
           </a:p>
         </p:txBody>
       </p:sp>
+      <p:grpSp>
+        <p:nvGrpSpPr>
+          <p:cNvPr id="15" name="Grupo 14">
+            <a:extLst>
+              <a:ext uri="{FF2B5EF4-FFF2-40B4-BE49-F238E27FC236}">
+                <a16:creationId xmlns:a16="http://schemas.microsoft.com/office/drawing/2014/main" id="{CFA9FE7E-4F52-987C-6081-329E0AB7F1D7}"/>
+              </a:ext>
+            </a:extLst>
+          </p:cNvPr>
+          <p:cNvGrpSpPr/>
+          <p:nvPr/>
+        </p:nvGrpSpPr>
+        <p:grpSpPr>
+          <a:xfrm rot="10357571">
+            <a:off x="-2759677" y="-2194372"/>
+            <a:ext cx="4990758" cy="4814628"/>
+            <a:chOff x="3193545" y="755695"/>
+            <a:chExt cx="5631572" cy="5162331"/>
+          </a:xfrm>
+        </p:grpSpPr>
+        <p:sp>
+          <p:nvSpPr>
+            <p:cNvPr id="16" name="Forma libre: forma 15">
+              <a:extLst>
+                <a:ext uri="{FF2B5EF4-FFF2-40B4-BE49-F238E27FC236}">
+                  <a16:creationId xmlns:a16="http://schemas.microsoft.com/office/drawing/2014/main" id="{42DB3D9D-2DD5-01B6-8521-32F4DE4AF0AF}"/>
+                </a:ext>
+              </a:extLst>
+            </p:cNvPr>
+            <p:cNvSpPr/>
+            <p:nvPr/>
+          </p:nvSpPr>
+          <p:spPr>
+            <a:xfrm rot="16200000">
+              <a:off x="6252808" y="619749"/>
+              <a:ext cx="2431751" cy="2703643"/>
+            </a:xfrm>
+            <a:custGeom>
+              <a:avLst/>
+              <a:gdLst>
+                <a:gd name="csX0" fmla="*/ 2431751 w 2431751"/>
+                <a:gd name="csY0" fmla="*/ 0 h 2703643"/>
+                <a:gd name="csX1" fmla="*/ 2423380 w 2431751"/>
+                <a:gd name="csY1" fmla="*/ 180735 h 2703643"/>
+                <a:gd name="csX2" fmla="*/ 115004 w 2431751"/>
+                <a:gd name="csY2" fmla="*/ 2697312 h 2703643"/>
+                <a:gd name="csX3" fmla="*/ 0 w 2431751"/>
+                <a:gd name="csY3" fmla="*/ 2703643 h 2703643"/>
+                <a:gd name="csX4" fmla="*/ 0 w 2431751"/>
+                <a:gd name="csY4" fmla="*/ 2058844 h 2703643"/>
+                <a:gd name="csX5" fmla="*/ 49100 w 2431751"/>
+                <a:gd name="csY5" fmla="*/ 2056067 h 2703643"/>
+                <a:gd name="csX6" fmla="*/ 1782136 w 2431751"/>
+                <a:gd name="csY6" fmla="*/ 114830 h 2703643"/>
+                <a:gd name="csX7" fmla="*/ 1787313 w 2431751"/>
+                <a:gd name="csY7" fmla="*/ 0 h 2703643"/>
+                <a:gd name="csX8" fmla="*/ 2431751 w 2431751"/>
+                <a:gd name="csY8" fmla="*/ 0 h 2703643"/>
+              </a:gdLst>
+              <a:ahLst/>
+              <a:cxnLst>
+                <a:cxn ang="0">
+                  <a:pos x="csX0" y="csY0"/>
+                </a:cxn>
+                <a:cxn ang="0">
+                  <a:pos x="csX1" y="csY1"/>
+                </a:cxn>
+                <a:cxn ang="0">
+                  <a:pos x="csX2" y="csY2"/>
+                </a:cxn>
+                <a:cxn ang="0">
+                  <a:pos x="csX3" y="csY3"/>
+                </a:cxn>
+                <a:cxn ang="0">
+                  <a:pos x="csX4" y="csY4"/>
+                </a:cxn>
+                <a:cxn ang="0">
+                  <a:pos x="csX5" y="csY5"/>
+                </a:cxn>
+                <a:cxn ang="0">
+                  <a:pos x="csX6" y="csY6"/>
+                </a:cxn>
+                <a:cxn ang="0">
+                  <a:pos x="csX7" y="csY7"/>
+                </a:cxn>
+                <a:cxn ang="0">
+                  <a:pos x="csX8" y="csY8"/>
+                </a:cxn>
+              </a:cxnLst>
+              <a:rect l="l" t="t" r="r" b="b"/>
+              <a:pathLst>
+                <a:path w="2431751" h="2703643">
+                  <a:moveTo>
+                    <a:pt x="2431751" y="0"/>
+                  </a:moveTo>
+                  <a:lnTo>
+                    <a:pt x="2423380" y="180735"/>
+                  </a:lnTo>
+                  <a:cubicBezTo>
+                    <a:pt x="2299773" y="1507655"/>
+                    <a:pt x="1332145" y="2562556"/>
+                    <a:pt x="115004" y="2697312"/>
+                  </a:cubicBezTo>
+                  <a:lnTo>
+                    <a:pt x="0" y="2703643"/>
+                  </a:lnTo>
+                  <a:lnTo>
+                    <a:pt x="0" y="2058844"/>
+                  </a:lnTo>
+                  <a:lnTo>
+                    <a:pt x="49100" y="2056067"/>
+                  </a:lnTo>
+                  <a:cubicBezTo>
+                    <a:pt x="962881" y="1952119"/>
+                    <a:pt x="1689336" y="1138389"/>
+                    <a:pt x="1782136" y="114830"/>
+                  </a:cubicBezTo>
+                  <a:lnTo>
+                    <a:pt x="1787313" y="0"/>
+                  </a:lnTo>
+                  <a:lnTo>
+                    <a:pt x="2431751" y="0"/>
+                  </a:lnTo>
+                  <a:close/>
+                </a:path>
+              </a:pathLst>
+            </a:custGeom>
+          </p:spPr>
+          <p:style>
+            <a:lnRef idx="2">
+              <a:schemeClr val="accent1">
+                <a:shade val="15000"/>
+              </a:schemeClr>
+            </a:lnRef>
+            <a:fillRef idx="1">
+              <a:schemeClr val="accent1"/>
+            </a:fillRef>
+            <a:effectRef idx="0">
+              <a:schemeClr val="accent1"/>
+            </a:effectRef>
+            <a:fontRef idx="minor">
+              <a:schemeClr val="lt1"/>
+            </a:fontRef>
+          </p:style>
+          <p:txBody>
+            <a:bodyPr wrap="square" rtlCol="0" anchor="ctr">
+              <a:noAutofit/>
+            </a:bodyPr>
+            <a:lstStyle/>
+            <a:p>
+              <a:pPr algn="ctr"/>
+              <a:endParaRPr lang="es-MX" noProof="0" dirty="0"/>
+            </a:p>
+          </p:txBody>
+        </p:sp>
+        <p:sp>
+          <p:nvSpPr>
+            <p:cNvPr id="17" name="Forma libre: forma 16">
+              <a:extLst>
+                <a:ext uri="{FF2B5EF4-FFF2-40B4-BE49-F238E27FC236}">
+                  <a16:creationId xmlns:a16="http://schemas.microsoft.com/office/drawing/2014/main" id="{96CADDB5-BC96-96C7-A7EB-D2851047E65A}"/>
+                </a:ext>
+              </a:extLst>
+            </p:cNvPr>
+            <p:cNvSpPr/>
+            <p:nvPr/>
+          </p:nvSpPr>
+          <p:spPr>
+            <a:xfrm rot="16200000">
+              <a:off x="3334100" y="619750"/>
+              <a:ext cx="2431751" cy="2703641"/>
+            </a:xfrm>
+            <a:custGeom>
+              <a:avLst/>
+              <a:gdLst>
+                <a:gd name="csX0" fmla="*/ 2431751 w 2431751"/>
+                <a:gd name="csY0" fmla="*/ 2703641 h 2703641"/>
+                <a:gd name="csX1" fmla="*/ 1787313 w 2431751"/>
+                <a:gd name="csY1" fmla="*/ 2703641 h 2703641"/>
+                <a:gd name="csX2" fmla="*/ 1782136 w 2431751"/>
+                <a:gd name="csY2" fmla="*/ 2588811 h 2703641"/>
+                <a:gd name="csX3" fmla="*/ 49100 w 2431751"/>
+                <a:gd name="csY3" fmla="*/ 647574 h 2703641"/>
+                <a:gd name="csX4" fmla="*/ 0 w 2431751"/>
+                <a:gd name="csY4" fmla="*/ 644797 h 2703641"/>
+                <a:gd name="csX5" fmla="*/ 0 w 2431751"/>
+                <a:gd name="csY5" fmla="*/ 0 h 2703641"/>
+                <a:gd name="csX6" fmla="*/ 115004 w 2431751"/>
+                <a:gd name="csY6" fmla="*/ 6331 h 2703641"/>
+                <a:gd name="csX7" fmla="*/ 2423380 w 2431751"/>
+                <a:gd name="csY7" fmla="*/ 2522908 h 2703641"/>
+                <a:gd name="csX8" fmla="*/ 2431751 w 2431751"/>
+                <a:gd name="csY8" fmla="*/ 2703641 h 2703641"/>
+              </a:gdLst>
+              <a:ahLst/>
+              <a:cxnLst>
+                <a:cxn ang="0">
+                  <a:pos x="csX0" y="csY0"/>
+                </a:cxn>
+                <a:cxn ang="0">
+                  <a:pos x="csX1" y="csY1"/>
+                </a:cxn>
+                <a:cxn ang="0">
+                  <a:pos x="csX2" y="csY2"/>
+                </a:cxn>
+                <a:cxn ang="0">
+                  <a:pos x="csX3" y="csY3"/>
+                </a:cxn>
+                <a:cxn ang="0">
+                  <a:pos x="csX4" y="csY4"/>
+                </a:cxn>
+                <a:cxn ang="0">
+                  <a:pos x="csX5" y="csY5"/>
+                </a:cxn>
+                <a:cxn ang="0">
+                  <a:pos x="csX6" y="csY6"/>
+                </a:cxn>
+                <a:cxn ang="0">
+                  <a:pos x="csX7" y="csY7"/>
+                </a:cxn>
+                <a:cxn ang="0">
+                  <a:pos x="csX8" y="csY8"/>
+                </a:cxn>
+              </a:cxnLst>
+              <a:rect l="l" t="t" r="r" b="b"/>
+              <a:pathLst>
+                <a:path w="2431751" h="2703641">
+                  <a:moveTo>
+                    <a:pt x="2431751" y="2703641"/>
+                  </a:moveTo>
+                  <a:lnTo>
+                    <a:pt x="1787313" y="2703641"/>
+                  </a:lnTo>
+                  <a:lnTo>
+                    <a:pt x="1782136" y="2588811"/>
+                  </a:lnTo>
+                  <a:cubicBezTo>
+                    <a:pt x="1689336" y="1565252"/>
+                    <a:pt x="962881" y="751523"/>
+                    <a:pt x="49100" y="647574"/>
+                  </a:cubicBezTo>
+                  <a:lnTo>
+                    <a:pt x="0" y="644797"/>
+                  </a:lnTo>
+                  <a:lnTo>
+                    <a:pt x="0" y="0"/>
+                  </a:lnTo>
+                  <a:lnTo>
+                    <a:pt x="115004" y="6331"/>
+                  </a:lnTo>
+                  <a:cubicBezTo>
+                    <a:pt x="1332146" y="141087"/>
+                    <a:pt x="2299773" y="1195988"/>
+                    <a:pt x="2423380" y="2522908"/>
+                  </a:cubicBezTo>
+                  <a:lnTo>
+                    <a:pt x="2431751" y="2703641"/>
+                  </a:lnTo>
+                  <a:close/>
+                </a:path>
+              </a:pathLst>
+            </a:custGeom>
+          </p:spPr>
+          <p:style>
+            <a:lnRef idx="2">
+              <a:schemeClr val="accent1">
+                <a:shade val="15000"/>
+              </a:schemeClr>
+            </a:lnRef>
+            <a:fillRef idx="1">
+              <a:schemeClr val="accent1"/>
+            </a:fillRef>
+            <a:effectRef idx="0">
+              <a:schemeClr val="accent1"/>
+            </a:effectRef>
+            <a:fontRef idx="minor">
+              <a:schemeClr val="lt1"/>
+            </a:fontRef>
+          </p:style>
+          <p:txBody>
+            <a:bodyPr wrap="square" rtlCol="0" anchor="ctr">
+              <a:noAutofit/>
+            </a:bodyPr>
+            <a:lstStyle/>
+            <a:p>
+              <a:pPr algn="ctr"/>
+              <a:endParaRPr lang="es-MX" noProof="0" dirty="0"/>
+            </a:p>
+          </p:txBody>
+        </p:sp>
+        <p:sp>
+          <p:nvSpPr>
+            <p:cNvPr id="18" name="Forma libre: forma 17">
+              <a:extLst>
+                <a:ext uri="{FF2B5EF4-FFF2-40B4-BE49-F238E27FC236}">
+                  <a16:creationId xmlns:a16="http://schemas.microsoft.com/office/drawing/2014/main" id="{96D4BAE9-9B5D-3AB3-685E-16531B98678A}"/>
+                </a:ext>
+              </a:extLst>
+            </p:cNvPr>
+            <p:cNvSpPr/>
+            <p:nvPr/>
+          </p:nvSpPr>
+          <p:spPr>
+            <a:xfrm rot="16200000">
+              <a:off x="3289913" y="3306143"/>
+              <a:ext cx="2515515" cy="2708252"/>
+            </a:xfrm>
+            <a:custGeom>
+              <a:avLst/>
+              <a:gdLst>
+                <a:gd name="csX0" fmla="*/ 2515515 w 2515515"/>
+                <a:gd name="csY0" fmla="*/ 0 h 2708252"/>
+                <a:gd name="csX1" fmla="*/ 2515515 w 2515515"/>
+                <a:gd name="csY1" fmla="*/ 644670 h 2708252"/>
+                <a:gd name="csX2" fmla="*/ 2382651 w 2515515"/>
+                <a:gd name="csY2" fmla="*/ 652185 h 2708252"/>
+                <a:gd name="csX3" fmla="*/ 649615 w 2515515"/>
+                <a:gd name="csY3" fmla="*/ 2593422 h 2708252"/>
+                <a:gd name="csX4" fmla="*/ 644439 w 2515515"/>
+                <a:gd name="csY4" fmla="*/ 2708252 h 2708252"/>
+                <a:gd name="csX5" fmla="*/ 0 w 2515515"/>
+                <a:gd name="csY5" fmla="*/ 2708252 h 2708252"/>
+                <a:gd name="csX6" fmla="*/ 8371 w 2515515"/>
+                <a:gd name="csY6" fmla="*/ 2527519 h 2708252"/>
+                <a:gd name="csX7" fmla="*/ 2316747 w 2515515"/>
+                <a:gd name="csY7" fmla="*/ 10942 h 2708252"/>
+                <a:gd name="csX8" fmla="*/ 2515515 w 2515515"/>
+                <a:gd name="csY8" fmla="*/ 0 h 2708252"/>
+              </a:gdLst>
+              <a:ahLst/>
+              <a:cxnLst>
+                <a:cxn ang="0">
+                  <a:pos x="csX0" y="csY0"/>
+                </a:cxn>
+                <a:cxn ang="0">
+                  <a:pos x="csX1" y="csY1"/>
+                </a:cxn>
+                <a:cxn ang="0">
+                  <a:pos x="csX2" y="csY2"/>
+                </a:cxn>
+                <a:cxn ang="0">
+                  <a:pos x="csX3" y="csY3"/>
+                </a:cxn>
+                <a:cxn ang="0">
+                  <a:pos x="csX4" y="csY4"/>
+                </a:cxn>
+                <a:cxn ang="0">
+                  <a:pos x="csX5" y="csY5"/>
+                </a:cxn>
+                <a:cxn ang="0">
+                  <a:pos x="csX6" y="csY6"/>
+                </a:cxn>
+                <a:cxn ang="0">
+                  <a:pos x="csX7" y="csY7"/>
+                </a:cxn>
+                <a:cxn ang="0">
+                  <a:pos x="csX8" y="csY8"/>
+                </a:cxn>
+              </a:cxnLst>
+              <a:rect l="l" t="t" r="r" b="b"/>
+              <a:pathLst>
+                <a:path w="2515515" h="2708252">
+                  <a:moveTo>
+                    <a:pt x="2515515" y="0"/>
+                  </a:moveTo>
+                  <a:lnTo>
+                    <a:pt x="2515515" y="644670"/>
+                  </a:lnTo>
+                  <a:lnTo>
+                    <a:pt x="2382651" y="652185"/>
+                  </a:lnTo>
+                  <a:cubicBezTo>
+                    <a:pt x="1468871" y="756133"/>
+                    <a:pt x="742415" y="1569863"/>
+                    <a:pt x="649615" y="2593422"/>
+                  </a:cubicBezTo>
+                  <a:lnTo>
+                    <a:pt x="644439" y="2708252"/>
+                  </a:lnTo>
+                  <a:lnTo>
+                    <a:pt x="0" y="2708252"/>
+                  </a:lnTo>
+                  <a:lnTo>
+                    <a:pt x="8371" y="2527519"/>
+                  </a:lnTo>
+                  <a:cubicBezTo>
+                    <a:pt x="131979" y="1200599"/>
+                    <a:pt x="1099606" y="145698"/>
+                    <a:pt x="2316747" y="10942"/>
+                  </a:cubicBezTo>
+                  <a:lnTo>
+                    <a:pt x="2515515" y="0"/>
+                  </a:lnTo>
+                  <a:close/>
+                </a:path>
+              </a:pathLst>
+            </a:custGeom>
+          </p:spPr>
+          <p:style>
+            <a:lnRef idx="2">
+              <a:schemeClr val="accent1">
+                <a:shade val="15000"/>
+              </a:schemeClr>
+            </a:lnRef>
+            <a:fillRef idx="1">
+              <a:schemeClr val="accent1"/>
+            </a:fillRef>
+            <a:effectRef idx="0">
+              <a:schemeClr val="accent1"/>
+            </a:effectRef>
+            <a:fontRef idx="minor">
+              <a:schemeClr val="lt1"/>
+            </a:fontRef>
+          </p:style>
+          <p:txBody>
+            <a:bodyPr wrap="square" rtlCol="0" anchor="ctr">
+              <a:noAutofit/>
+            </a:bodyPr>
+            <a:lstStyle/>
+            <a:p>
+              <a:pPr algn="ctr"/>
+              <a:endParaRPr lang="es-MX" noProof="0" dirty="0"/>
+            </a:p>
+          </p:txBody>
+        </p:sp>
+        <p:sp>
+          <p:nvSpPr>
+            <p:cNvPr id="19" name="Forma libre: forma 18">
+              <a:extLst>
+                <a:ext uri="{FF2B5EF4-FFF2-40B4-BE49-F238E27FC236}">
+                  <a16:creationId xmlns:a16="http://schemas.microsoft.com/office/drawing/2014/main" id="{01B8D2C7-D10B-542C-57E0-A2BAA4E5871B}"/>
+                </a:ext>
+              </a:extLst>
+            </p:cNvPr>
+            <p:cNvSpPr/>
+            <p:nvPr/>
+          </p:nvSpPr>
+          <p:spPr>
+            <a:xfrm rot="16200000">
+              <a:off x="6213232" y="3306142"/>
+              <a:ext cx="2515515" cy="2708254"/>
+            </a:xfrm>
+            <a:custGeom>
+              <a:avLst/>
+              <a:gdLst>
+                <a:gd name="csX0" fmla="*/ 2515515 w 2515515"/>
+                <a:gd name="csY0" fmla="*/ 2063582 h 2708254"/>
+                <a:gd name="csX1" fmla="*/ 2515515 w 2515515"/>
+                <a:gd name="csY1" fmla="*/ 2708254 h 2708254"/>
+                <a:gd name="csX2" fmla="*/ 2316747 w 2515515"/>
+                <a:gd name="csY2" fmla="*/ 2697312 h 2708254"/>
+                <a:gd name="csX3" fmla="*/ 8371 w 2515515"/>
+                <a:gd name="csY3" fmla="*/ 180735 h 2708254"/>
+                <a:gd name="csX4" fmla="*/ 0 w 2515515"/>
+                <a:gd name="csY4" fmla="*/ 0 h 2708254"/>
+                <a:gd name="csX5" fmla="*/ 644439 w 2515515"/>
+                <a:gd name="csY5" fmla="*/ 0 h 2708254"/>
+                <a:gd name="csX6" fmla="*/ 649615 w 2515515"/>
+                <a:gd name="csY6" fmla="*/ 114830 h 2708254"/>
+                <a:gd name="csX7" fmla="*/ 2382651 w 2515515"/>
+                <a:gd name="csY7" fmla="*/ 2056067 h 2708254"/>
+                <a:gd name="csX8" fmla="*/ 2515515 w 2515515"/>
+                <a:gd name="csY8" fmla="*/ 2063582 h 2708254"/>
+              </a:gdLst>
+              <a:ahLst/>
+              <a:cxnLst>
+                <a:cxn ang="0">
+                  <a:pos x="csX0" y="csY0"/>
+                </a:cxn>
+                <a:cxn ang="0">
+                  <a:pos x="csX1" y="csY1"/>
+                </a:cxn>
+                <a:cxn ang="0">
+                  <a:pos x="csX2" y="csY2"/>
+                </a:cxn>
+                <a:cxn ang="0">
+                  <a:pos x="csX3" y="csY3"/>
+                </a:cxn>
+                <a:cxn ang="0">
+                  <a:pos x="csX4" y="csY4"/>
+                </a:cxn>
+                <a:cxn ang="0">
+                  <a:pos x="csX5" y="csY5"/>
+                </a:cxn>
+                <a:cxn ang="0">
+                  <a:pos x="csX6" y="csY6"/>
+                </a:cxn>
+                <a:cxn ang="0">
+                  <a:pos x="csX7" y="csY7"/>
+                </a:cxn>
+                <a:cxn ang="0">
+                  <a:pos x="csX8" y="csY8"/>
+                </a:cxn>
+              </a:cxnLst>
+              <a:rect l="l" t="t" r="r" b="b"/>
+              <a:pathLst>
+                <a:path w="2515515" h="2708254">
+                  <a:moveTo>
+                    <a:pt x="2515515" y="2063582"/>
+                  </a:moveTo>
+                  <a:lnTo>
+                    <a:pt x="2515515" y="2708254"/>
+                  </a:lnTo>
+                  <a:lnTo>
+                    <a:pt x="2316747" y="2697312"/>
+                  </a:lnTo>
+                  <a:cubicBezTo>
+                    <a:pt x="1099605" y="2562556"/>
+                    <a:pt x="131978" y="1507655"/>
+                    <a:pt x="8371" y="180735"/>
+                  </a:cubicBezTo>
+                  <a:lnTo>
+                    <a:pt x="0" y="0"/>
+                  </a:lnTo>
+                  <a:lnTo>
+                    <a:pt x="644439" y="0"/>
+                  </a:lnTo>
+                  <a:lnTo>
+                    <a:pt x="649615" y="114830"/>
+                  </a:lnTo>
+                  <a:cubicBezTo>
+                    <a:pt x="742415" y="1138389"/>
+                    <a:pt x="1468870" y="1952119"/>
+                    <a:pt x="2382651" y="2056067"/>
+                  </a:cubicBezTo>
+                  <a:lnTo>
+                    <a:pt x="2515515" y="2063582"/>
+                  </a:lnTo>
+                  <a:close/>
+                </a:path>
+              </a:pathLst>
+            </a:custGeom>
+          </p:spPr>
+          <p:style>
+            <a:lnRef idx="2">
+              <a:schemeClr val="accent1">
+                <a:shade val="15000"/>
+              </a:schemeClr>
+            </a:lnRef>
+            <a:fillRef idx="1">
+              <a:schemeClr val="accent1"/>
+            </a:fillRef>
+            <a:effectRef idx="0">
+              <a:schemeClr val="accent1"/>
+            </a:effectRef>
+            <a:fontRef idx="minor">
+              <a:schemeClr val="lt1"/>
+            </a:fontRef>
+          </p:style>
+          <p:txBody>
+            <a:bodyPr wrap="square" rtlCol="0" anchor="ctr">
+              <a:noAutofit/>
+            </a:bodyPr>
+            <a:lstStyle/>
+            <a:p>
+              <a:pPr algn="ctr"/>
+              <a:endParaRPr lang="es-MX" noProof="0" dirty="0"/>
+            </a:p>
+          </p:txBody>
+        </p:sp>
+      </p:grpSp>
+      <p:grpSp>
+        <p:nvGrpSpPr>
+          <p:cNvPr id="22" name="Grupo 21">
+            <a:extLst>
+              <a:ext uri="{FF2B5EF4-FFF2-40B4-BE49-F238E27FC236}">
+                <a16:creationId xmlns:a16="http://schemas.microsoft.com/office/drawing/2014/main" id="{903858D7-177D-365A-C281-6894C2C6B4B5}"/>
+              </a:ext>
+            </a:extLst>
+          </p:cNvPr>
+          <p:cNvGrpSpPr/>
+          <p:nvPr/>
+        </p:nvGrpSpPr>
+        <p:grpSpPr>
+          <a:xfrm>
+            <a:off x="6633029" y="472483"/>
+            <a:ext cx="10537371" cy="1143287"/>
+            <a:chOff x="6480629" y="550483"/>
+            <a:chExt cx="10537371" cy="1143287"/>
+          </a:xfrm>
+        </p:grpSpPr>
+        <p:sp>
+          <p:nvSpPr>
+            <p:cNvPr id="23" name="CuadroTexto 22">
+              <a:extLst>
+                <a:ext uri="{FF2B5EF4-FFF2-40B4-BE49-F238E27FC236}">
+                  <a16:creationId xmlns:a16="http://schemas.microsoft.com/office/drawing/2014/main" id="{A0EC82D6-A456-F2F9-EE92-9C2A4B0C735E}"/>
+                </a:ext>
+              </a:extLst>
+            </p:cNvPr>
+            <p:cNvSpPr txBox="1"/>
+            <p:nvPr/>
+          </p:nvSpPr>
+          <p:spPr>
+            <a:xfrm>
+              <a:off x="8820690" y="550483"/>
+              <a:ext cx="8197310" cy="584775"/>
+            </a:xfrm>
+            <a:prstGeom prst="rect">
+              <a:avLst/>
+            </a:prstGeom>
+            <a:noFill/>
+          </p:spPr>
+          <p:txBody>
+            <a:bodyPr wrap="square" rtlCol="0">
+              <a:spAutoFit/>
+            </a:bodyPr>
+            <a:lstStyle/>
+            <a:p>
+              <a:r>
+                <a:rPr lang="en-US" sz="3200" b="1" dirty="0" err="1">
+                  <a:solidFill>
+                    <a:schemeClr val="bg1"/>
+                  </a:solidFill>
+                </a:rPr>
+                <a:t>Inicio</a:t>
+              </a:r>
+              <a:r>
+                <a:rPr lang="en-US" sz="3200" b="1" dirty="0">
+                  <a:solidFill>
+                    <a:schemeClr val="bg1"/>
+                  </a:solidFill>
+                </a:rPr>
+                <a:t> </a:t>
+              </a:r>
+              <a:r>
+                <a:rPr lang="en-US" sz="3200" b="1" noProof="0" dirty="0">
+                  <a:solidFill>
+                    <a:schemeClr val="bg1"/>
+                  </a:solidFill>
+                </a:rPr>
+                <a:t>de </a:t>
+              </a:r>
+              <a:r>
+                <a:rPr lang="en-US" sz="3200" b="1" dirty="0">
+                  <a:solidFill>
+                    <a:schemeClr val="bg1"/>
+                  </a:solidFill>
+                </a:rPr>
+                <a:t>Sesi</a:t>
+              </a:r>
+              <a:r>
+                <a:rPr lang="es-MX" sz="3200" b="1" dirty="0" err="1">
+                  <a:solidFill>
+                    <a:schemeClr val="bg1"/>
+                  </a:solidFill>
+                </a:rPr>
+                <a:t>ó</a:t>
+              </a:r>
+              <a:r>
+                <a:rPr lang="en-US" sz="3200" b="1" dirty="0">
+                  <a:solidFill>
+                    <a:schemeClr val="bg1"/>
+                  </a:solidFill>
+                </a:rPr>
+                <a:t>n</a:t>
+              </a:r>
+              <a:endParaRPr lang="es-MX" sz="3200" b="1" noProof="0" dirty="0">
+                <a:solidFill>
+                  <a:schemeClr val="bg1"/>
+                </a:solidFill>
+              </a:endParaRPr>
+            </a:p>
+          </p:txBody>
+        </p:sp>
+        <p:sp>
+          <p:nvSpPr>
+            <p:cNvPr id="24" name="Signo menos 23">
+              <a:extLst>
+                <a:ext uri="{FF2B5EF4-FFF2-40B4-BE49-F238E27FC236}">
+                  <a16:creationId xmlns:a16="http://schemas.microsoft.com/office/drawing/2014/main" id="{5BE440BD-55AA-C78A-9B03-A99CC44DF0A8}"/>
+                </a:ext>
+              </a:extLst>
+            </p:cNvPr>
+            <p:cNvSpPr/>
+            <p:nvPr/>
+          </p:nvSpPr>
+          <p:spPr>
+            <a:xfrm>
+              <a:off x="6480629" y="842870"/>
+              <a:ext cx="6498771" cy="850900"/>
+            </a:xfrm>
+            <a:prstGeom prst="mathMinus">
+              <a:avLst/>
+            </a:prstGeom>
+            <a:solidFill>
+              <a:schemeClr val="bg1"/>
+            </a:solidFill>
+          </p:spPr>
+          <p:style>
+            <a:lnRef idx="2">
+              <a:schemeClr val="accent1">
+                <a:shade val="15000"/>
+              </a:schemeClr>
+            </a:lnRef>
+            <a:fillRef idx="1">
+              <a:schemeClr val="accent1"/>
+            </a:fillRef>
+            <a:effectRef idx="0">
+              <a:schemeClr val="accent1"/>
+            </a:effectRef>
+            <a:fontRef idx="minor">
+              <a:schemeClr val="lt1"/>
+            </a:fontRef>
+          </p:style>
+          <p:txBody>
+            <a:bodyPr rtlCol="0" anchor="ctr"/>
+            <a:lstStyle/>
+            <a:p>
+              <a:pPr algn="ctr"/>
+              <a:endParaRPr lang="es-MX" noProof="0" dirty="0"/>
+            </a:p>
+          </p:txBody>
+        </p:sp>
+      </p:grpSp>
     </p:spTree>
     <p:extLst>
       <p:ext uri="{BB962C8B-B14F-4D97-AF65-F5344CB8AC3E}">
@@ -3449,6 +5687,2164 @@
   <p:clrMapOvr>
     <a:masterClrMapping/>
   </p:clrMapOvr>
+  <mc:AlternateContent xmlns:mc="http://schemas.openxmlformats.org/markup-compatibility/2006" xmlns:p159="http://schemas.microsoft.com/office/powerpoint/2015/09/main">
+    <mc:Choice Requires="p159">
+      <p:transition xmlns:p14="http://schemas.microsoft.com/office/powerpoint/2010/main" spd="slow" p14:dur="2000">
+        <p159:morph option="byObject"/>
+      </p:transition>
+    </mc:Choice>
+    <mc:Fallback xmlns="">
+      <p:transition spd="slow">
+        <p:fade/>
+      </p:transition>
+    </mc:Fallback>
+  </mc:AlternateContent>
+</p:sld>
+</file>
+
+<file path=ppt/slides/slide3.xml><?xml version="1.0" encoding="utf-8"?>
+<p:sld xmlns:a="http://schemas.openxmlformats.org/drawingml/2006/main" xmlns:r="http://schemas.openxmlformats.org/officeDocument/2006/relationships" xmlns:p="http://schemas.openxmlformats.org/presentationml/2006/main">
+  <p:cSld>
+    <p:spTree>
+      <p:nvGrpSpPr>
+        <p:cNvPr id="1" name=""/>
+        <p:cNvGrpSpPr/>
+        <p:nvPr/>
+      </p:nvGrpSpPr>
+      <p:grpSpPr>
+        <a:xfrm>
+          <a:off x="0" y="0"/>
+          <a:ext cx="0" cy="0"/>
+          <a:chOff x="0" y="0"/>
+          <a:chExt cx="0" cy="0"/>
+        </a:xfrm>
+      </p:grpSpPr>
+      <p:pic>
+        <p:nvPicPr>
+          <p:cNvPr id="4" name="Imagen 3">
+            <a:extLst>
+              <a:ext uri="{FF2B5EF4-FFF2-40B4-BE49-F238E27FC236}">
+                <a16:creationId xmlns:a16="http://schemas.microsoft.com/office/drawing/2014/main" id="{E8ADAF69-31B7-105E-09CB-8CADD4F27A9E}"/>
+              </a:ext>
+            </a:extLst>
+          </p:cNvPr>
+          <p:cNvPicPr>
+            <a:picLocks noChangeAspect="1"/>
+          </p:cNvPicPr>
+          <p:nvPr/>
+        </p:nvPicPr>
+        <p:blipFill>
+          <a:blip r:embed="rId2"/>
+          <a:stretch>
+            <a:fillRect/>
+          </a:stretch>
+        </p:blipFill>
+        <p:spPr>
+          <a:xfrm>
+            <a:off x="347899" y="269127"/>
+            <a:ext cx="11496201" cy="6080873"/>
+          </a:xfrm>
+          <a:prstGeom prst="roundRect">
+            <a:avLst>
+              <a:gd name="adj" fmla="val 8594"/>
+            </a:avLst>
+          </a:prstGeom>
+          <a:solidFill>
+            <a:srgbClr val="FFFFFF">
+              <a:shade val="85000"/>
+            </a:srgbClr>
+          </a:solidFill>
+          <a:ln>
+            <a:noFill/>
+          </a:ln>
+          <a:effectLst>
+            <a:reflection blurRad="12700" stA="38000" endPos="28000" dist="5000" dir="5400000" sy="-100000" algn="bl" rotWithShape="0"/>
+          </a:effectLst>
+        </p:spPr>
+      </p:pic>
+    </p:spTree>
+    <p:extLst>
+      <p:ext uri="{BB962C8B-B14F-4D97-AF65-F5344CB8AC3E}">
+        <p14:creationId xmlns:p14="http://schemas.microsoft.com/office/powerpoint/2010/main" val="2935144419"/>
+      </p:ext>
+    </p:extLst>
+  </p:cSld>
+  <p:clrMapOvr>
+    <a:masterClrMapping/>
+  </p:clrMapOvr>
+</p:sld>
+</file>
+
+<file path=ppt/slides/slide4.xml><?xml version="1.0" encoding="utf-8"?>
+<p:sld xmlns:a="http://schemas.openxmlformats.org/drawingml/2006/main" xmlns:r="http://schemas.openxmlformats.org/officeDocument/2006/relationships" xmlns:p="http://schemas.openxmlformats.org/presentationml/2006/main">
+  <p:cSld>
+    <p:spTree>
+      <p:nvGrpSpPr>
+        <p:cNvPr id="1" name=""/>
+        <p:cNvGrpSpPr/>
+        <p:nvPr/>
+      </p:nvGrpSpPr>
+      <p:grpSpPr>
+        <a:xfrm>
+          <a:off x="0" y="0"/>
+          <a:ext cx="0" cy="0"/>
+          <a:chOff x="0" y="0"/>
+          <a:chExt cx="0" cy="0"/>
+        </a:xfrm>
+      </p:grpSpPr>
+      <p:grpSp>
+        <p:nvGrpSpPr>
+          <p:cNvPr id="19" name="Grupo 18">
+            <a:extLst>
+              <a:ext uri="{FF2B5EF4-FFF2-40B4-BE49-F238E27FC236}">
+                <a16:creationId xmlns:a16="http://schemas.microsoft.com/office/drawing/2014/main" id="{F2D1CDF2-A6E7-1731-3AD1-ACF0F9BBAEB8}"/>
+              </a:ext>
+            </a:extLst>
+          </p:cNvPr>
+          <p:cNvGrpSpPr/>
+          <p:nvPr/>
+        </p:nvGrpSpPr>
+        <p:grpSpPr>
+          <a:xfrm rot="5400000">
+            <a:off x="-2293403" y="-2243669"/>
+            <a:ext cx="4586807" cy="4814628"/>
+            <a:chOff x="3193545" y="755695"/>
+            <a:chExt cx="5631572" cy="5162331"/>
+          </a:xfrm>
+        </p:grpSpPr>
+        <p:sp>
+          <p:nvSpPr>
+            <p:cNvPr id="20" name="Forma libre: forma 19">
+              <a:extLst>
+                <a:ext uri="{FF2B5EF4-FFF2-40B4-BE49-F238E27FC236}">
+                  <a16:creationId xmlns:a16="http://schemas.microsoft.com/office/drawing/2014/main" id="{52348DF9-FA87-747F-7151-1BD8AF7BB997}"/>
+                </a:ext>
+              </a:extLst>
+            </p:cNvPr>
+            <p:cNvSpPr/>
+            <p:nvPr/>
+          </p:nvSpPr>
+          <p:spPr>
+            <a:xfrm rot="16200000">
+              <a:off x="6252808" y="619749"/>
+              <a:ext cx="2431751" cy="2703643"/>
+            </a:xfrm>
+            <a:custGeom>
+              <a:avLst/>
+              <a:gdLst>
+                <a:gd name="csX0" fmla="*/ 2431751 w 2431751"/>
+                <a:gd name="csY0" fmla="*/ 0 h 2703643"/>
+                <a:gd name="csX1" fmla="*/ 2423380 w 2431751"/>
+                <a:gd name="csY1" fmla="*/ 180735 h 2703643"/>
+                <a:gd name="csX2" fmla="*/ 115004 w 2431751"/>
+                <a:gd name="csY2" fmla="*/ 2697312 h 2703643"/>
+                <a:gd name="csX3" fmla="*/ 0 w 2431751"/>
+                <a:gd name="csY3" fmla="*/ 2703643 h 2703643"/>
+                <a:gd name="csX4" fmla="*/ 0 w 2431751"/>
+                <a:gd name="csY4" fmla="*/ 2058844 h 2703643"/>
+                <a:gd name="csX5" fmla="*/ 49100 w 2431751"/>
+                <a:gd name="csY5" fmla="*/ 2056067 h 2703643"/>
+                <a:gd name="csX6" fmla="*/ 1782136 w 2431751"/>
+                <a:gd name="csY6" fmla="*/ 114830 h 2703643"/>
+                <a:gd name="csX7" fmla="*/ 1787313 w 2431751"/>
+                <a:gd name="csY7" fmla="*/ 0 h 2703643"/>
+                <a:gd name="csX8" fmla="*/ 2431751 w 2431751"/>
+                <a:gd name="csY8" fmla="*/ 0 h 2703643"/>
+              </a:gdLst>
+              <a:ahLst/>
+              <a:cxnLst>
+                <a:cxn ang="0">
+                  <a:pos x="csX0" y="csY0"/>
+                </a:cxn>
+                <a:cxn ang="0">
+                  <a:pos x="csX1" y="csY1"/>
+                </a:cxn>
+                <a:cxn ang="0">
+                  <a:pos x="csX2" y="csY2"/>
+                </a:cxn>
+                <a:cxn ang="0">
+                  <a:pos x="csX3" y="csY3"/>
+                </a:cxn>
+                <a:cxn ang="0">
+                  <a:pos x="csX4" y="csY4"/>
+                </a:cxn>
+                <a:cxn ang="0">
+                  <a:pos x="csX5" y="csY5"/>
+                </a:cxn>
+                <a:cxn ang="0">
+                  <a:pos x="csX6" y="csY6"/>
+                </a:cxn>
+                <a:cxn ang="0">
+                  <a:pos x="csX7" y="csY7"/>
+                </a:cxn>
+                <a:cxn ang="0">
+                  <a:pos x="csX8" y="csY8"/>
+                </a:cxn>
+              </a:cxnLst>
+              <a:rect l="l" t="t" r="r" b="b"/>
+              <a:pathLst>
+                <a:path w="2431751" h="2703643">
+                  <a:moveTo>
+                    <a:pt x="2431751" y="0"/>
+                  </a:moveTo>
+                  <a:lnTo>
+                    <a:pt x="2423380" y="180735"/>
+                  </a:lnTo>
+                  <a:cubicBezTo>
+                    <a:pt x="2299773" y="1507655"/>
+                    <a:pt x="1332145" y="2562556"/>
+                    <a:pt x="115004" y="2697312"/>
+                  </a:cubicBezTo>
+                  <a:lnTo>
+                    <a:pt x="0" y="2703643"/>
+                  </a:lnTo>
+                  <a:lnTo>
+                    <a:pt x="0" y="2058844"/>
+                  </a:lnTo>
+                  <a:lnTo>
+                    <a:pt x="49100" y="2056067"/>
+                  </a:lnTo>
+                  <a:cubicBezTo>
+                    <a:pt x="962881" y="1952119"/>
+                    <a:pt x="1689336" y="1138389"/>
+                    <a:pt x="1782136" y="114830"/>
+                  </a:cubicBezTo>
+                  <a:lnTo>
+                    <a:pt x="1787313" y="0"/>
+                  </a:lnTo>
+                  <a:lnTo>
+                    <a:pt x="2431751" y="0"/>
+                  </a:lnTo>
+                  <a:close/>
+                </a:path>
+              </a:pathLst>
+            </a:custGeom>
+          </p:spPr>
+          <p:style>
+            <a:lnRef idx="2">
+              <a:schemeClr val="accent1">
+                <a:shade val="15000"/>
+              </a:schemeClr>
+            </a:lnRef>
+            <a:fillRef idx="1">
+              <a:schemeClr val="accent1"/>
+            </a:fillRef>
+            <a:effectRef idx="0">
+              <a:schemeClr val="accent1"/>
+            </a:effectRef>
+            <a:fontRef idx="minor">
+              <a:schemeClr val="lt1"/>
+            </a:fontRef>
+          </p:style>
+          <p:txBody>
+            <a:bodyPr wrap="square" rtlCol="0" anchor="ctr">
+              <a:noAutofit/>
+            </a:bodyPr>
+            <a:lstStyle/>
+            <a:p>
+              <a:pPr algn="ctr"/>
+              <a:endParaRPr lang="es-MX" noProof="0" dirty="0"/>
+            </a:p>
+          </p:txBody>
+        </p:sp>
+        <p:sp>
+          <p:nvSpPr>
+            <p:cNvPr id="21" name="Forma libre: forma 20">
+              <a:extLst>
+                <a:ext uri="{FF2B5EF4-FFF2-40B4-BE49-F238E27FC236}">
+                  <a16:creationId xmlns:a16="http://schemas.microsoft.com/office/drawing/2014/main" id="{4838D5A1-A5F5-E595-C901-29F4B2086E77}"/>
+                </a:ext>
+              </a:extLst>
+            </p:cNvPr>
+            <p:cNvSpPr/>
+            <p:nvPr/>
+          </p:nvSpPr>
+          <p:spPr>
+            <a:xfrm rot="16200000">
+              <a:off x="3334100" y="619750"/>
+              <a:ext cx="2431751" cy="2703641"/>
+            </a:xfrm>
+            <a:custGeom>
+              <a:avLst/>
+              <a:gdLst>
+                <a:gd name="csX0" fmla="*/ 2431751 w 2431751"/>
+                <a:gd name="csY0" fmla="*/ 2703641 h 2703641"/>
+                <a:gd name="csX1" fmla="*/ 1787313 w 2431751"/>
+                <a:gd name="csY1" fmla="*/ 2703641 h 2703641"/>
+                <a:gd name="csX2" fmla="*/ 1782136 w 2431751"/>
+                <a:gd name="csY2" fmla="*/ 2588811 h 2703641"/>
+                <a:gd name="csX3" fmla="*/ 49100 w 2431751"/>
+                <a:gd name="csY3" fmla="*/ 647574 h 2703641"/>
+                <a:gd name="csX4" fmla="*/ 0 w 2431751"/>
+                <a:gd name="csY4" fmla="*/ 644797 h 2703641"/>
+                <a:gd name="csX5" fmla="*/ 0 w 2431751"/>
+                <a:gd name="csY5" fmla="*/ 0 h 2703641"/>
+                <a:gd name="csX6" fmla="*/ 115004 w 2431751"/>
+                <a:gd name="csY6" fmla="*/ 6331 h 2703641"/>
+                <a:gd name="csX7" fmla="*/ 2423380 w 2431751"/>
+                <a:gd name="csY7" fmla="*/ 2522908 h 2703641"/>
+                <a:gd name="csX8" fmla="*/ 2431751 w 2431751"/>
+                <a:gd name="csY8" fmla="*/ 2703641 h 2703641"/>
+              </a:gdLst>
+              <a:ahLst/>
+              <a:cxnLst>
+                <a:cxn ang="0">
+                  <a:pos x="csX0" y="csY0"/>
+                </a:cxn>
+                <a:cxn ang="0">
+                  <a:pos x="csX1" y="csY1"/>
+                </a:cxn>
+                <a:cxn ang="0">
+                  <a:pos x="csX2" y="csY2"/>
+                </a:cxn>
+                <a:cxn ang="0">
+                  <a:pos x="csX3" y="csY3"/>
+                </a:cxn>
+                <a:cxn ang="0">
+                  <a:pos x="csX4" y="csY4"/>
+                </a:cxn>
+                <a:cxn ang="0">
+                  <a:pos x="csX5" y="csY5"/>
+                </a:cxn>
+                <a:cxn ang="0">
+                  <a:pos x="csX6" y="csY6"/>
+                </a:cxn>
+                <a:cxn ang="0">
+                  <a:pos x="csX7" y="csY7"/>
+                </a:cxn>
+                <a:cxn ang="0">
+                  <a:pos x="csX8" y="csY8"/>
+                </a:cxn>
+              </a:cxnLst>
+              <a:rect l="l" t="t" r="r" b="b"/>
+              <a:pathLst>
+                <a:path w="2431751" h="2703641">
+                  <a:moveTo>
+                    <a:pt x="2431751" y="2703641"/>
+                  </a:moveTo>
+                  <a:lnTo>
+                    <a:pt x="1787313" y="2703641"/>
+                  </a:lnTo>
+                  <a:lnTo>
+                    <a:pt x="1782136" y="2588811"/>
+                  </a:lnTo>
+                  <a:cubicBezTo>
+                    <a:pt x="1689336" y="1565252"/>
+                    <a:pt x="962881" y="751523"/>
+                    <a:pt x="49100" y="647574"/>
+                  </a:cubicBezTo>
+                  <a:lnTo>
+                    <a:pt x="0" y="644797"/>
+                  </a:lnTo>
+                  <a:lnTo>
+                    <a:pt x="0" y="0"/>
+                  </a:lnTo>
+                  <a:lnTo>
+                    <a:pt x="115004" y="6331"/>
+                  </a:lnTo>
+                  <a:cubicBezTo>
+                    <a:pt x="1332146" y="141087"/>
+                    <a:pt x="2299773" y="1195988"/>
+                    <a:pt x="2423380" y="2522908"/>
+                  </a:cubicBezTo>
+                  <a:lnTo>
+                    <a:pt x="2431751" y="2703641"/>
+                  </a:lnTo>
+                  <a:close/>
+                </a:path>
+              </a:pathLst>
+            </a:custGeom>
+          </p:spPr>
+          <p:style>
+            <a:lnRef idx="2">
+              <a:schemeClr val="accent1">
+                <a:shade val="15000"/>
+              </a:schemeClr>
+            </a:lnRef>
+            <a:fillRef idx="1">
+              <a:schemeClr val="accent1"/>
+            </a:fillRef>
+            <a:effectRef idx="0">
+              <a:schemeClr val="accent1"/>
+            </a:effectRef>
+            <a:fontRef idx="minor">
+              <a:schemeClr val="lt1"/>
+            </a:fontRef>
+          </p:style>
+          <p:txBody>
+            <a:bodyPr wrap="square" rtlCol="0" anchor="ctr">
+              <a:noAutofit/>
+            </a:bodyPr>
+            <a:lstStyle/>
+            <a:p>
+              <a:pPr algn="ctr"/>
+              <a:endParaRPr lang="es-MX" noProof="0" dirty="0"/>
+            </a:p>
+          </p:txBody>
+        </p:sp>
+        <p:sp>
+          <p:nvSpPr>
+            <p:cNvPr id="22" name="Forma libre: forma 21">
+              <a:extLst>
+                <a:ext uri="{FF2B5EF4-FFF2-40B4-BE49-F238E27FC236}">
+                  <a16:creationId xmlns:a16="http://schemas.microsoft.com/office/drawing/2014/main" id="{29D20CA2-2459-692E-1E0F-17FAB4D91AC9}"/>
+                </a:ext>
+              </a:extLst>
+            </p:cNvPr>
+            <p:cNvSpPr/>
+            <p:nvPr/>
+          </p:nvSpPr>
+          <p:spPr>
+            <a:xfrm rot="16200000">
+              <a:off x="3289913" y="3306143"/>
+              <a:ext cx="2515515" cy="2708252"/>
+            </a:xfrm>
+            <a:custGeom>
+              <a:avLst/>
+              <a:gdLst>
+                <a:gd name="csX0" fmla="*/ 2515515 w 2515515"/>
+                <a:gd name="csY0" fmla="*/ 0 h 2708252"/>
+                <a:gd name="csX1" fmla="*/ 2515515 w 2515515"/>
+                <a:gd name="csY1" fmla="*/ 644670 h 2708252"/>
+                <a:gd name="csX2" fmla="*/ 2382651 w 2515515"/>
+                <a:gd name="csY2" fmla="*/ 652185 h 2708252"/>
+                <a:gd name="csX3" fmla="*/ 649615 w 2515515"/>
+                <a:gd name="csY3" fmla="*/ 2593422 h 2708252"/>
+                <a:gd name="csX4" fmla="*/ 644439 w 2515515"/>
+                <a:gd name="csY4" fmla="*/ 2708252 h 2708252"/>
+                <a:gd name="csX5" fmla="*/ 0 w 2515515"/>
+                <a:gd name="csY5" fmla="*/ 2708252 h 2708252"/>
+                <a:gd name="csX6" fmla="*/ 8371 w 2515515"/>
+                <a:gd name="csY6" fmla="*/ 2527519 h 2708252"/>
+                <a:gd name="csX7" fmla="*/ 2316747 w 2515515"/>
+                <a:gd name="csY7" fmla="*/ 10942 h 2708252"/>
+                <a:gd name="csX8" fmla="*/ 2515515 w 2515515"/>
+                <a:gd name="csY8" fmla="*/ 0 h 2708252"/>
+              </a:gdLst>
+              <a:ahLst/>
+              <a:cxnLst>
+                <a:cxn ang="0">
+                  <a:pos x="csX0" y="csY0"/>
+                </a:cxn>
+                <a:cxn ang="0">
+                  <a:pos x="csX1" y="csY1"/>
+                </a:cxn>
+                <a:cxn ang="0">
+                  <a:pos x="csX2" y="csY2"/>
+                </a:cxn>
+                <a:cxn ang="0">
+                  <a:pos x="csX3" y="csY3"/>
+                </a:cxn>
+                <a:cxn ang="0">
+                  <a:pos x="csX4" y="csY4"/>
+                </a:cxn>
+                <a:cxn ang="0">
+                  <a:pos x="csX5" y="csY5"/>
+                </a:cxn>
+                <a:cxn ang="0">
+                  <a:pos x="csX6" y="csY6"/>
+                </a:cxn>
+                <a:cxn ang="0">
+                  <a:pos x="csX7" y="csY7"/>
+                </a:cxn>
+                <a:cxn ang="0">
+                  <a:pos x="csX8" y="csY8"/>
+                </a:cxn>
+              </a:cxnLst>
+              <a:rect l="l" t="t" r="r" b="b"/>
+              <a:pathLst>
+                <a:path w="2515515" h="2708252">
+                  <a:moveTo>
+                    <a:pt x="2515515" y="0"/>
+                  </a:moveTo>
+                  <a:lnTo>
+                    <a:pt x="2515515" y="644670"/>
+                  </a:lnTo>
+                  <a:lnTo>
+                    <a:pt x="2382651" y="652185"/>
+                  </a:lnTo>
+                  <a:cubicBezTo>
+                    <a:pt x="1468871" y="756133"/>
+                    <a:pt x="742415" y="1569863"/>
+                    <a:pt x="649615" y="2593422"/>
+                  </a:cubicBezTo>
+                  <a:lnTo>
+                    <a:pt x="644439" y="2708252"/>
+                  </a:lnTo>
+                  <a:lnTo>
+                    <a:pt x="0" y="2708252"/>
+                  </a:lnTo>
+                  <a:lnTo>
+                    <a:pt x="8371" y="2527519"/>
+                  </a:lnTo>
+                  <a:cubicBezTo>
+                    <a:pt x="131979" y="1200599"/>
+                    <a:pt x="1099606" y="145698"/>
+                    <a:pt x="2316747" y="10942"/>
+                  </a:cubicBezTo>
+                  <a:lnTo>
+                    <a:pt x="2515515" y="0"/>
+                  </a:lnTo>
+                  <a:close/>
+                </a:path>
+              </a:pathLst>
+            </a:custGeom>
+          </p:spPr>
+          <p:style>
+            <a:lnRef idx="2">
+              <a:schemeClr val="accent1">
+                <a:shade val="15000"/>
+              </a:schemeClr>
+            </a:lnRef>
+            <a:fillRef idx="1">
+              <a:schemeClr val="accent1"/>
+            </a:fillRef>
+            <a:effectRef idx="0">
+              <a:schemeClr val="accent1"/>
+            </a:effectRef>
+            <a:fontRef idx="minor">
+              <a:schemeClr val="lt1"/>
+            </a:fontRef>
+          </p:style>
+          <p:txBody>
+            <a:bodyPr wrap="square" rtlCol="0" anchor="ctr">
+              <a:noAutofit/>
+            </a:bodyPr>
+            <a:lstStyle/>
+            <a:p>
+              <a:pPr algn="ctr"/>
+              <a:endParaRPr lang="es-MX" noProof="0" dirty="0"/>
+            </a:p>
+          </p:txBody>
+        </p:sp>
+        <p:sp>
+          <p:nvSpPr>
+            <p:cNvPr id="23" name="Forma libre: forma 22">
+              <a:extLst>
+                <a:ext uri="{FF2B5EF4-FFF2-40B4-BE49-F238E27FC236}">
+                  <a16:creationId xmlns:a16="http://schemas.microsoft.com/office/drawing/2014/main" id="{1076E72C-4D3F-BADC-F6A2-938C988FB5D4}"/>
+                </a:ext>
+              </a:extLst>
+            </p:cNvPr>
+            <p:cNvSpPr/>
+            <p:nvPr/>
+          </p:nvSpPr>
+          <p:spPr>
+            <a:xfrm rot="16200000">
+              <a:off x="6213232" y="3306142"/>
+              <a:ext cx="2515515" cy="2708254"/>
+            </a:xfrm>
+            <a:custGeom>
+              <a:avLst/>
+              <a:gdLst>
+                <a:gd name="csX0" fmla="*/ 2515515 w 2515515"/>
+                <a:gd name="csY0" fmla="*/ 2063582 h 2708254"/>
+                <a:gd name="csX1" fmla="*/ 2515515 w 2515515"/>
+                <a:gd name="csY1" fmla="*/ 2708254 h 2708254"/>
+                <a:gd name="csX2" fmla="*/ 2316747 w 2515515"/>
+                <a:gd name="csY2" fmla="*/ 2697312 h 2708254"/>
+                <a:gd name="csX3" fmla="*/ 8371 w 2515515"/>
+                <a:gd name="csY3" fmla="*/ 180735 h 2708254"/>
+                <a:gd name="csX4" fmla="*/ 0 w 2515515"/>
+                <a:gd name="csY4" fmla="*/ 0 h 2708254"/>
+                <a:gd name="csX5" fmla="*/ 644439 w 2515515"/>
+                <a:gd name="csY5" fmla="*/ 0 h 2708254"/>
+                <a:gd name="csX6" fmla="*/ 649615 w 2515515"/>
+                <a:gd name="csY6" fmla="*/ 114830 h 2708254"/>
+                <a:gd name="csX7" fmla="*/ 2382651 w 2515515"/>
+                <a:gd name="csY7" fmla="*/ 2056067 h 2708254"/>
+                <a:gd name="csX8" fmla="*/ 2515515 w 2515515"/>
+                <a:gd name="csY8" fmla="*/ 2063582 h 2708254"/>
+              </a:gdLst>
+              <a:ahLst/>
+              <a:cxnLst>
+                <a:cxn ang="0">
+                  <a:pos x="csX0" y="csY0"/>
+                </a:cxn>
+                <a:cxn ang="0">
+                  <a:pos x="csX1" y="csY1"/>
+                </a:cxn>
+                <a:cxn ang="0">
+                  <a:pos x="csX2" y="csY2"/>
+                </a:cxn>
+                <a:cxn ang="0">
+                  <a:pos x="csX3" y="csY3"/>
+                </a:cxn>
+                <a:cxn ang="0">
+                  <a:pos x="csX4" y="csY4"/>
+                </a:cxn>
+                <a:cxn ang="0">
+                  <a:pos x="csX5" y="csY5"/>
+                </a:cxn>
+                <a:cxn ang="0">
+                  <a:pos x="csX6" y="csY6"/>
+                </a:cxn>
+                <a:cxn ang="0">
+                  <a:pos x="csX7" y="csY7"/>
+                </a:cxn>
+                <a:cxn ang="0">
+                  <a:pos x="csX8" y="csY8"/>
+                </a:cxn>
+              </a:cxnLst>
+              <a:rect l="l" t="t" r="r" b="b"/>
+              <a:pathLst>
+                <a:path w="2515515" h="2708254">
+                  <a:moveTo>
+                    <a:pt x="2515515" y="2063582"/>
+                  </a:moveTo>
+                  <a:lnTo>
+                    <a:pt x="2515515" y="2708254"/>
+                  </a:lnTo>
+                  <a:lnTo>
+                    <a:pt x="2316747" y="2697312"/>
+                  </a:lnTo>
+                  <a:cubicBezTo>
+                    <a:pt x="1099605" y="2562556"/>
+                    <a:pt x="131978" y="1507655"/>
+                    <a:pt x="8371" y="180735"/>
+                  </a:cubicBezTo>
+                  <a:lnTo>
+                    <a:pt x="0" y="0"/>
+                  </a:lnTo>
+                  <a:lnTo>
+                    <a:pt x="644439" y="0"/>
+                  </a:lnTo>
+                  <a:lnTo>
+                    <a:pt x="649615" y="114830"/>
+                  </a:lnTo>
+                  <a:cubicBezTo>
+                    <a:pt x="742415" y="1138389"/>
+                    <a:pt x="1468870" y="1952119"/>
+                    <a:pt x="2382651" y="2056067"/>
+                  </a:cubicBezTo>
+                  <a:lnTo>
+                    <a:pt x="2515515" y="2063582"/>
+                  </a:lnTo>
+                  <a:close/>
+                </a:path>
+              </a:pathLst>
+            </a:custGeom>
+          </p:spPr>
+          <p:style>
+            <a:lnRef idx="2">
+              <a:schemeClr val="accent1">
+                <a:shade val="15000"/>
+              </a:schemeClr>
+            </a:lnRef>
+            <a:fillRef idx="1">
+              <a:schemeClr val="accent1"/>
+            </a:fillRef>
+            <a:effectRef idx="0">
+              <a:schemeClr val="accent1"/>
+            </a:effectRef>
+            <a:fontRef idx="minor">
+              <a:schemeClr val="lt1"/>
+            </a:fontRef>
+          </p:style>
+          <p:txBody>
+            <a:bodyPr wrap="square" rtlCol="0" anchor="ctr">
+              <a:noAutofit/>
+            </a:bodyPr>
+            <a:lstStyle/>
+            <a:p>
+              <a:pPr algn="ctr"/>
+              <a:endParaRPr lang="es-MX" noProof="0" dirty="0"/>
+            </a:p>
+          </p:txBody>
+        </p:sp>
+      </p:grpSp>
+      <p:pic>
+        <p:nvPicPr>
+          <p:cNvPr id="3" name="Imagen 2">
+            <a:extLst>
+              <a:ext uri="{FF2B5EF4-FFF2-40B4-BE49-F238E27FC236}">
+                <a16:creationId xmlns:a16="http://schemas.microsoft.com/office/drawing/2014/main" id="{CDBEA1B8-A4B8-9FD2-49A9-9320F6F05AB8}"/>
+              </a:ext>
+            </a:extLst>
+          </p:cNvPr>
+          <p:cNvPicPr>
+            <a:picLocks noChangeAspect="1"/>
+          </p:cNvPicPr>
+          <p:nvPr/>
+        </p:nvPicPr>
+        <p:blipFill>
+          <a:blip r:embed="rId3"/>
+          <a:stretch>
+            <a:fillRect/>
+          </a:stretch>
+        </p:blipFill>
+        <p:spPr>
+          <a:xfrm>
+            <a:off x="5842000" y="2070100"/>
+            <a:ext cx="6210649" cy="3346700"/>
+          </a:xfrm>
+          <a:prstGeom prst="rect">
+            <a:avLst/>
+          </a:prstGeom>
+        </p:spPr>
+      </p:pic>
+      <p:grpSp>
+        <p:nvGrpSpPr>
+          <p:cNvPr id="4" name="Grupo 3">
+            <a:extLst>
+              <a:ext uri="{FF2B5EF4-FFF2-40B4-BE49-F238E27FC236}">
+                <a16:creationId xmlns:a16="http://schemas.microsoft.com/office/drawing/2014/main" id="{4CDA9A3C-E827-C168-2103-A76AFC50E562}"/>
+              </a:ext>
+            </a:extLst>
+          </p:cNvPr>
+          <p:cNvGrpSpPr/>
+          <p:nvPr/>
+        </p:nvGrpSpPr>
+        <p:grpSpPr>
+          <a:xfrm>
+            <a:off x="6379029" y="497882"/>
+            <a:ext cx="10067471" cy="1143288"/>
+            <a:chOff x="6480629" y="550482"/>
+            <a:chExt cx="10067471" cy="1143288"/>
+          </a:xfrm>
+        </p:grpSpPr>
+        <p:sp>
+          <p:nvSpPr>
+            <p:cNvPr id="5" name="CuadroTexto 4">
+              <a:extLst>
+                <a:ext uri="{FF2B5EF4-FFF2-40B4-BE49-F238E27FC236}">
+                  <a16:creationId xmlns:a16="http://schemas.microsoft.com/office/drawing/2014/main" id="{6CBE37A4-CE5E-7CEA-E13E-5BB05EDDFE2E}"/>
+                </a:ext>
+              </a:extLst>
+            </p:cNvPr>
+            <p:cNvSpPr txBox="1"/>
+            <p:nvPr/>
+          </p:nvSpPr>
+          <p:spPr>
+            <a:xfrm>
+              <a:off x="8350790" y="550482"/>
+              <a:ext cx="8197310" cy="584775"/>
+            </a:xfrm>
+            <a:prstGeom prst="rect">
+              <a:avLst/>
+            </a:prstGeom>
+            <a:noFill/>
+          </p:spPr>
+          <p:txBody>
+            <a:bodyPr wrap="square" rtlCol="0">
+              <a:spAutoFit/>
+            </a:bodyPr>
+            <a:lstStyle/>
+            <a:p>
+              <a:r>
+                <a:rPr lang="en-US" sz="3200" b="1" noProof="0" dirty="0">
+                  <a:solidFill>
+                    <a:schemeClr val="bg1"/>
+                  </a:solidFill>
+                </a:rPr>
+                <a:t>Carga de Materias</a:t>
+              </a:r>
+              <a:endParaRPr lang="es-MX" sz="3200" b="1" noProof="0" dirty="0">
+                <a:solidFill>
+                  <a:schemeClr val="bg1"/>
+                </a:solidFill>
+              </a:endParaRPr>
+            </a:p>
+          </p:txBody>
+        </p:sp>
+        <p:sp>
+          <p:nvSpPr>
+            <p:cNvPr id="6" name="Signo menos 5">
+              <a:extLst>
+                <a:ext uri="{FF2B5EF4-FFF2-40B4-BE49-F238E27FC236}">
+                  <a16:creationId xmlns:a16="http://schemas.microsoft.com/office/drawing/2014/main" id="{571F7FB1-CBB0-8FBA-64C9-BFA1053A61CB}"/>
+                </a:ext>
+              </a:extLst>
+            </p:cNvPr>
+            <p:cNvSpPr/>
+            <p:nvPr/>
+          </p:nvSpPr>
+          <p:spPr>
+            <a:xfrm>
+              <a:off x="6480629" y="842870"/>
+              <a:ext cx="6714671" cy="850900"/>
+            </a:xfrm>
+            <a:prstGeom prst="mathMinus">
+              <a:avLst/>
+            </a:prstGeom>
+            <a:solidFill>
+              <a:schemeClr val="bg1"/>
+            </a:solidFill>
+          </p:spPr>
+          <p:style>
+            <a:lnRef idx="2">
+              <a:schemeClr val="accent1">
+                <a:shade val="15000"/>
+              </a:schemeClr>
+            </a:lnRef>
+            <a:fillRef idx="1">
+              <a:schemeClr val="accent1"/>
+            </a:fillRef>
+            <a:effectRef idx="0">
+              <a:schemeClr val="accent1"/>
+            </a:effectRef>
+            <a:fontRef idx="minor">
+              <a:schemeClr val="lt1"/>
+            </a:fontRef>
+          </p:style>
+          <p:txBody>
+            <a:bodyPr rtlCol="0" anchor="ctr"/>
+            <a:lstStyle/>
+            <a:p>
+              <a:pPr algn="ctr"/>
+              <a:endParaRPr lang="es-MX" noProof="0" dirty="0"/>
+            </a:p>
+          </p:txBody>
+        </p:sp>
+      </p:grpSp>
+      <p:sp>
+        <p:nvSpPr>
+          <p:cNvPr id="7" name="CuadroTexto 6">
+            <a:extLst>
+              <a:ext uri="{FF2B5EF4-FFF2-40B4-BE49-F238E27FC236}">
+                <a16:creationId xmlns:a16="http://schemas.microsoft.com/office/drawing/2014/main" id="{5F9B59F0-9B76-1AE5-A7F8-27326BAC028A}"/>
+              </a:ext>
+            </a:extLst>
+          </p:cNvPr>
+          <p:cNvSpPr txBox="1"/>
+          <p:nvPr/>
+        </p:nvSpPr>
+        <p:spPr>
+          <a:xfrm>
+            <a:off x="1476451" y="1915976"/>
+            <a:ext cx="4255482" cy="3693319"/>
+          </a:xfrm>
+          <a:prstGeom prst="rect">
+            <a:avLst/>
+          </a:prstGeom>
+          <a:noFill/>
+        </p:spPr>
+        <p:txBody>
+          <a:bodyPr wrap="square" rtlCol="0">
+            <a:spAutoFit/>
+          </a:bodyPr>
+          <a:lstStyle/>
+          <a:p>
+            <a:r>
+              <a:rPr lang="en-US" b="1" noProof="0" dirty="0">
+                <a:solidFill>
+                  <a:schemeClr val="bg1"/>
+                </a:solidFill>
+              </a:rPr>
+              <a:t>La pagina de carga de </a:t>
+            </a:r>
+            <a:r>
+              <a:rPr lang="en-US" b="1" noProof="0" dirty="0" err="1">
+                <a:solidFill>
+                  <a:schemeClr val="bg1"/>
+                </a:solidFill>
+              </a:rPr>
+              <a:t>materias</a:t>
+            </a:r>
+            <a:r>
+              <a:rPr lang="en-US" b="1" dirty="0">
+                <a:solidFill>
+                  <a:schemeClr val="bg1"/>
+                </a:solidFill>
+              </a:rPr>
+              <a:t> </a:t>
+            </a:r>
+            <a:r>
+              <a:rPr lang="en-US" b="1" dirty="0" err="1">
+                <a:solidFill>
+                  <a:schemeClr val="bg1"/>
+                </a:solidFill>
+              </a:rPr>
+              <a:t>cuenta</a:t>
+            </a:r>
+            <a:r>
+              <a:rPr lang="en-US" b="1" dirty="0">
+                <a:solidFill>
+                  <a:schemeClr val="bg1"/>
+                </a:solidFill>
+              </a:rPr>
+              <a:t> con:</a:t>
+            </a:r>
+          </a:p>
+          <a:p>
+            <a:r>
+              <a:rPr lang="en-US" b="1" noProof="0" dirty="0">
+                <a:solidFill>
+                  <a:schemeClr val="bg1"/>
+                </a:solidFill>
+              </a:rPr>
+              <a:t>U</a:t>
+            </a:r>
+            <a:r>
+              <a:rPr lang="en-US" b="1" dirty="0" err="1">
+                <a:solidFill>
+                  <a:schemeClr val="bg1"/>
+                </a:solidFill>
+              </a:rPr>
+              <a:t>na</a:t>
+            </a:r>
+            <a:r>
+              <a:rPr lang="en-US" b="1" dirty="0">
+                <a:solidFill>
+                  <a:schemeClr val="bg1"/>
+                </a:solidFill>
+              </a:rPr>
+              <a:t> barra lateral al </a:t>
+            </a:r>
+            <a:r>
+              <a:rPr lang="en-US" b="1" dirty="0" err="1">
+                <a:solidFill>
+                  <a:schemeClr val="bg1"/>
+                </a:solidFill>
+              </a:rPr>
+              <a:t>lado</a:t>
+            </a:r>
+            <a:r>
+              <a:rPr lang="en-US" b="1" dirty="0">
+                <a:solidFill>
+                  <a:schemeClr val="bg1"/>
+                </a:solidFill>
+              </a:rPr>
+              <a:t> Izquierdo para la </a:t>
+            </a:r>
+            <a:r>
+              <a:rPr lang="en-US" b="1" dirty="0" err="1">
+                <a:solidFill>
+                  <a:schemeClr val="bg1"/>
+                </a:solidFill>
+              </a:rPr>
+              <a:t>navegacion</a:t>
+            </a:r>
+            <a:r>
+              <a:rPr lang="en-US" b="1" dirty="0">
+                <a:solidFill>
+                  <a:schemeClr val="bg1"/>
+                </a:solidFill>
+              </a:rPr>
+              <a:t> entre las </a:t>
+            </a:r>
+            <a:r>
+              <a:rPr lang="en-US" b="1" dirty="0" err="1">
+                <a:solidFill>
+                  <a:schemeClr val="bg1"/>
+                </a:solidFill>
+              </a:rPr>
+              <a:t>distintas</a:t>
+            </a:r>
+            <a:r>
+              <a:rPr lang="en-US" b="1" dirty="0">
+                <a:solidFill>
+                  <a:schemeClr val="bg1"/>
+                </a:solidFill>
+              </a:rPr>
+              <a:t> </a:t>
+            </a:r>
+            <a:r>
+              <a:rPr lang="en-US" b="1" dirty="0" err="1">
+                <a:solidFill>
+                  <a:schemeClr val="bg1"/>
+                </a:solidFill>
+              </a:rPr>
+              <a:t>paginas</a:t>
+            </a:r>
+            <a:r>
+              <a:rPr lang="en-US" b="1" dirty="0">
+                <a:solidFill>
+                  <a:schemeClr val="bg1"/>
+                </a:solidFill>
+              </a:rPr>
+              <a:t> del portal, un header </a:t>
+            </a:r>
+            <a:r>
+              <a:rPr lang="en-US" b="1" dirty="0" err="1">
+                <a:solidFill>
+                  <a:schemeClr val="bg1"/>
+                </a:solidFill>
+              </a:rPr>
+              <a:t>en</a:t>
+            </a:r>
+            <a:r>
+              <a:rPr lang="en-US" b="1" dirty="0">
+                <a:solidFill>
+                  <a:schemeClr val="bg1"/>
+                </a:solidFill>
+              </a:rPr>
+              <a:t> el </a:t>
+            </a:r>
+            <a:r>
+              <a:rPr lang="en-US" b="1" dirty="0" err="1">
+                <a:solidFill>
+                  <a:schemeClr val="bg1"/>
+                </a:solidFill>
+              </a:rPr>
+              <a:t>cual</a:t>
+            </a:r>
+            <a:r>
+              <a:rPr lang="en-US" b="1" dirty="0">
+                <a:solidFill>
+                  <a:schemeClr val="bg1"/>
+                </a:solidFill>
+              </a:rPr>
+              <a:t> se </a:t>
+            </a:r>
+            <a:r>
+              <a:rPr lang="en-US" b="1" dirty="0" err="1">
+                <a:solidFill>
+                  <a:schemeClr val="bg1"/>
+                </a:solidFill>
+              </a:rPr>
+              <a:t>muestra</a:t>
+            </a:r>
+            <a:r>
+              <a:rPr lang="en-US" b="1" dirty="0">
+                <a:solidFill>
+                  <a:schemeClr val="bg1"/>
+                </a:solidFill>
+              </a:rPr>
+              <a:t> el </a:t>
+            </a:r>
+            <a:r>
+              <a:rPr lang="en-US" b="1" dirty="0" err="1">
+                <a:solidFill>
+                  <a:schemeClr val="bg1"/>
+                </a:solidFill>
+              </a:rPr>
+              <a:t>nombre</a:t>
+            </a:r>
+            <a:r>
+              <a:rPr lang="en-US" b="1" dirty="0">
+                <a:solidFill>
+                  <a:schemeClr val="bg1"/>
+                </a:solidFill>
+              </a:rPr>
+              <a:t> de la pagina </a:t>
+            </a:r>
+            <a:r>
+              <a:rPr lang="en-US" b="1" dirty="0" err="1">
+                <a:solidFill>
+                  <a:schemeClr val="bg1"/>
+                </a:solidFill>
+              </a:rPr>
+              <a:t>en</a:t>
+            </a:r>
+            <a:r>
+              <a:rPr lang="en-US" b="1" dirty="0">
+                <a:solidFill>
+                  <a:schemeClr val="bg1"/>
+                </a:solidFill>
+              </a:rPr>
+              <a:t> la </a:t>
+            </a:r>
+            <a:r>
+              <a:rPr lang="en-US" b="1" dirty="0" err="1">
+                <a:solidFill>
+                  <a:schemeClr val="bg1"/>
+                </a:solidFill>
+              </a:rPr>
+              <a:t>que</a:t>
+            </a:r>
+            <a:r>
+              <a:rPr lang="en-US" b="1" dirty="0">
+                <a:solidFill>
+                  <a:schemeClr val="bg1"/>
+                </a:solidFill>
+              </a:rPr>
+              <a:t> </a:t>
+            </a:r>
+            <a:r>
+              <a:rPr lang="en-US" b="1" dirty="0" err="1">
+                <a:solidFill>
+                  <a:schemeClr val="bg1"/>
+                </a:solidFill>
+              </a:rPr>
+              <a:t>estamos</a:t>
+            </a:r>
+            <a:r>
+              <a:rPr lang="en-US" b="1" dirty="0">
+                <a:solidFill>
+                  <a:schemeClr val="bg1"/>
+                </a:solidFill>
+              </a:rPr>
+              <a:t> y el logo de la Universidad </a:t>
+            </a:r>
+            <a:r>
+              <a:rPr lang="en-US" b="1" dirty="0" err="1">
+                <a:solidFill>
+                  <a:schemeClr val="bg1"/>
+                </a:solidFill>
+              </a:rPr>
+              <a:t>en</a:t>
+            </a:r>
+            <a:r>
+              <a:rPr lang="en-US" b="1" dirty="0">
+                <a:solidFill>
+                  <a:schemeClr val="bg1"/>
+                </a:solidFill>
+              </a:rPr>
+              <a:t> el </a:t>
+            </a:r>
+            <a:r>
+              <a:rPr lang="en-US" b="1" dirty="0" err="1">
+                <a:solidFill>
+                  <a:schemeClr val="bg1"/>
+                </a:solidFill>
+              </a:rPr>
+              <a:t>lado</a:t>
+            </a:r>
+            <a:r>
+              <a:rPr lang="en-US" b="1" dirty="0">
+                <a:solidFill>
+                  <a:schemeClr val="bg1"/>
+                </a:solidFill>
+              </a:rPr>
+              <a:t> Izquierdo, </a:t>
+            </a:r>
+            <a:r>
+              <a:rPr lang="en-US" b="1" dirty="0" err="1">
+                <a:solidFill>
+                  <a:schemeClr val="bg1"/>
+                </a:solidFill>
+              </a:rPr>
+              <a:t>en</a:t>
+            </a:r>
+            <a:r>
+              <a:rPr lang="en-US" b="1" dirty="0">
+                <a:solidFill>
+                  <a:schemeClr val="bg1"/>
+                </a:solidFill>
+              </a:rPr>
+              <a:t> el </a:t>
+            </a:r>
+            <a:r>
+              <a:rPr lang="en-US" b="1" dirty="0" err="1">
+                <a:solidFill>
+                  <a:schemeClr val="bg1"/>
+                </a:solidFill>
+              </a:rPr>
+              <a:t>casi</a:t>
+            </a:r>
+            <a:r>
+              <a:rPr lang="en-US" b="1" dirty="0">
+                <a:solidFill>
+                  <a:schemeClr val="bg1"/>
+                </a:solidFill>
+              </a:rPr>
+              <a:t> </a:t>
+            </a:r>
+            <a:r>
+              <a:rPr lang="en-US" b="1" dirty="0" err="1">
+                <a:solidFill>
+                  <a:schemeClr val="bg1"/>
+                </a:solidFill>
+              </a:rPr>
+              <a:t>centro</a:t>
+            </a:r>
+            <a:r>
+              <a:rPr lang="en-US" b="1" dirty="0">
+                <a:solidFill>
+                  <a:schemeClr val="bg1"/>
+                </a:solidFill>
+              </a:rPr>
+              <a:t> de la pagina </a:t>
+            </a:r>
+            <a:r>
+              <a:rPr lang="en-US" b="1" dirty="0" err="1">
+                <a:solidFill>
+                  <a:schemeClr val="bg1"/>
+                </a:solidFill>
+              </a:rPr>
+              <a:t>tenemos</a:t>
+            </a:r>
+            <a:r>
+              <a:rPr lang="en-US" b="1" dirty="0">
+                <a:solidFill>
+                  <a:schemeClr val="bg1"/>
+                </a:solidFill>
+              </a:rPr>
+              <a:t> el </a:t>
+            </a:r>
+            <a:r>
+              <a:rPr lang="en-US" b="1" dirty="0" err="1">
+                <a:solidFill>
+                  <a:schemeClr val="bg1"/>
+                </a:solidFill>
+              </a:rPr>
+              <a:t>contenido</a:t>
+            </a:r>
+            <a:r>
+              <a:rPr lang="en-US" b="1" dirty="0">
+                <a:solidFill>
+                  <a:schemeClr val="bg1"/>
+                </a:solidFill>
+              </a:rPr>
+              <a:t> principal, hasta </a:t>
+            </a:r>
+            <a:r>
+              <a:rPr lang="en-US" b="1" dirty="0" err="1">
+                <a:solidFill>
+                  <a:schemeClr val="bg1"/>
+                </a:solidFill>
+              </a:rPr>
+              <a:t>abajo</a:t>
+            </a:r>
+            <a:r>
+              <a:rPr lang="en-US" b="1" dirty="0">
+                <a:solidFill>
+                  <a:schemeClr val="bg1"/>
+                </a:solidFill>
+              </a:rPr>
+              <a:t> temenos un footer el </a:t>
+            </a:r>
+            <a:r>
+              <a:rPr lang="en-US" b="1" dirty="0" err="1">
+                <a:solidFill>
+                  <a:schemeClr val="bg1"/>
+                </a:solidFill>
+              </a:rPr>
+              <a:t>cual</a:t>
+            </a:r>
+            <a:r>
+              <a:rPr lang="en-US" b="1" dirty="0">
+                <a:solidFill>
+                  <a:schemeClr val="bg1"/>
+                </a:solidFill>
+              </a:rPr>
+              <a:t> </a:t>
+            </a:r>
+            <a:r>
+              <a:rPr lang="en-US" b="1" dirty="0" err="1">
+                <a:solidFill>
+                  <a:schemeClr val="bg1"/>
+                </a:solidFill>
+              </a:rPr>
+              <a:t>muestra</a:t>
+            </a:r>
+            <a:r>
+              <a:rPr lang="en-US" b="1" dirty="0">
+                <a:solidFill>
+                  <a:schemeClr val="bg1"/>
+                </a:solidFill>
+              </a:rPr>
+              <a:t> el </a:t>
+            </a:r>
+            <a:r>
+              <a:rPr lang="en-US" b="1" dirty="0" err="1">
+                <a:solidFill>
+                  <a:schemeClr val="bg1"/>
+                </a:solidFill>
+              </a:rPr>
+              <a:t>nombre</a:t>
+            </a:r>
+            <a:r>
+              <a:rPr lang="en-US" b="1" dirty="0">
+                <a:solidFill>
+                  <a:schemeClr val="bg1"/>
+                </a:solidFill>
+              </a:rPr>
+              <a:t> de la Universidad</a:t>
+            </a:r>
+            <a:br>
+              <a:rPr lang="en-US" b="1" dirty="0">
+                <a:solidFill>
+                  <a:schemeClr val="bg1"/>
+                </a:solidFill>
+              </a:rPr>
+            </a:br>
+            <a:r>
+              <a:rPr lang="en-US" b="1" dirty="0">
+                <a:solidFill>
+                  <a:schemeClr val="bg1"/>
+                </a:solidFill>
+              </a:rPr>
+              <a:t>(Esto lo </a:t>
+            </a:r>
+            <a:r>
+              <a:rPr lang="en-US" b="1" dirty="0" err="1">
+                <a:solidFill>
+                  <a:schemeClr val="bg1"/>
+                </a:solidFill>
+              </a:rPr>
+              <a:t>desarrollare</a:t>
+            </a:r>
+            <a:r>
+              <a:rPr lang="en-US" b="1" dirty="0">
+                <a:solidFill>
+                  <a:schemeClr val="bg1"/>
+                </a:solidFill>
+              </a:rPr>
+              <a:t> mas al </a:t>
+            </a:r>
+            <a:r>
+              <a:rPr lang="en-US" b="1" dirty="0" err="1">
+                <a:solidFill>
+                  <a:schemeClr val="bg1"/>
+                </a:solidFill>
+              </a:rPr>
+              <a:t>exponer</a:t>
+            </a:r>
+            <a:r>
+              <a:rPr lang="en-US" b="1" dirty="0">
+                <a:solidFill>
+                  <a:schemeClr val="bg1"/>
+                </a:solidFill>
+              </a:rPr>
+              <a:t>)</a:t>
+            </a:r>
+            <a:endParaRPr lang="es-MX" b="1" noProof="0" dirty="0">
+              <a:solidFill>
+                <a:schemeClr val="bg1"/>
+              </a:solidFill>
+            </a:endParaRPr>
+          </a:p>
+        </p:txBody>
+      </p:sp>
+    </p:spTree>
+    <p:extLst>
+      <p:ext uri="{BB962C8B-B14F-4D97-AF65-F5344CB8AC3E}">
+        <p14:creationId xmlns:p14="http://schemas.microsoft.com/office/powerpoint/2010/main" val="3089912078"/>
+      </p:ext>
+    </p:extLst>
+  </p:cSld>
+  <p:clrMapOvr>
+    <a:masterClrMapping/>
+  </p:clrMapOvr>
+  <mc:AlternateContent xmlns:mc="http://schemas.openxmlformats.org/markup-compatibility/2006" xmlns:p159="http://schemas.microsoft.com/office/powerpoint/2015/09/main">
+    <mc:Choice Requires="p159">
+      <p:transition xmlns:p14="http://schemas.microsoft.com/office/powerpoint/2010/main" spd="slow" p14:dur="2000">
+        <p159:morph option="byObject"/>
+      </p:transition>
+    </mc:Choice>
+    <mc:Fallback xmlns="">
+      <p:transition spd="slow">
+        <p:fade/>
+      </p:transition>
+    </mc:Fallback>
+  </mc:AlternateContent>
+</p:sld>
+</file>
+
+<file path=ppt/slides/slide5.xml><?xml version="1.0" encoding="utf-8"?>
+<p:sld xmlns:a="http://schemas.openxmlformats.org/drawingml/2006/main" xmlns:r="http://schemas.openxmlformats.org/officeDocument/2006/relationships" xmlns:p="http://schemas.openxmlformats.org/presentationml/2006/main">
+  <p:cSld>
+    <p:spTree>
+      <p:nvGrpSpPr>
+        <p:cNvPr id="1" name=""/>
+        <p:cNvGrpSpPr/>
+        <p:nvPr/>
+      </p:nvGrpSpPr>
+      <p:grpSpPr>
+        <a:xfrm>
+          <a:off x="0" y="0"/>
+          <a:ext cx="0" cy="0"/>
+          <a:chOff x="0" y="0"/>
+          <a:chExt cx="0" cy="0"/>
+        </a:xfrm>
+      </p:grpSpPr>
+      <p:pic>
+        <p:nvPicPr>
+          <p:cNvPr id="2" name="Imagen 1">
+            <a:extLst>
+              <a:ext uri="{FF2B5EF4-FFF2-40B4-BE49-F238E27FC236}">
+                <a16:creationId xmlns:a16="http://schemas.microsoft.com/office/drawing/2014/main" id="{A2DEBB5F-EAB2-9437-7838-0011FBA01893}"/>
+              </a:ext>
+            </a:extLst>
+          </p:cNvPr>
+          <p:cNvPicPr>
+            <a:picLocks noChangeAspect="1"/>
+          </p:cNvPicPr>
+          <p:nvPr/>
+        </p:nvPicPr>
+        <p:blipFill>
+          <a:blip r:embed="rId2"/>
+          <a:stretch>
+            <a:fillRect/>
+          </a:stretch>
+        </p:blipFill>
+        <p:spPr>
+          <a:xfrm>
+            <a:off x="101425" y="258855"/>
+            <a:ext cx="11989149" cy="5857690"/>
+          </a:xfrm>
+          <a:prstGeom prst="roundRect">
+            <a:avLst>
+              <a:gd name="adj" fmla="val 8594"/>
+            </a:avLst>
+          </a:prstGeom>
+          <a:solidFill>
+            <a:srgbClr val="FFFFFF">
+              <a:shade val="85000"/>
+            </a:srgbClr>
+          </a:solidFill>
+          <a:ln>
+            <a:noFill/>
+          </a:ln>
+          <a:effectLst>
+            <a:reflection blurRad="12700" stA="38000" endPos="28000" dist="5000" dir="5400000" sy="-100000" algn="bl" rotWithShape="0"/>
+          </a:effectLst>
+        </p:spPr>
+      </p:pic>
+    </p:spTree>
+    <p:extLst>
+      <p:ext uri="{BB962C8B-B14F-4D97-AF65-F5344CB8AC3E}">
+        <p14:creationId xmlns:p14="http://schemas.microsoft.com/office/powerpoint/2010/main" val="1296508524"/>
+      </p:ext>
+    </p:extLst>
+  </p:cSld>
+  <p:clrMapOvr>
+    <a:masterClrMapping/>
+  </p:clrMapOvr>
+  <mc:AlternateContent xmlns:mc="http://schemas.openxmlformats.org/markup-compatibility/2006" xmlns:p159="http://schemas.microsoft.com/office/powerpoint/2015/09/main">
+    <mc:Choice Requires="p159">
+      <p:transition xmlns:p14="http://schemas.microsoft.com/office/powerpoint/2010/main" spd="slow" p14:dur="2000">
+        <p159:morph option="byObject"/>
+      </p:transition>
+    </mc:Choice>
+    <mc:Fallback xmlns="">
+      <p:transition spd="slow">
+        <p:fade/>
+      </p:transition>
+    </mc:Fallback>
+  </mc:AlternateContent>
+</p:sld>
+</file>
+
+<file path=ppt/slides/slide6.xml><?xml version="1.0" encoding="utf-8"?>
+<p:sld xmlns:a="http://schemas.openxmlformats.org/drawingml/2006/main" xmlns:r="http://schemas.openxmlformats.org/officeDocument/2006/relationships" xmlns:p="http://schemas.openxmlformats.org/presentationml/2006/main">
+  <p:cSld>
+    <p:spTree>
+      <p:nvGrpSpPr>
+        <p:cNvPr id="1" name=""/>
+        <p:cNvGrpSpPr/>
+        <p:nvPr/>
+      </p:nvGrpSpPr>
+      <p:grpSpPr>
+        <a:xfrm>
+          <a:off x="0" y="0"/>
+          <a:ext cx="0" cy="0"/>
+          <a:chOff x="0" y="0"/>
+          <a:chExt cx="0" cy="0"/>
+        </a:xfrm>
+      </p:grpSpPr>
+      <p:sp>
+        <p:nvSpPr>
+          <p:cNvPr id="2" name="Título 1">
+            <a:extLst>
+              <a:ext uri="{FF2B5EF4-FFF2-40B4-BE49-F238E27FC236}">
+                <a16:creationId xmlns:a16="http://schemas.microsoft.com/office/drawing/2014/main" id="{B2A93777-73F4-5111-2916-5106EFD24E1C}"/>
+              </a:ext>
+            </a:extLst>
+          </p:cNvPr>
+          <p:cNvSpPr>
+            <a:spLocks noGrp="1"/>
+          </p:cNvSpPr>
+          <p:nvPr>
+            <p:ph type="title"/>
+          </p:nvPr>
+        </p:nvSpPr>
+        <p:spPr>
+          <a:xfrm>
+            <a:off x="1024467" y="500062"/>
+            <a:ext cx="10515600" cy="1325563"/>
+          </a:xfrm>
+        </p:spPr>
+        <p:txBody>
+          <a:bodyPr/>
+          <a:lstStyle/>
+          <a:p>
+            <a:r>
+              <a:rPr lang="en-US" b="1" dirty="0" err="1">
+                <a:solidFill>
+                  <a:schemeClr val="bg1"/>
+                </a:solidFill>
+              </a:rPr>
+              <a:t>Preguntas</a:t>
+            </a:r>
+            <a:endParaRPr lang="es-MX" b="1" dirty="0">
+              <a:solidFill>
+                <a:schemeClr val="bg1"/>
+              </a:solidFill>
+            </a:endParaRPr>
+          </a:p>
+        </p:txBody>
+      </p:sp>
+      <p:sp>
+        <p:nvSpPr>
+          <p:cNvPr id="3" name="Marcador de contenido 2">
+            <a:extLst>
+              <a:ext uri="{FF2B5EF4-FFF2-40B4-BE49-F238E27FC236}">
+                <a16:creationId xmlns:a16="http://schemas.microsoft.com/office/drawing/2014/main" id="{FBB19DCD-A0A6-ACEC-BEAA-87F89C73E6C6}"/>
+              </a:ext>
+            </a:extLst>
+          </p:cNvPr>
+          <p:cNvSpPr>
+            <a:spLocks noGrp="1"/>
+          </p:cNvSpPr>
+          <p:nvPr>
+            <p:ph idx="1"/>
+          </p:nvPr>
+        </p:nvSpPr>
+        <p:spPr/>
+        <p:txBody>
+          <a:bodyPr/>
+          <a:lstStyle/>
+          <a:p>
+            <a:r>
+              <a:rPr lang="es-MX" dirty="0">
+                <a:solidFill>
+                  <a:schemeClr val="bg1"/>
+                </a:solidFill>
+              </a:rPr>
+              <a:t>¿Qué problema resuelve su diseño?</a:t>
+            </a:r>
+          </a:p>
+          <a:p>
+            <a:pPr marL="0" indent="0">
+              <a:buNone/>
+            </a:pPr>
+            <a:endParaRPr lang="es-MX" dirty="0">
+              <a:solidFill>
+                <a:schemeClr val="bg1"/>
+              </a:solidFill>
+            </a:endParaRPr>
+          </a:p>
+          <a:p>
+            <a:r>
+              <a:rPr lang="es-MX" dirty="0">
+                <a:solidFill>
+                  <a:schemeClr val="bg1"/>
+                </a:solidFill>
+              </a:rPr>
+              <a:t>¿Por qué su interfaz es fácil de usar?</a:t>
+            </a:r>
+          </a:p>
+          <a:p>
+            <a:pPr marL="0" indent="0">
+              <a:buNone/>
+            </a:pPr>
+            <a:endParaRPr lang="es-MX" dirty="0">
+              <a:solidFill>
+                <a:schemeClr val="bg1"/>
+              </a:solidFill>
+            </a:endParaRPr>
+          </a:p>
+          <a:p>
+            <a:r>
+              <a:rPr lang="es-MX" dirty="0">
+                <a:solidFill>
+                  <a:schemeClr val="bg1"/>
+                </a:solidFill>
+              </a:rPr>
+              <a:t>¿Qué decisiones tomaron (colores, distribución, elementos)?</a:t>
+            </a:r>
+          </a:p>
+          <a:p>
+            <a:pPr marL="0" indent="0">
+              <a:buNone/>
+            </a:pPr>
+            <a:endParaRPr lang="es-MX" dirty="0">
+              <a:solidFill>
+                <a:schemeClr val="bg1"/>
+              </a:solidFill>
+            </a:endParaRPr>
+          </a:p>
+          <a:p>
+            <a:r>
+              <a:rPr lang="es-MX" dirty="0">
+                <a:solidFill>
+                  <a:schemeClr val="bg1"/>
+                </a:solidFill>
+              </a:rPr>
+              <a:t>¿Qué hace su propuesta mejor que la de otros equipos?</a:t>
+            </a:r>
+          </a:p>
+          <a:p>
+            <a:endParaRPr lang="es-MX" dirty="0"/>
+          </a:p>
+        </p:txBody>
+      </p:sp>
+      <p:grpSp>
+        <p:nvGrpSpPr>
+          <p:cNvPr id="4" name="Grupo 3">
+            <a:extLst>
+              <a:ext uri="{FF2B5EF4-FFF2-40B4-BE49-F238E27FC236}">
+                <a16:creationId xmlns:a16="http://schemas.microsoft.com/office/drawing/2014/main" id="{07004641-7523-1BEC-62A9-4372F3E6332B}"/>
+              </a:ext>
+            </a:extLst>
+          </p:cNvPr>
+          <p:cNvGrpSpPr/>
+          <p:nvPr/>
+        </p:nvGrpSpPr>
+        <p:grpSpPr>
+          <a:xfrm rot="10357571">
+            <a:off x="-3496277" y="-2837839"/>
+            <a:ext cx="4990758" cy="4814628"/>
+            <a:chOff x="3193545" y="755695"/>
+            <a:chExt cx="5631572" cy="5162331"/>
+          </a:xfrm>
+        </p:grpSpPr>
+        <p:sp>
+          <p:nvSpPr>
+            <p:cNvPr id="5" name="Forma libre: forma 4">
+              <a:extLst>
+                <a:ext uri="{FF2B5EF4-FFF2-40B4-BE49-F238E27FC236}">
+                  <a16:creationId xmlns:a16="http://schemas.microsoft.com/office/drawing/2014/main" id="{9C7B51B4-94DD-0A23-154A-40C4DED5F91E}"/>
+                </a:ext>
+              </a:extLst>
+            </p:cNvPr>
+            <p:cNvSpPr/>
+            <p:nvPr/>
+          </p:nvSpPr>
+          <p:spPr>
+            <a:xfrm rot="16200000">
+              <a:off x="6252808" y="619749"/>
+              <a:ext cx="2431751" cy="2703643"/>
+            </a:xfrm>
+            <a:custGeom>
+              <a:avLst/>
+              <a:gdLst>
+                <a:gd name="csX0" fmla="*/ 2431751 w 2431751"/>
+                <a:gd name="csY0" fmla="*/ 0 h 2703643"/>
+                <a:gd name="csX1" fmla="*/ 2423380 w 2431751"/>
+                <a:gd name="csY1" fmla="*/ 180735 h 2703643"/>
+                <a:gd name="csX2" fmla="*/ 115004 w 2431751"/>
+                <a:gd name="csY2" fmla="*/ 2697312 h 2703643"/>
+                <a:gd name="csX3" fmla="*/ 0 w 2431751"/>
+                <a:gd name="csY3" fmla="*/ 2703643 h 2703643"/>
+                <a:gd name="csX4" fmla="*/ 0 w 2431751"/>
+                <a:gd name="csY4" fmla="*/ 2058844 h 2703643"/>
+                <a:gd name="csX5" fmla="*/ 49100 w 2431751"/>
+                <a:gd name="csY5" fmla="*/ 2056067 h 2703643"/>
+                <a:gd name="csX6" fmla="*/ 1782136 w 2431751"/>
+                <a:gd name="csY6" fmla="*/ 114830 h 2703643"/>
+                <a:gd name="csX7" fmla="*/ 1787313 w 2431751"/>
+                <a:gd name="csY7" fmla="*/ 0 h 2703643"/>
+                <a:gd name="csX8" fmla="*/ 2431751 w 2431751"/>
+                <a:gd name="csY8" fmla="*/ 0 h 2703643"/>
+              </a:gdLst>
+              <a:ahLst/>
+              <a:cxnLst>
+                <a:cxn ang="0">
+                  <a:pos x="csX0" y="csY0"/>
+                </a:cxn>
+                <a:cxn ang="0">
+                  <a:pos x="csX1" y="csY1"/>
+                </a:cxn>
+                <a:cxn ang="0">
+                  <a:pos x="csX2" y="csY2"/>
+                </a:cxn>
+                <a:cxn ang="0">
+                  <a:pos x="csX3" y="csY3"/>
+                </a:cxn>
+                <a:cxn ang="0">
+                  <a:pos x="csX4" y="csY4"/>
+                </a:cxn>
+                <a:cxn ang="0">
+                  <a:pos x="csX5" y="csY5"/>
+                </a:cxn>
+                <a:cxn ang="0">
+                  <a:pos x="csX6" y="csY6"/>
+                </a:cxn>
+                <a:cxn ang="0">
+                  <a:pos x="csX7" y="csY7"/>
+                </a:cxn>
+                <a:cxn ang="0">
+                  <a:pos x="csX8" y="csY8"/>
+                </a:cxn>
+              </a:cxnLst>
+              <a:rect l="l" t="t" r="r" b="b"/>
+              <a:pathLst>
+                <a:path w="2431751" h="2703643">
+                  <a:moveTo>
+                    <a:pt x="2431751" y="0"/>
+                  </a:moveTo>
+                  <a:lnTo>
+                    <a:pt x="2423380" y="180735"/>
+                  </a:lnTo>
+                  <a:cubicBezTo>
+                    <a:pt x="2299773" y="1507655"/>
+                    <a:pt x="1332145" y="2562556"/>
+                    <a:pt x="115004" y="2697312"/>
+                  </a:cubicBezTo>
+                  <a:lnTo>
+                    <a:pt x="0" y="2703643"/>
+                  </a:lnTo>
+                  <a:lnTo>
+                    <a:pt x="0" y="2058844"/>
+                  </a:lnTo>
+                  <a:lnTo>
+                    <a:pt x="49100" y="2056067"/>
+                  </a:lnTo>
+                  <a:cubicBezTo>
+                    <a:pt x="962881" y="1952119"/>
+                    <a:pt x="1689336" y="1138389"/>
+                    <a:pt x="1782136" y="114830"/>
+                  </a:cubicBezTo>
+                  <a:lnTo>
+                    <a:pt x="1787313" y="0"/>
+                  </a:lnTo>
+                  <a:lnTo>
+                    <a:pt x="2431751" y="0"/>
+                  </a:lnTo>
+                  <a:close/>
+                </a:path>
+              </a:pathLst>
+            </a:custGeom>
+          </p:spPr>
+          <p:style>
+            <a:lnRef idx="2">
+              <a:schemeClr val="accent1">
+                <a:shade val="15000"/>
+              </a:schemeClr>
+            </a:lnRef>
+            <a:fillRef idx="1">
+              <a:schemeClr val="accent1"/>
+            </a:fillRef>
+            <a:effectRef idx="0">
+              <a:schemeClr val="accent1"/>
+            </a:effectRef>
+            <a:fontRef idx="minor">
+              <a:schemeClr val="lt1"/>
+            </a:fontRef>
+          </p:style>
+          <p:txBody>
+            <a:bodyPr wrap="square" rtlCol="0" anchor="ctr">
+              <a:noAutofit/>
+            </a:bodyPr>
+            <a:lstStyle/>
+            <a:p>
+              <a:pPr algn="ctr"/>
+              <a:endParaRPr lang="es-MX" noProof="0" dirty="0"/>
+            </a:p>
+          </p:txBody>
+        </p:sp>
+        <p:sp>
+          <p:nvSpPr>
+            <p:cNvPr id="6" name="Forma libre: forma 5">
+              <a:extLst>
+                <a:ext uri="{FF2B5EF4-FFF2-40B4-BE49-F238E27FC236}">
+                  <a16:creationId xmlns:a16="http://schemas.microsoft.com/office/drawing/2014/main" id="{0D6F7EA9-7402-4E1E-1CCD-5738BB02B99D}"/>
+                </a:ext>
+              </a:extLst>
+            </p:cNvPr>
+            <p:cNvSpPr/>
+            <p:nvPr/>
+          </p:nvSpPr>
+          <p:spPr>
+            <a:xfrm rot="16200000">
+              <a:off x="3334100" y="619750"/>
+              <a:ext cx="2431751" cy="2703641"/>
+            </a:xfrm>
+            <a:custGeom>
+              <a:avLst/>
+              <a:gdLst>
+                <a:gd name="csX0" fmla="*/ 2431751 w 2431751"/>
+                <a:gd name="csY0" fmla="*/ 2703641 h 2703641"/>
+                <a:gd name="csX1" fmla="*/ 1787313 w 2431751"/>
+                <a:gd name="csY1" fmla="*/ 2703641 h 2703641"/>
+                <a:gd name="csX2" fmla="*/ 1782136 w 2431751"/>
+                <a:gd name="csY2" fmla="*/ 2588811 h 2703641"/>
+                <a:gd name="csX3" fmla="*/ 49100 w 2431751"/>
+                <a:gd name="csY3" fmla="*/ 647574 h 2703641"/>
+                <a:gd name="csX4" fmla="*/ 0 w 2431751"/>
+                <a:gd name="csY4" fmla="*/ 644797 h 2703641"/>
+                <a:gd name="csX5" fmla="*/ 0 w 2431751"/>
+                <a:gd name="csY5" fmla="*/ 0 h 2703641"/>
+                <a:gd name="csX6" fmla="*/ 115004 w 2431751"/>
+                <a:gd name="csY6" fmla="*/ 6331 h 2703641"/>
+                <a:gd name="csX7" fmla="*/ 2423380 w 2431751"/>
+                <a:gd name="csY7" fmla="*/ 2522908 h 2703641"/>
+                <a:gd name="csX8" fmla="*/ 2431751 w 2431751"/>
+                <a:gd name="csY8" fmla="*/ 2703641 h 2703641"/>
+              </a:gdLst>
+              <a:ahLst/>
+              <a:cxnLst>
+                <a:cxn ang="0">
+                  <a:pos x="csX0" y="csY0"/>
+                </a:cxn>
+                <a:cxn ang="0">
+                  <a:pos x="csX1" y="csY1"/>
+                </a:cxn>
+                <a:cxn ang="0">
+                  <a:pos x="csX2" y="csY2"/>
+                </a:cxn>
+                <a:cxn ang="0">
+                  <a:pos x="csX3" y="csY3"/>
+                </a:cxn>
+                <a:cxn ang="0">
+                  <a:pos x="csX4" y="csY4"/>
+                </a:cxn>
+                <a:cxn ang="0">
+                  <a:pos x="csX5" y="csY5"/>
+                </a:cxn>
+                <a:cxn ang="0">
+                  <a:pos x="csX6" y="csY6"/>
+                </a:cxn>
+                <a:cxn ang="0">
+                  <a:pos x="csX7" y="csY7"/>
+                </a:cxn>
+                <a:cxn ang="0">
+                  <a:pos x="csX8" y="csY8"/>
+                </a:cxn>
+              </a:cxnLst>
+              <a:rect l="l" t="t" r="r" b="b"/>
+              <a:pathLst>
+                <a:path w="2431751" h="2703641">
+                  <a:moveTo>
+                    <a:pt x="2431751" y="2703641"/>
+                  </a:moveTo>
+                  <a:lnTo>
+                    <a:pt x="1787313" y="2703641"/>
+                  </a:lnTo>
+                  <a:lnTo>
+                    <a:pt x="1782136" y="2588811"/>
+                  </a:lnTo>
+                  <a:cubicBezTo>
+                    <a:pt x="1689336" y="1565252"/>
+                    <a:pt x="962881" y="751523"/>
+                    <a:pt x="49100" y="647574"/>
+                  </a:cubicBezTo>
+                  <a:lnTo>
+                    <a:pt x="0" y="644797"/>
+                  </a:lnTo>
+                  <a:lnTo>
+                    <a:pt x="0" y="0"/>
+                  </a:lnTo>
+                  <a:lnTo>
+                    <a:pt x="115004" y="6331"/>
+                  </a:lnTo>
+                  <a:cubicBezTo>
+                    <a:pt x="1332146" y="141087"/>
+                    <a:pt x="2299773" y="1195988"/>
+                    <a:pt x="2423380" y="2522908"/>
+                  </a:cubicBezTo>
+                  <a:lnTo>
+                    <a:pt x="2431751" y="2703641"/>
+                  </a:lnTo>
+                  <a:close/>
+                </a:path>
+              </a:pathLst>
+            </a:custGeom>
+          </p:spPr>
+          <p:style>
+            <a:lnRef idx="2">
+              <a:schemeClr val="accent1">
+                <a:shade val="15000"/>
+              </a:schemeClr>
+            </a:lnRef>
+            <a:fillRef idx="1">
+              <a:schemeClr val="accent1"/>
+            </a:fillRef>
+            <a:effectRef idx="0">
+              <a:schemeClr val="accent1"/>
+            </a:effectRef>
+            <a:fontRef idx="minor">
+              <a:schemeClr val="lt1"/>
+            </a:fontRef>
+          </p:style>
+          <p:txBody>
+            <a:bodyPr wrap="square" rtlCol="0" anchor="ctr">
+              <a:noAutofit/>
+            </a:bodyPr>
+            <a:lstStyle/>
+            <a:p>
+              <a:pPr algn="ctr"/>
+              <a:endParaRPr lang="es-MX" noProof="0" dirty="0"/>
+            </a:p>
+          </p:txBody>
+        </p:sp>
+        <p:sp>
+          <p:nvSpPr>
+            <p:cNvPr id="7" name="Forma libre: forma 6">
+              <a:extLst>
+                <a:ext uri="{FF2B5EF4-FFF2-40B4-BE49-F238E27FC236}">
+                  <a16:creationId xmlns:a16="http://schemas.microsoft.com/office/drawing/2014/main" id="{6E2FAFB2-0E4A-7D55-291F-235A2735320A}"/>
+                </a:ext>
+              </a:extLst>
+            </p:cNvPr>
+            <p:cNvSpPr/>
+            <p:nvPr/>
+          </p:nvSpPr>
+          <p:spPr>
+            <a:xfrm rot="16200000">
+              <a:off x="3289913" y="3306143"/>
+              <a:ext cx="2515515" cy="2708252"/>
+            </a:xfrm>
+            <a:custGeom>
+              <a:avLst/>
+              <a:gdLst>
+                <a:gd name="csX0" fmla="*/ 2515515 w 2515515"/>
+                <a:gd name="csY0" fmla="*/ 0 h 2708252"/>
+                <a:gd name="csX1" fmla="*/ 2515515 w 2515515"/>
+                <a:gd name="csY1" fmla="*/ 644670 h 2708252"/>
+                <a:gd name="csX2" fmla="*/ 2382651 w 2515515"/>
+                <a:gd name="csY2" fmla="*/ 652185 h 2708252"/>
+                <a:gd name="csX3" fmla="*/ 649615 w 2515515"/>
+                <a:gd name="csY3" fmla="*/ 2593422 h 2708252"/>
+                <a:gd name="csX4" fmla="*/ 644439 w 2515515"/>
+                <a:gd name="csY4" fmla="*/ 2708252 h 2708252"/>
+                <a:gd name="csX5" fmla="*/ 0 w 2515515"/>
+                <a:gd name="csY5" fmla="*/ 2708252 h 2708252"/>
+                <a:gd name="csX6" fmla="*/ 8371 w 2515515"/>
+                <a:gd name="csY6" fmla="*/ 2527519 h 2708252"/>
+                <a:gd name="csX7" fmla="*/ 2316747 w 2515515"/>
+                <a:gd name="csY7" fmla="*/ 10942 h 2708252"/>
+                <a:gd name="csX8" fmla="*/ 2515515 w 2515515"/>
+                <a:gd name="csY8" fmla="*/ 0 h 2708252"/>
+              </a:gdLst>
+              <a:ahLst/>
+              <a:cxnLst>
+                <a:cxn ang="0">
+                  <a:pos x="csX0" y="csY0"/>
+                </a:cxn>
+                <a:cxn ang="0">
+                  <a:pos x="csX1" y="csY1"/>
+                </a:cxn>
+                <a:cxn ang="0">
+                  <a:pos x="csX2" y="csY2"/>
+                </a:cxn>
+                <a:cxn ang="0">
+                  <a:pos x="csX3" y="csY3"/>
+                </a:cxn>
+                <a:cxn ang="0">
+                  <a:pos x="csX4" y="csY4"/>
+                </a:cxn>
+                <a:cxn ang="0">
+                  <a:pos x="csX5" y="csY5"/>
+                </a:cxn>
+                <a:cxn ang="0">
+                  <a:pos x="csX6" y="csY6"/>
+                </a:cxn>
+                <a:cxn ang="0">
+                  <a:pos x="csX7" y="csY7"/>
+                </a:cxn>
+                <a:cxn ang="0">
+                  <a:pos x="csX8" y="csY8"/>
+                </a:cxn>
+              </a:cxnLst>
+              <a:rect l="l" t="t" r="r" b="b"/>
+              <a:pathLst>
+                <a:path w="2515515" h="2708252">
+                  <a:moveTo>
+                    <a:pt x="2515515" y="0"/>
+                  </a:moveTo>
+                  <a:lnTo>
+                    <a:pt x="2515515" y="644670"/>
+                  </a:lnTo>
+                  <a:lnTo>
+                    <a:pt x="2382651" y="652185"/>
+                  </a:lnTo>
+                  <a:cubicBezTo>
+                    <a:pt x="1468871" y="756133"/>
+                    <a:pt x="742415" y="1569863"/>
+                    <a:pt x="649615" y="2593422"/>
+                  </a:cubicBezTo>
+                  <a:lnTo>
+                    <a:pt x="644439" y="2708252"/>
+                  </a:lnTo>
+                  <a:lnTo>
+                    <a:pt x="0" y="2708252"/>
+                  </a:lnTo>
+                  <a:lnTo>
+                    <a:pt x="8371" y="2527519"/>
+                  </a:lnTo>
+                  <a:cubicBezTo>
+                    <a:pt x="131979" y="1200599"/>
+                    <a:pt x="1099606" y="145698"/>
+                    <a:pt x="2316747" y="10942"/>
+                  </a:cubicBezTo>
+                  <a:lnTo>
+                    <a:pt x="2515515" y="0"/>
+                  </a:lnTo>
+                  <a:close/>
+                </a:path>
+              </a:pathLst>
+            </a:custGeom>
+          </p:spPr>
+          <p:style>
+            <a:lnRef idx="2">
+              <a:schemeClr val="accent1">
+                <a:shade val="15000"/>
+              </a:schemeClr>
+            </a:lnRef>
+            <a:fillRef idx="1">
+              <a:schemeClr val="accent1"/>
+            </a:fillRef>
+            <a:effectRef idx="0">
+              <a:schemeClr val="accent1"/>
+            </a:effectRef>
+            <a:fontRef idx="minor">
+              <a:schemeClr val="lt1"/>
+            </a:fontRef>
+          </p:style>
+          <p:txBody>
+            <a:bodyPr wrap="square" rtlCol="0" anchor="ctr">
+              <a:noAutofit/>
+            </a:bodyPr>
+            <a:lstStyle/>
+            <a:p>
+              <a:pPr algn="ctr"/>
+              <a:endParaRPr lang="es-MX" noProof="0" dirty="0"/>
+            </a:p>
+          </p:txBody>
+        </p:sp>
+        <p:sp>
+          <p:nvSpPr>
+            <p:cNvPr id="8" name="Forma libre: forma 7">
+              <a:extLst>
+                <a:ext uri="{FF2B5EF4-FFF2-40B4-BE49-F238E27FC236}">
+                  <a16:creationId xmlns:a16="http://schemas.microsoft.com/office/drawing/2014/main" id="{662802C4-9A78-B9CB-DA37-C79DD5CDEF59}"/>
+                </a:ext>
+              </a:extLst>
+            </p:cNvPr>
+            <p:cNvSpPr/>
+            <p:nvPr/>
+          </p:nvSpPr>
+          <p:spPr>
+            <a:xfrm rot="16200000">
+              <a:off x="6213232" y="3306142"/>
+              <a:ext cx="2515515" cy="2708254"/>
+            </a:xfrm>
+            <a:custGeom>
+              <a:avLst/>
+              <a:gdLst>
+                <a:gd name="csX0" fmla="*/ 2515515 w 2515515"/>
+                <a:gd name="csY0" fmla="*/ 2063582 h 2708254"/>
+                <a:gd name="csX1" fmla="*/ 2515515 w 2515515"/>
+                <a:gd name="csY1" fmla="*/ 2708254 h 2708254"/>
+                <a:gd name="csX2" fmla="*/ 2316747 w 2515515"/>
+                <a:gd name="csY2" fmla="*/ 2697312 h 2708254"/>
+                <a:gd name="csX3" fmla="*/ 8371 w 2515515"/>
+                <a:gd name="csY3" fmla="*/ 180735 h 2708254"/>
+                <a:gd name="csX4" fmla="*/ 0 w 2515515"/>
+                <a:gd name="csY4" fmla="*/ 0 h 2708254"/>
+                <a:gd name="csX5" fmla="*/ 644439 w 2515515"/>
+                <a:gd name="csY5" fmla="*/ 0 h 2708254"/>
+                <a:gd name="csX6" fmla="*/ 649615 w 2515515"/>
+                <a:gd name="csY6" fmla="*/ 114830 h 2708254"/>
+                <a:gd name="csX7" fmla="*/ 2382651 w 2515515"/>
+                <a:gd name="csY7" fmla="*/ 2056067 h 2708254"/>
+                <a:gd name="csX8" fmla="*/ 2515515 w 2515515"/>
+                <a:gd name="csY8" fmla="*/ 2063582 h 2708254"/>
+              </a:gdLst>
+              <a:ahLst/>
+              <a:cxnLst>
+                <a:cxn ang="0">
+                  <a:pos x="csX0" y="csY0"/>
+                </a:cxn>
+                <a:cxn ang="0">
+                  <a:pos x="csX1" y="csY1"/>
+                </a:cxn>
+                <a:cxn ang="0">
+                  <a:pos x="csX2" y="csY2"/>
+                </a:cxn>
+                <a:cxn ang="0">
+                  <a:pos x="csX3" y="csY3"/>
+                </a:cxn>
+                <a:cxn ang="0">
+                  <a:pos x="csX4" y="csY4"/>
+                </a:cxn>
+                <a:cxn ang="0">
+                  <a:pos x="csX5" y="csY5"/>
+                </a:cxn>
+                <a:cxn ang="0">
+                  <a:pos x="csX6" y="csY6"/>
+                </a:cxn>
+                <a:cxn ang="0">
+                  <a:pos x="csX7" y="csY7"/>
+                </a:cxn>
+                <a:cxn ang="0">
+                  <a:pos x="csX8" y="csY8"/>
+                </a:cxn>
+              </a:cxnLst>
+              <a:rect l="l" t="t" r="r" b="b"/>
+              <a:pathLst>
+                <a:path w="2515515" h="2708254">
+                  <a:moveTo>
+                    <a:pt x="2515515" y="2063582"/>
+                  </a:moveTo>
+                  <a:lnTo>
+                    <a:pt x="2515515" y="2708254"/>
+                  </a:lnTo>
+                  <a:lnTo>
+                    <a:pt x="2316747" y="2697312"/>
+                  </a:lnTo>
+                  <a:cubicBezTo>
+                    <a:pt x="1099605" y="2562556"/>
+                    <a:pt x="131978" y="1507655"/>
+                    <a:pt x="8371" y="180735"/>
+                  </a:cubicBezTo>
+                  <a:lnTo>
+                    <a:pt x="0" y="0"/>
+                  </a:lnTo>
+                  <a:lnTo>
+                    <a:pt x="644439" y="0"/>
+                  </a:lnTo>
+                  <a:lnTo>
+                    <a:pt x="649615" y="114830"/>
+                  </a:lnTo>
+                  <a:cubicBezTo>
+                    <a:pt x="742415" y="1138389"/>
+                    <a:pt x="1468870" y="1952119"/>
+                    <a:pt x="2382651" y="2056067"/>
+                  </a:cubicBezTo>
+                  <a:lnTo>
+                    <a:pt x="2515515" y="2063582"/>
+                  </a:lnTo>
+                  <a:close/>
+                </a:path>
+              </a:pathLst>
+            </a:custGeom>
+          </p:spPr>
+          <p:style>
+            <a:lnRef idx="2">
+              <a:schemeClr val="accent1">
+                <a:shade val="15000"/>
+              </a:schemeClr>
+            </a:lnRef>
+            <a:fillRef idx="1">
+              <a:schemeClr val="accent1"/>
+            </a:fillRef>
+            <a:effectRef idx="0">
+              <a:schemeClr val="accent1"/>
+            </a:effectRef>
+            <a:fontRef idx="minor">
+              <a:schemeClr val="lt1"/>
+            </a:fontRef>
+          </p:style>
+          <p:txBody>
+            <a:bodyPr wrap="square" rtlCol="0" anchor="ctr">
+              <a:noAutofit/>
+            </a:bodyPr>
+            <a:lstStyle/>
+            <a:p>
+              <a:pPr algn="ctr"/>
+              <a:endParaRPr lang="es-MX" noProof="0" dirty="0"/>
+            </a:p>
+          </p:txBody>
+        </p:sp>
+      </p:grpSp>
+    </p:spTree>
+    <p:extLst>
+      <p:ext uri="{BB962C8B-B14F-4D97-AF65-F5344CB8AC3E}">
+        <p14:creationId xmlns:p14="http://schemas.microsoft.com/office/powerpoint/2010/main" val="3621507805"/>
+      </p:ext>
+    </p:extLst>
+  </p:cSld>
+  <p:clrMapOvr>
+    <a:masterClrMapping/>
+  </p:clrMapOvr>
+  <mc:AlternateContent xmlns:mc="http://schemas.openxmlformats.org/markup-compatibility/2006">
+    <mc:Choice xmlns:p159="http://schemas.microsoft.com/office/powerpoint/2015/09/main" Requires="p159">
+      <p:transition xmlns:p14="http://schemas.microsoft.com/office/powerpoint/2010/main" spd="slow" p14:dur="2000">
+        <p159:morph option="byObject"/>
+      </p:transition>
+    </mc:Choice>
+    <mc:Fallback>
+      <p:transition spd="slow">
+        <p:fade/>
+      </p:transition>
+    </mc:Fallback>
+  </mc:AlternateContent>
 </p:sld>
 </file>
 
@@ -3765,4 +8161,319 @@
     </a:ext>
   </a:extLst>
 </a:theme>
+</file>
+
+<file path=ppt/theme/theme2.xml><?xml version="1.0" encoding="utf-8"?>
+<a:theme xmlns:a="http://schemas.openxmlformats.org/drawingml/2006/main" name="Tema de Office">
+  <a:themeElements>
+    <a:clrScheme name="Office">
+      <a:dk1>
+        <a:sysClr val="windowText" lastClr="000000"/>
+      </a:dk1>
+      <a:lt1>
+        <a:sysClr val="window" lastClr="FFFFFF"/>
+      </a:lt1>
+      <a:dk2>
+        <a:srgbClr val="0E2841"/>
+      </a:dk2>
+      <a:lt2>
+        <a:srgbClr val="E8E8E8"/>
+      </a:lt2>
+      <a:accent1>
+        <a:srgbClr val="156082"/>
+      </a:accent1>
+      <a:accent2>
+        <a:srgbClr val="E97132"/>
+      </a:accent2>
+      <a:accent3>
+        <a:srgbClr val="196B24"/>
+      </a:accent3>
+      <a:accent4>
+        <a:srgbClr val="0F9ED5"/>
+      </a:accent4>
+      <a:accent5>
+        <a:srgbClr val="A02B93"/>
+      </a:accent5>
+      <a:accent6>
+        <a:srgbClr val="4EA72E"/>
+      </a:accent6>
+      <a:hlink>
+        <a:srgbClr val="467886"/>
+      </a:hlink>
+      <a:folHlink>
+        <a:srgbClr val="96607D"/>
+      </a:folHlink>
+    </a:clrScheme>
+    <a:fontScheme name="Office">
+      <a:majorFont>
+        <a:latin typeface="Aptos Display" panose="02110004020202020204"/>
+        <a:ea typeface=""/>
+        <a:cs typeface=""/>
+        <a:font script="Jpan" typeface="游ゴシック Light"/>
+        <a:font script="Hang" typeface="맑은 고딕"/>
+        <a:font script="Hans" typeface="等线 Light"/>
+        <a:font script="Hant" typeface="新細明體"/>
+        <a:font script="Arab" typeface="Times New Roman"/>
+        <a:font script="Hebr" typeface="Times New Roman"/>
+        <a:font script="Thai" typeface="Angsana New"/>
+        <a:font script="Ethi" typeface="Nyala"/>
+        <a:font script="Beng" typeface="Vrinda"/>
+        <a:font script="Gujr" typeface="Shruti"/>
+        <a:font script="Khmr" typeface="MoolBoran"/>
+        <a:font script="Knda" typeface="Tunga"/>
+        <a:font script="Guru" typeface="Raavi"/>
+        <a:font script="Cans" typeface="Euphemia"/>
+        <a:font script="Cher" typeface="Plantagenet Cherokee"/>
+        <a:font script="Yiii" typeface="Microsoft Yi Baiti"/>
+        <a:font script="Tibt" typeface="Microsoft Himalaya"/>
+        <a:font script="Thaa" typeface="MV Boli"/>
+        <a:font script="Deva" typeface="Mangal"/>
+        <a:font script="Telu" typeface="Gautami"/>
+        <a:font script="Taml" typeface="Latha"/>
+        <a:font script="Syrc" typeface="Estrangelo Edessa"/>
+        <a:font script="Orya" typeface="Kalinga"/>
+        <a:font script="Mlym" typeface="Kartika"/>
+        <a:font script="Laoo" typeface="DokChampa"/>
+        <a:font script="Sinh" typeface="Iskoola Pota"/>
+        <a:font script="Mong" typeface="Mongolian Baiti"/>
+        <a:font script="Viet" typeface="Times New Roman"/>
+        <a:font script="Uigh" typeface="Microsoft Uighur"/>
+        <a:font script="Geor" typeface="Sylfaen"/>
+        <a:font script="Armn" typeface="Arial"/>
+        <a:font script="Bugi" typeface="Leelawadee UI"/>
+        <a:font script="Bopo" typeface="Microsoft JhengHei"/>
+        <a:font script="Java" typeface="Javanese Text"/>
+        <a:font script="Lisu" typeface="Segoe UI"/>
+        <a:font script="Mymr" typeface="Myanmar Text"/>
+        <a:font script="Nkoo" typeface="Ebrima"/>
+        <a:font script="Olck" typeface="Nirmala UI"/>
+        <a:font script="Osma" typeface="Ebrima"/>
+        <a:font script="Phag" typeface="Phagspa"/>
+        <a:font script="Syrn" typeface="Estrangelo Edessa"/>
+        <a:font script="Syrj" typeface="Estrangelo Edessa"/>
+        <a:font script="Syre" typeface="Estrangelo Edessa"/>
+        <a:font script="Sora" typeface="Nirmala UI"/>
+        <a:font script="Tale" typeface="Microsoft Tai Le"/>
+        <a:font script="Talu" typeface="Microsoft New Tai Lue"/>
+        <a:font script="Tfng" typeface="Ebrima"/>
+      </a:majorFont>
+      <a:minorFont>
+        <a:latin typeface="Aptos" panose="02110004020202020204"/>
+        <a:ea typeface=""/>
+        <a:cs typeface=""/>
+        <a:font script="Jpan" typeface="游ゴシック"/>
+        <a:font script="Hang" typeface="맑은 고딕"/>
+        <a:font script="Hans" typeface="等线"/>
+        <a:font script="Hant" typeface="新細明體"/>
+        <a:font script="Arab" typeface="Arial"/>
+        <a:font script="Hebr" typeface="Arial"/>
+        <a:font script="Thai" typeface="Cordia New"/>
+        <a:font script="Ethi" typeface="Nyala"/>
+        <a:font script="Beng" typeface="Vrinda"/>
+        <a:font script="Gujr" typeface="Shruti"/>
+        <a:font script="Khmr" typeface="DaunPenh"/>
+        <a:font script="Knda" typeface="Tunga"/>
+        <a:font script="Guru" typeface="Raavi"/>
+        <a:font script="Cans" typeface="Euphemia"/>
+        <a:font script="Cher" typeface="Plantagenet Cherokee"/>
+        <a:font script="Yiii" typeface="Microsoft Yi Baiti"/>
+        <a:font script="Tibt" typeface="Microsoft Himalaya"/>
+        <a:font script="Thaa" typeface="MV Boli"/>
+        <a:font script="Deva" typeface="Mangal"/>
+        <a:font script="Telu" typeface="Gautami"/>
+        <a:font script="Taml" typeface="Latha"/>
+        <a:font script="Syrc" typeface="Estrangelo Edessa"/>
+        <a:font script="Orya" typeface="Kalinga"/>
+        <a:font script="Mlym" typeface="Kartika"/>
+        <a:font script="Laoo" typeface="DokChampa"/>
+        <a:font script="Sinh" typeface="Iskoola Pota"/>
+        <a:font script="Mong" typeface="Mongolian Baiti"/>
+        <a:font script="Viet" typeface="Arial"/>
+        <a:font script="Uigh" typeface="Microsoft Uighur"/>
+        <a:font script="Geor" typeface="Sylfaen"/>
+        <a:font script="Armn" typeface="Arial"/>
+        <a:font script="Bugi" typeface="Leelawadee UI"/>
+        <a:font script="Bopo" typeface="Microsoft JhengHei"/>
+        <a:font script="Java" typeface="Javanese Text"/>
+        <a:font script="Lisu" typeface="Segoe UI"/>
+        <a:font script="Mymr" typeface="Myanmar Text"/>
+        <a:font script="Nkoo" typeface="Ebrima"/>
+        <a:font script="Olck" typeface="Nirmala UI"/>
+        <a:font script="Osma" typeface="Ebrima"/>
+        <a:font script="Phag" typeface="Phagspa"/>
+        <a:font script="Syrn" typeface="Estrangelo Edessa"/>
+        <a:font script="Syrj" typeface="Estrangelo Edessa"/>
+        <a:font script="Syre" typeface="Estrangelo Edessa"/>
+        <a:font script="Sora" typeface="Nirmala UI"/>
+        <a:font script="Tale" typeface="Microsoft Tai Le"/>
+        <a:font script="Talu" typeface="Microsoft New Tai Lue"/>
+        <a:font script="Tfng" typeface="Ebrima"/>
+      </a:minorFont>
+    </a:fontScheme>
+    <a:fmtScheme name="Office">
+      <a:fillStyleLst>
+        <a:solidFill>
+          <a:schemeClr val="phClr"/>
+        </a:solidFill>
+        <a:gradFill rotWithShape="1">
+          <a:gsLst>
+            <a:gs pos="0">
+              <a:schemeClr val="phClr">
+                <a:lumMod val="110000"/>
+                <a:satMod val="105000"/>
+                <a:tint val="67000"/>
+              </a:schemeClr>
+            </a:gs>
+            <a:gs pos="50000">
+              <a:schemeClr val="phClr">
+                <a:lumMod val="105000"/>
+                <a:satMod val="103000"/>
+                <a:tint val="73000"/>
+              </a:schemeClr>
+            </a:gs>
+            <a:gs pos="100000">
+              <a:schemeClr val="phClr">
+                <a:lumMod val="105000"/>
+                <a:satMod val="109000"/>
+                <a:tint val="81000"/>
+              </a:schemeClr>
+            </a:gs>
+          </a:gsLst>
+          <a:lin ang="5400000" scaled="0"/>
+        </a:gradFill>
+        <a:gradFill rotWithShape="1">
+          <a:gsLst>
+            <a:gs pos="0">
+              <a:schemeClr val="phClr">
+                <a:satMod val="103000"/>
+                <a:lumMod val="102000"/>
+                <a:tint val="94000"/>
+              </a:schemeClr>
+            </a:gs>
+            <a:gs pos="50000">
+              <a:schemeClr val="phClr">
+                <a:satMod val="110000"/>
+                <a:lumMod val="100000"/>
+                <a:shade val="100000"/>
+              </a:schemeClr>
+            </a:gs>
+            <a:gs pos="100000">
+              <a:schemeClr val="phClr">
+                <a:lumMod val="99000"/>
+                <a:satMod val="120000"/>
+                <a:shade val="78000"/>
+              </a:schemeClr>
+            </a:gs>
+          </a:gsLst>
+          <a:lin ang="5400000" scaled="0"/>
+        </a:gradFill>
+      </a:fillStyleLst>
+      <a:lnStyleLst>
+        <a:ln w="12700" cap="flat" cmpd="sng" algn="ctr">
+          <a:solidFill>
+            <a:schemeClr val="phClr"/>
+          </a:solidFill>
+          <a:prstDash val="solid"/>
+          <a:miter lim="800000"/>
+        </a:ln>
+        <a:ln w="19050" cap="flat" cmpd="sng" algn="ctr">
+          <a:solidFill>
+            <a:schemeClr val="phClr"/>
+          </a:solidFill>
+          <a:prstDash val="solid"/>
+          <a:miter lim="800000"/>
+        </a:ln>
+        <a:ln w="25400" cap="flat" cmpd="sng" algn="ctr">
+          <a:solidFill>
+            <a:schemeClr val="phClr"/>
+          </a:solidFill>
+          <a:prstDash val="solid"/>
+          <a:miter lim="800000"/>
+        </a:ln>
+      </a:lnStyleLst>
+      <a:effectStyleLst>
+        <a:effectStyle>
+          <a:effectLst/>
+        </a:effectStyle>
+        <a:effectStyle>
+          <a:effectLst/>
+        </a:effectStyle>
+        <a:effectStyle>
+          <a:effectLst>
+            <a:outerShdw blurRad="57150" dist="19050" dir="5400000" algn="ctr" rotWithShape="0">
+              <a:srgbClr val="000000">
+                <a:alpha val="63000"/>
+              </a:srgbClr>
+            </a:outerShdw>
+          </a:effectLst>
+        </a:effectStyle>
+      </a:effectStyleLst>
+      <a:bgFillStyleLst>
+        <a:solidFill>
+          <a:schemeClr val="phClr"/>
+        </a:solidFill>
+        <a:solidFill>
+          <a:schemeClr val="phClr">
+            <a:tint val="95000"/>
+            <a:satMod val="170000"/>
+          </a:schemeClr>
+        </a:solidFill>
+        <a:gradFill rotWithShape="1">
+          <a:gsLst>
+            <a:gs pos="0">
+              <a:schemeClr val="phClr">
+                <a:tint val="93000"/>
+                <a:satMod val="150000"/>
+                <a:shade val="98000"/>
+                <a:lumMod val="102000"/>
+              </a:schemeClr>
+            </a:gs>
+            <a:gs pos="50000">
+              <a:schemeClr val="phClr">
+                <a:tint val="98000"/>
+                <a:satMod val="130000"/>
+                <a:shade val="90000"/>
+                <a:lumMod val="103000"/>
+              </a:schemeClr>
+            </a:gs>
+            <a:gs pos="100000">
+              <a:schemeClr val="phClr">
+                <a:shade val="63000"/>
+                <a:satMod val="120000"/>
+              </a:schemeClr>
+            </a:gs>
+          </a:gsLst>
+          <a:lin ang="5400000" scaled="0"/>
+        </a:gradFill>
+      </a:bgFillStyleLst>
+    </a:fmtScheme>
+  </a:themeElements>
+  <a:objectDefaults>
+    <a:lnDef>
+      <a:spPr/>
+      <a:bodyPr/>
+      <a:lstStyle/>
+      <a:style>
+        <a:lnRef idx="2">
+          <a:schemeClr val="accent1"/>
+        </a:lnRef>
+        <a:fillRef idx="0">
+          <a:schemeClr val="accent1"/>
+        </a:fillRef>
+        <a:effectRef idx="1">
+          <a:schemeClr val="accent1"/>
+        </a:effectRef>
+        <a:fontRef idx="minor">
+          <a:schemeClr val="tx1"/>
+        </a:fontRef>
+      </a:style>
+    </a:lnDef>
+  </a:objectDefaults>
+  <a:extraClrSchemeLst/>
+  <a:extLst>
+    <a:ext uri="{05A4C25C-085E-4340-85A3-A5531E510DB2}">
+      <thm15:themeFamily xmlns:thm15="http://schemas.microsoft.com/office/thememl/2012/main" name="Office Theme" id="{2E142A2C-CD16-42D6-873A-C26D2A0506FA}" vid="{1BDDFF52-6CD6-40A5-AB3C-68EB2F1E4D0A}"/>
+    </a:ext>
+  </a:extLst>
+</a:theme>
 </file>
--- a/Expo WEB.pptx
+++ b/Expo WEB.pptx
@@ -124,12 +124,68 @@
 <p1510:revInfo xmlns:a="http://schemas.openxmlformats.org/drawingml/2006/main" xmlns:r="http://schemas.openxmlformats.org/officeDocument/2006/relationships" xmlns:p1510="http://schemas.microsoft.com/office/powerpoint/2015/10/main">
   <p1510:revLst>
     <p1510:client id="{056970AA-C0AA-46A1-9312-A78E5A543916}" v="8" dt="2026-04-23T20:51:18.239"/>
+    <p1510:client id="{3640434E-146F-4853-A418-14059EEE91A1}" v="2" dt="2026-04-23T21:02:34.788"/>
   </p1510:revLst>
 </p1510:revInfo>
 </file>
 
 <file path=ppt/changesInfos/changesInfo1.xml><?xml version="1.0" encoding="utf-8"?>
 <pc:chgInfo xmlns:a="http://schemas.openxmlformats.org/drawingml/2006/main" xmlns:r="http://schemas.openxmlformats.org/officeDocument/2006/relationships" xmlns:ac="http://schemas.microsoft.com/office/drawing/2013/main/command" xmlns:pc="http://schemas.microsoft.com/office/powerpoint/2013/main/command">
+  <pc:docChgLst>
+    <pc:chgData name="Abisaid Angúlo Munguia" userId="f74a1a4c0fefbad1" providerId="LiveId" clId="{BC6DEA1E-6C68-421E-9263-6C2705D40A4E}"/>
+    <pc:docChg chg="undo custSel modSld">
+      <pc:chgData name="Abisaid Angúlo Munguia" userId="f74a1a4c0fefbad1" providerId="LiveId" clId="{BC6DEA1E-6C68-421E-9263-6C2705D40A4E}" dt="2026-04-23T21:02:44.928" v="8" actId="20577"/>
+      <pc:docMkLst>
+        <pc:docMk/>
+      </pc:docMkLst>
+      <pc:sldChg chg="modSp mod">
+        <pc:chgData name="Abisaid Angúlo Munguia" userId="f74a1a4c0fefbad1" providerId="LiveId" clId="{BC6DEA1E-6C68-421E-9263-6C2705D40A4E}" dt="2026-04-23T21:02:44.928" v="8" actId="20577"/>
+        <pc:sldMkLst>
+          <pc:docMk/>
+          <pc:sldMk cId="37386645" sldId="256"/>
+        </pc:sldMkLst>
+        <pc:spChg chg="mod">
+          <ac:chgData name="Abisaid Angúlo Munguia" userId="f74a1a4c0fefbad1" providerId="LiveId" clId="{BC6DEA1E-6C68-421E-9263-6C2705D40A4E}" dt="2026-04-23T21:02:44.928" v="8" actId="20577"/>
+          <ac:spMkLst>
+            <pc:docMk/>
+            <pc:sldMk cId="37386645" sldId="256"/>
+            <ac:spMk id="7" creationId="{1ACA331D-EA41-E05A-FE0E-B823ABA1F386}"/>
+          </ac:spMkLst>
+        </pc:spChg>
+        <pc:picChg chg="mod">
+          <ac:chgData name="Abisaid Angúlo Munguia" userId="f74a1a4c0fefbad1" providerId="LiveId" clId="{BC6DEA1E-6C68-421E-9263-6C2705D40A4E}" dt="2026-04-23T21:02:34.787" v="6" actId="14826"/>
+          <ac:picMkLst>
+            <pc:docMk/>
+            <pc:sldMk cId="37386645" sldId="256"/>
+            <ac:picMk id="5" creationId="{D45CEF27-422B-64F5-DF6F-400AAE732A45}"/>
+          </ac:picMkLst>
+        </pc:picChg>
+      </pc:sldChg>
+      <pc:sldChg chg="addSp delSp modSp mod">
+        <pc:chgData name="Abisaid Angúlo Munguia" userId="f74a1a4c0fefbad1" providerId="LiveId" clId="{BC6DEA1E-6C68-421E-9263-6C2705D40A4E}" dt="2026-04-23T21:02:24.812" v="5" actId="14826"/>
+        <pc:sldMkLst>
+          <pc:docMk/>
+          <pc:sldMk cId="2935144419" sldId="260"/>
+        </pc:sldMkLst>
+        <pc:picChg chg="add del mod">
+          <ac:chgData name="Abisaid Angúlo Munguia" userId="f74a1a4c0fefbad1" providerId="LiveId" clId="{BC6DEA1E-6C68-421E-9263-6C2705D40A4E}" dt="2026-04-23T21:02:10.597" v="4" actId="478"/>
+          <ac:picMkLst>
+            <pc:docMk/>
+            <pc:sldMk cId="2935144419" sldId="260"/>
+            <ac:picMk id="3" creationId="{79C798F7-35F8-2373-CAA7-C7FBC89C9B6B}"/>
+          </ac:picMkLst>
+        </pc:picChg>
+        <pc:picChg chg="add del mod">
+          <ac:chgData name="Abisaid Angúlo Munguia" userId="f74a1a4c0fefbad1" providerId="LiveId" clId="{BC6DEA1E-6C68-421E-9263-6C2705D40A4E}" dt="2026-04-23T21:02:24.812" v="5" actId="14826"/>
+          <ac:picMkLst>
+            <pc:docMk/>
+            <pc:sldMk cId="2935144419" sldId="260"/>
+            <ac:picMk id="4" creationId="{E8ADAF69-31B7-105E-09CB-8CADD4F27A9E}"/>
+          </ac:picMkLst>
+        </pc:picChg>
+      </pc:sldChg>
+    </pc:docChg>
+  </pc:docChgLst>
   <pc:docChgLst>
     <pc:chgData name="EDGAR GAEL REYES QUEVEDO" userId="04ed7362-a71f-4db0-bacd-f9d8a9a1242d" providerId="ADAL" clId="{D38D3931-CCEA-4AEF-96D6-0218BD802E44}"/>
     <pc:docChg chg="custSel addSld modSld sldOrd">
@@ -4865,10 +4921,15 @@
           <p:nvPr/>
         </p:nvPicPr>
         <p:blipFill>
-          <a:blip r:embed="rId2"/>
-          <a:stretch>
-            <a:fillRect/>
-          </a:stretch>
+          <a:blip r:embed="rId2">
+            <a:extLst>
+              <a:ext uri="{28A0092B-C50C-407E-A947-70E740481C1C}">
+                <a14:useLocalDpi xmlns:a14="http://schemas.microsoft.com/office/drawing/2010/main" val="0"/>
+              </a:ext>
+            </a:extLst>
+          </a:blip>
+          <a:srcRect l="3231" r="3231"/>
+          <a:stretch/>
         </p:blipFill>
         <p:spPr>
           <a:xfrm>
@@ -4947,7 +5008,7 @@
                   <a:schemeClr val="bg1"/>
                 </a:solidFill>
               </a:rPr>
-              <a:t>Cuenta con opciones para recuperar contraseña o entrar sin cuenta</a:t>
+              <a:t>Cuenta con opciones para recuperar contraseña </a:t>
             </a:r>
           </a:p>
           <a:p>
@@ -5734,10 +5795,15 @@
           <p:nvPr/>
         </p:nvPicPr>
         <p:blipFill>
-          <a:blip r:embed="rId2"/>
-          <a:stretch>
-            <a:fillRect/>
-          </a:stretch>
+          <a:blip r:embed="rId2">
+            <a:extLst>
+              <a:ext uri="{28A0092B-C50C-407E-A947-70E740481C1C}">
+                <a14:useLocalDpi xmlns:a14="http://schemas.microsoft.com/office/drawing/2010/main" val="0"/>
+              </a:ext>
+            </a:extLst>
+          </a:blip>
+          <a:srcRect l="3231" r="3231"/>
+          <a:stretch/>
         </p:blipFill>
         <p:spPr>
           <a:xfrm>
@@ -7833,13 +7899,13 @@
   <p:clrMapOvr>
     <a:masterClrMapping/>
   </p:clrMapOvr>
-  <mc:AlternateContent xmlns:mc="http://schemas.openxmlformats.org/markup-compatibility/2006">
-    <mc:Choice xmlns:p159="http://schemas.microsoft.com/office/powerpoint/2015/09/main" Requires="p159">
+  <mc:AlternateContent xmlns:mc="http://schemas.openxmlformats.org/markup-compatibility/2006" xmlns:p159="http://schemas.microsoft.com/office/powerpoint/2015/09/main">
+    <mc:Choice Requires="p159">
       <p:transition xmlns:p14="http://schemas.microsoft.com/office/powerpoint/2010/main" spd="slow" p14:dur="2000">
         <p159:morph option="byObject"/>
       </p:transition>
     </mc:Choice>
-    <mc:Fallback>
+    <mc:Fallback xmlns="">
       <p:transition spd="slow">
         <p:fade/>
       </p:transition>

--- a/Expo WEB.pptx
+++ b/Expo WEB.pptx
@@ -5,15 +5,17 @@
     <p:sldMasterId id="2147483648" r:id="rId1"/>
   </p:sldMasterIdLst>
   <p:notesMasterIdLst>
-    <p:notesMasterId r:id="rId8"/>
+    <p:notesMasterId r:id="rId10"/>
   </p:notesMasterIdLst>
   <p:sldIdLst>
     <p:sldId id="257" r:id="rId2"/>
     <p:sldId id="256" r:id="rId3"/>
     <p:sldId id="260" r:id="rId4"/>
-    <p:sldId id="259" r:id="rId5"/>
-    <p:sldId id="258" r:id="rId6"/>
-    <p:sldId id="261" r:id="rId7"/>
+    <p:sldId id="263" r:id="rId5"/>
+    <p:sldId id="264" r:id="rId6"/>
+    <p:sldId id="259" r:id="rId7"/>
+    <p:sldId id="258" r:id="rId8"/>
+    <p:sldId id="261" r:id="rId9"/>
   </p:sldIdLst>
   <p:sldSz cx="12192000" cy="6858000"/>
   <p:notesSz cx="6858000" cy="9144000"/>
@@ -498,7 +500,7 @@
           <a:p>
             <a:fld id="{EBCFCD7E-F3EC-41C1-B937-A5A2090DE6FC}" type="datetimeFigureOut">
               <a:rPr lang="es-MX" smtClean="0"/>
-              <a:t>23/04/2026</a:t>
+              <a:t>24/04/2026</a:t>
             </a:fld>
             <a:endParaRPr lang="es-MX"/>
           </a:p>
@@ -770,6 +772,121 @@
   <p:cSld>
     <p:spTree>
       <p:nvGrpSpPr>
+        <p:cNvPr id="1" name="">
+          <a:extLst>
+            <a:ext uri="{FF2B5EF4-FFF2-40B4-BE49-F238E27FC236}">
+              <a16:creationId xmlns:a16="http://schemas.microsoft.com/office/drawing/2014/main" id="{8B3AECBA-C157-94DF-156E-5BECDD9927DA}"/>
+            </a:ext>
+          </a:extLst>
+        </p:cNvPr>
+        <p:cNvGrpSpPr/>
+        <p:nvPr/>
+      </p:nvGrpSpPr>
+      <p:grpSpPr>
+        <a:xfrm>
+          <a:off x="0" y="0"/>
+          <a:ext cx="0" cy="0"/>
+          <a:chOff x="0" y="0"/>
+          <a:chExt cx="0" cy="0"/>
+        </a:xfrm>
+      </p:grpSpPr>
+      <p:sp>
+        <p:nvSpPr>
+          <p:cNvPr id="2" name="Marcador de imagen de diapositiva 1">
+            <a:extLst>
+              <a:ext uri="{FF2B5EF4-FFF2-40B4-BE49-F238E27FC236}">
+                <a16:creationId xmlns:a16="http://schemas.microsoft.com/office/drawing/2014/main" id="{D06E769D-A0BF-8D35-3D20-4FE032FFFF47}"/>
+              </a:ext>
+            </a:extLst>
+          </p:cNvPr>
+          <p:cNvSpPr>
+            <a:spLocks noGrp="1" noRot="1" noChangeAspect="1"/>
+          </p:cNvSpPr>
+          <p:nvPr>
+            <p:ph type="sldImg"/>
+          </p:nvPr>
+        </p:nvSpPr>
+        <p:spPr/>
+        <p:txBody>
+          <a:bodyPr/>
+          <a:lstStyle/>
+          <a:p>
+            <a:endParaRPr lang="es-MX"/>
+          </a:p>
+        </p:txBody>
+      </p:sp>
+      <p:sp>
+        <p:nvSpPr>
+          <p:cNvPr id="3" name="Marcador de notas 2">
+            <a:extLst>
+              <a:ext uri="{FF2B5EF4-FFF2-40B4-BE49-F238E27FC236}">
+                <a16:creationId xmlns:a16="http://schemas.microsoft.com/office/drawing/2014/main" id="{39F22EFF-021E-A2AC-0E50-3A17447E4794}"/>
+              </a:ext>
+            </a:extLst>
+          </p:cNvPr>
+          <p:cNvSpPr>
+            <a:spLocks noGrp="1"/>
+          </p:cNvSpPr>
+          <p:nvPr>
+            <p:ph type="body" idx="1"/>
+          </p:nvPr>
+        </p:nvSpPr>
+        <p:spPr/>
+        <p:txBody>
+          <a:bodyPr/>
+          <a:lstStyle/>
+          <a:p>
+            <a:endParaRPr lang="es-MX" dirty="0"/>
+          </a:p>
+        </p:txBody>
+      </p:sp>
+      <p:sp>
+        <p:nvSpPr>
+          <p:cNvPr id="4" name="Marcador de número de diapositiva 3">
+            <a:extLst>
+              <a:ext uri="{FF2B5EF4-FFF2-40B4-BE49-F238E27FC236}">
+                <a16:creationId xmlns:a16="http://schemas.microsoft.com/office/drawing/2014/main" id="{2C8EA717-F778-6B2E-66B9-5812B83B2E16}"/>
+              </a:ext>
+            </a:extLst>
+          </p:cNvPr>
+          <p:cNvSpPr>
+            <a:spLocks noGrp="1"/>
+          </p:cNvSpPr>
+          <p:nvPr>
+            <p:ph type="sldNum" sz="quarter" idx="5"/>
+          </p:nvPr>
+        </p:nvSpPr>
+        <p:spPr/>
+        <p:txBody>
+          <a:bodyPr/>
+          <a:lstStyle/>
+          <a:p>
+            <a:fld id="{68263180-F1E6-497C-8622-EE7C8B38226A}" type="slidenum">
+              <a:rPr lang="es-MX" smtClean="0"/>
+              <a:t>4</a:t>
+            </a:fld>
+            <a:endParaRPr lang="es-MX"/>
+          </a:p>
+        </p:txBody>
+      </p:sp>
+    </p:spTree>
+    <p:extLst>
+      <p:ext uri="{BB962C8B-B14F-4D97-AF65-F5344CB8AC3E}">
+        <p14:creationId xmlns:p14="http://schemas.microsoft.com/office/powerpoint/2010/main" val="758894129"/>
+      </p:ext>
+    </p:extLst>
+  </p:cSld>
+  <p:clrMapOvr>
+    <a:masterClrMapping/>
+  </p:clrMapOvr>
+</p:notes>
+</file>
+
+<file path=ppt/notesSlides/notesSlide2.xml><?xml version="1.0" encoding="utf-8"?>
+<p:notes xmlns:a="http://schemas.openxmlformats.org/drawingml/2006/main" xmlns:r="http://schemas.openxmlformats.org/officeDocument/2006/relationships" xmlns:p="http://schemas.openxmlformats.org/presentationml/2006/main">
+  <p:cSld>
+    <p:spTree>
+      <p:nvGrpSpPr>
         <p:cNvPr id="1" name=""/>
         <p:cNvGrpSpPr/>
         <p:nvPr/>
@@ -837,7 +954,7 @@
           <a:p>
             <a:fld id="{68263180-F1E6-497C-8622-EE7C8B38226A}" type="slidenum">
               <a:rPr lang="es-MX" smtClean="0"/>
-              <a:t>4</a:t>
+              <a:t>6</a:t>
             </a:fld>
             <a:endParaRPr lang="es-MX"/>
           </a:p>
@@ -1003,7 +1120,7 @@
           <a:p>
             <a:fld id="{3A0812E6-FF2F-4EE5-94A3-B41C09DA71CD}" type="datetimeFigureOut">
               <a:rPr lang="es-MX" smtClean="0"/>
-              <a:t>23/04/2026</a:t>
+              <a:t>24/04/2026</a:t>
             </a:fld>
             <a:endParaRPr lang="es-MX"/>
           </a:p>
@@ -1201,7 +1318,7 @@
           <a:p>
             <a:fld id="{3A0812E6-FF2F-4EE5-94A3-B41C09DA71CD}" type="datetimeFigureOut">
               <a:rPr lang="es-MX" smtClean="0"/>
-              <a:t>23/04/2026</a:t>
+              <a:t>24/04/2026</a:t>
             </a:fld>
             <a:endParaRPr lang="es-MX"/>
           </a:p>
@@ -1409,7 +1526,7 @@
           <a:p>
             <a:fld id="{3A0812E6-FF2F-4EE5-94A3-B41C09DA71CD}" type="datetimeFigureOut">
               <a:rPr lang="es-MX" smtClean="0"/>
-              <a:t>23/04/2026</a:t>
+              <a:t>24/04/2026</a:t>
             </a:fld>
             <a:endParaRPr lang="es-MX"/>
           </a:p>
@@ -1607,7 +1724,7 @@
           <a:p>
             <a:fld id="{3A0812E6-FF2F-4EE5-94A3-B41C09DA71CD}" type="datetimeFigureOut">
               <a:rPr lang="es-MX" smtClean="0"/>
-              <a:t>23/04/2026</a:t>
+              <a:t>24/04/2026</a:t>
             </a:fld>
             <a:endParaRPr lang="es-MX"/>
           </a:p>
@@ -1882,7 +1999,7 @@
           <a:p>
             <a:fld id="{3A0812E6-FF2F-4EE5-94A3-B41C09DA71CD}" type="datetimeFigureOut">
               <a:rPr lang="es-MX" smtClean="0"/>
-              <a:t>23/04/2026</a:t>
+              <a:t>24/04/2026</a:t>
             </a:fld>
             <a:endParaRPr lang="es-MX"/>
           </a:p>
@@ -2147,7 +2264,7 @@
           <a:p>
             <a:fld id="{3A0812E6-FF2F-4EE5-94A3-B41C09DA71CD}" type="datetimeFigureOut">
               <a:rPr lang="es-MX" smtClean="0"/>
-              <a:t>23/04/2026</a:t>
+              <a:t>24/04/2026</a:t>
             </a:fld>
             <a:endParaRPr lang="es-MX"/>
           </a:p>
@@ -2559,7 +2676,7 @@
           <a:p>
             <a:fld id="{3A0812E6-FF2F-4EE5-94A3-B41C09DA71CD}" type="datetimeFigureOut">
               <a:rPr lang="es-MX" smtClean="0"/>
-              <a:t>23/04/2026</a:t>
+              <a:t>24/04/2026</a:t>
             </a:fld>
             <a:endParaRPr lang="es-MX"/>
           </a:p>
@@ -2700,7 +2817,7 @@
           <a:p>
             <a:fld id="{3A0812E6-FF2F-4EE5-94A3-B41C09DA71CD}" type="datetimeFigureOut">
               <a:rPr lang="es-MX" smtClean="0"/>
-              <a:t>23/04/2026</a:t>
+              <a:t>24/04/2026</a:t>
             </a:fld>
             <a:endParaRPr lang="es-MX"/>
           </a:p>
@@ -2813,7 +2930,7 @@
           <a:p>
             <a:fld id="{3A0812E6-FF2F-4EE5-94A3-B41C09DA71CD}" type="datetimeFigureOut">
               <a:rPr lang="es-MX" smtClean="0"/>
-              <a:t>23/04/2026</a:t>
+              <a:t>24/04/2026</a:t>
             </a:fld>
             <a:endParaRPr lang="es-MX"/>
           </a:p>
@@ -3124,7 +3241,7 @@
           <a:p>
             <a:fld id="{3A0812E6-FF2F-4EE5-94A3-B41C09DA71CD}" type="datetimeFigureOut">
               <a:rPr lang="es-MX" smtClean="0"/>
-              <a:t>23/04/2026</a:t>
+              <a:t>24/04/2026</a:t>
             </a:fld>
             <a:endParaRPr lang="es-MX"/>
           </a:p>
@@ -3412,7 +3529,7 @@
           <a:p>
             <a:fld id="{3A0812E6-FF2F-4EE5-94A3-B41C09DA71CD}" type="datetimeFigureOut">
               <a:rPr lang="es-MX" smtClean="0"/>
-              <a:t>23/04/2026</a:t>
+              <a:t>24/04/2026</a:t>
             </a:fld>
             <a:endParaRPr lang="es-MX"/>
           </a:p>
@@ -3658,7 +3775,7 @@
           <a:p>
             <a:fld id="{3A0812E6-FF2F-4EE5-94A3-B41C09DA71CD}" type="datetimeFigureOut">
               <a:rPr lang="es-MX" smtClean="0"/>
-              <a:t>23/04/2026</a:t>
+              <a:t>24/04/2026</a:t>
             </a:fld>
             <a:endParaRPr lang="es-MX"/>
           </a:p>
@@ -5846,6 +5963,1276 @@
   <p:cSld>
     <p:spTree>
       <p:nvGrpSpPr>
+        <p:cNvPr id="1" name="">
+          <a:extLst>
+            <a:ext uri="{FF2B5EF4-FFF2-40B4-BE49-F238E27FC236}">
+              <a16:creationId xmlns:a16="http://schemas.microsoft.com/office/drawing/2014/main" id="{C93E5DF2-B035-B81D-3A3D-1D62426E8763}"/>
+            </a:ext>
+          </a:extLst>
+        </p:cNvPr>
+        <p:cNvGrpSpPr/>
+        <p:nvPr/>
+      </p:nvGrpSpPr>
+      <p:grpSpPr>
+        <a:xfrm>
+          <a:off x="0" y="0"/>
+          <a:ext cx="0" cy="0"/>
+          <a:chOff x="0" y="0"/>
+          <a:chExt cx="0" cy="0"/>
+        </a:xfrm>
+      </p:grpSpPr>
+      <p:grpSp>
+        <p:nvGrpSpPr>
+          <p:cNvPr id="19" name="Grupo 18">
+            <a:extLst>
+              <a:ext uri="{FF2B5EF4-FFF2-40B4-BE49-F238E27FC236}">
+                <a16:creationId xmlns:a16="http://schemas.microsoft.com/office/drawing/2014/main" id="{E88C7D45-ACD6-985E-C7BA-4B68D141ABB2}"/>
+              </a:ext>
+            </a:extLst>
+          </p:cNvPr>
+          <p:cNvGrpSpPr/>
+          <p:nvPr/>
+        </p:nvGrpSpPr>
+        <p:grpSpPr>
+          <a:xfrm rot="5400000">
+            <a:off x="-2293403" y="-2243669"/>
+            <a:ext cx="4586807" cy="4814628"/>
+            <a:chOff x="3193545" y="755695"/>
+            <a:chExt cx="5631572" cy="5162331"/>
+          </a:xfrm>
+        </p:grpSpPr>
+        <p:sp>
+          <p:nvSpPr>
+            <p:cNvPr id="20" name="Forma libre: forma 19">
+              <a:extLst>
+                <a:ext uri="{FF2B5EF4-FFF2-40B4-BE49-F238E27FC236}">
+                  <a16:creationId xmlns:a16="http://schemas.microsoft.com/office/drawing/2014/main" id="{05FBB31A-B525-3A28-C07F-3328755CE696}"/>
+                </a:ext>
+              </a:extLst>
+            </p:cNvPr>
+            <p:cNvSpPr/>
+            <p:nvPr/>
+          </p:nvSpPr>
+          <p:spPr>
+            <a:xfrm rot="16200000">
+              <a:off x="6252808" y="619749"/>
+              <a:ext cx="2431751" cy="2703643"/>
+            </a:xfrm>
+            <a:custGeom>
+              <a:avLst/>
+              <a:gdLst>
+                <a:gd name="csX0" fmla="*/ 2431751 w 2431751"/>
+                <a:gd name="csY0" fmla="*/ 0 h 2703643"/>
+                <a:gd name="csX1" fmla="*/ 2423380 w 2431751"/>
+                <a:gd name="csY1" fmla="*/ 180735 h 2703643"/>
+                <a:gd name="csX2" fmla="*/ 115004 w 2431751"/>
+                <a:gd name="csY2" fmla="*/ 2697312 h 2703643"/>
+                <a:gd name="csX3" fmla="*/ 0 w 2431751"/>
+                <a:gd name="csY3" fmla="*/ 2703643 h 2703643"/>
+                <a:gd name="csX4" fmla="*/ 0 w 2431751"/>
+                <a:gd name="csY4" fmla="*/ 2058844 h 2703643"/>
+                <a:gd name="csX5" fmla="*/ 49100 w 2431751"/>
+                <a:gd name="csY5" fmla="*/ 2056067 h 2703643"/>
+                <a:gd name="csX6" fmla="*/ 1782136 w 2431751"/>
+                <a:gd name="csY6" fmla="*/ 114830 h 2703643"/>
+                <a:gd name="csX7" fmla="*/ 1787313 w 2431751"/>
+                <a:gd name="csY7" fmla="*/ 0 h 2703643"/>
+                <a:gd name="csX8" fmla="*/ 2431751 w 2431751"/>
+                <a:gd name="csY8" fmla="*/ 0 h 2703643"/>
+              </a:gdLst>
+              <a:ahLst/>
+              <a:cxnLst>
+                <a:cxn ang="0">
+                  <a:pos x="csX0" y="csY0"/>
+                </a:cxn>
+                <a:cxn ang="0">
+                  <a:pos x="csX1" y="csY1"/>
+                </a:cxn>
+                <a:cxn ang="0">
+                  <a:pos x="csX2" y="csY2"/>
+                </a:cxn>
+                <a:cxn ang="0">
+                  <a:pos x="csX3" y="csY3"/>
+                </a:cxn>
+                <a:cxn ang="0">
+                  <a:pos x="csX4" y="csY4"/>
+                </a:cxn>
+                <a:cxn ang="0">
+                  <a:pos x="csX5" y="csY5"/>
+                </a:cxn>
+                <a:cxn ang="0">
+                  <a:pos x="csX6" y="csY6"/>
+                </a:cxn>
+                <a:cxn ang="0">
+                  <a:pos x="csX7" y="csY7"/>
+                </a:cxn>
+                <a:cxn ang="0">
+                  <a:pos x="csX8" y="csY8"/>
+                </a:cxn>
+              </a:cxnLst>
+              <a:rect l="l" t="t" r="r" b="b"/>
+              <a:pathLst>
+                <a:path w="2431751" h="2703643">
+                  <a:moveTo>
+                    <a:pt x="2431751" y="0"/>
+                  </a:moveTo>
+                  <a:lnTo>
+                    <a:pt x="2423380" y="180735"/>
+                  </a:lnTo>
+                  <a:cubicBezTo>
+                    <a:pt x="2299773" y="1507655"/>
+                    <a:pt x="1332145" y="2562556"/>
+                    <a:pt x="115004" y="2697312"/>
+                  </a:cubicBezTo>
+                  <a:lnTo>
+                    <a:pt x="0" y="2703643"/>
+                  </a:lnTo>
+                  <a:lnTo>
+                    <a:pt x="0" y="2058844"/>
+                  </a:lnTo>
+                  <a:lnTo>
+                    <a:pt x="49100" y="2056067"/>
+                  </a:lnTo>
+                  <a:cubicBezTo>
+                    <a:pt x="962881" y="1952119"/>
+                    <a:pt x="1689336" y="1138389"/>
+                    <a:pt x="1782136" y="114830"/>
+                  </a:cubicBezTo>
+                  <a:lnTo>
+                    <a:pt x="1787313" y="0"/>
+                  </a:lnTo>
+                  <a:lnTo>
+                    <a:pt x="2431751" y="0"/>
+                  </a:lnTo>
+                  <a:close/>
+                </a:path>
+              </a:pathLst>
+            </a:custGeom>
+          </p:spPr>
+          <p:style>
+            <a:lnRef idx="2">
+              <a:schemeClr val="accent1">
+                <a:shade val="15000"/>
+              </a:schemeClr>
+            </a:lnRef>
+            <a:fillRef idx="1">
+              <a:schemeClr val="accent1"/>
+            </a:fillRef>
+            <a:effectRef idx="0">
+              <a:schemeClr val="accent1"/>
+            </a:effectRef>
+            <a:fontRef idx="minor">
+              <a:schemeClr val="lt1"/>
+            </a:fontRef>
+          </p:style>
+          <p:txBody>
+            <a:bodyPr wrap="square" rtlCol="0" anchor="ctr">
+              <a:noAutofit/>
+            </a:bodyPr>
+            <a:lstStyle/>
+            <a:p>
+              <a:pPr algn="ctr"/>
+              <a:endParaRPr lang="es-MX" noProof="0" dirty="0"/>
+            </a:p>
+          </p:txBody>
+        </p:sp>
+        <p:sp>
+          <p:nvSpPr>
+            <p:cNvPr id="21" name="Forma libre: forma 20">
+              <a:extLst>
+                <a:ext uri="{FF2B5EF4-FFF2-40B4-BE49-F238E27FC236}">
+                  <a16:creationId xmlns:a16="http://schemas.microsoft.com/office/drawing/2014/main" id="{4FEE24B7-BD4B-0A2B-E50C-92A11052ECEF}"/>
+                </a:ext>
+              </a:extLst>
+            </p:cNvPr>
+            <p:cNvSpPr/>
+            <p:nvPr/>
+          </p:nvSpPr>
+          <p:spPr>
+            <a:xfrm rot="16200000">
+              <a:off x="3334100" y="619750"/>
+              <a:ext cx="2431751" cy="2703641"/>
+            </a:xfrm>
+            <a:custGeom>
+              <a:avLst/>
+              <a:gdLst>
+                <a:gd name="csX0" fmla="*/ 2431751 w 2431751"/>
+                <a:gd name="csY0" fmla="*/ 2703641 h 2703641"/>
+                <a:gd name="csX1" fmla="*/ 1787313 w 2431751"/>
+                <a:gd name="csY1" fmla="*/ 2703641 h 2703641"/>
+                <a:gd name="csX2" fmla="*/ 1782136 w 2431751"/>
+                <a:gd name="csY2" fmla="*/ 2588811 h 2703641"/>
+                <a:gd name="csX3" fmla="*/ 49100 w 2431751"/>
+                <a:gd name="csY3" fmla="*/ 647574 h 2703641"/>
+                <a:gd name="csX4" fmla="*/ 0 w 2431751"/>
+                <a:gd name="csY4" fmla="*/ 644797 h 2703641"/>
+                <a:gd name="csX5" fmla="*/ 0 w 2431751"/>
+                <a:gd name="csY5" fmla="*/ 0 h 2703641"/>
+                <a:gd name="csX6" fmla="*/ 115004 w 2431751"/>
+                <a:gd name="csY6" fmla="*/ 6331 h 2703641"/>
+                <a:gd name="csX7" fmla="*/ 2423380 w 2431751"/>
+                <a:gd name="csY7" fmla="*/ 2522908 h 2703641"/>
+                <a:gd name="csX8" fmla="*/ 2431751 w 2431751"/>
+                <a:gd name="csY8" fmla="*/ 2703641 h 2703641"/>
+              </a:gdLst>
+              <a:ahLst/>
+              <a:cxnLst>
+                <a:cxn ang="0">
+                  <a:pos x="csX0" y="csY0"/>
+                </a:cxn>
+                <a:cxn ang="0">
+                  <a:pos x="csX1" y="csY1"/>
+                </a:cxn>
+                <a:cxn ang="0">
+                  <a:pos x="csX2" y="csY2"/>
+                </a:cxn>
+                <a:cxn ang="0">
+                  <a:pos x="csX3" y="csY3"/>
+                </a:cxn>
+                <a:cxn ang="0">
+                  <a:pos x="csX4" y="csY4"/>
+                </a:cxn>
+                <a:cxn ang="0">
+                  <a:pos x="csX5" y="csY5"/>
+                </a:cxn>
+                <a:cxn ang="0">
+                  <a:pos x="csX6" y="csY6"/>
+                </a:cxn>
+                <a:cxn ang="0">
+                  <a:pos x="csX7" y="csY7"/>
+                </a:cxn>
+                <a:cxn ang="0">
+                  <a:pos x="csX8" y="csY8"/>
+                </a:cxn>
+              </a:cxnLst>
+              <a:rect l="l" t="t" r="r" b="b"/>
+              <a:pathLst>
+                <a:path w="2431751" h="2703641">
+                  <a:moveTo>
+                    <a:pt x="2431751" y="2703641"/>
+                  </a:moveTo>
+                  <a:lnTo>
+                    <a:pt x="1787313" y="2703641"/>
+                  </a:lnTo>
+                  <a:lnTo>
+                    <a:pt x="1782136" y="2588811"/>
+                  </a:lnTo>
+                  <a:cubicBezTo>
+                    <a:pt x="1689336" y="1565252"/>
+                    <a:pt x="962881" y="751523"/>
+                    <a:pt x="49100" y="647574"/>
+                  </a:cubicBezTo>
+                  <a:lnTo>
+                    <a:pt x="0" y="644797"/>
+                  </a:lnTo>
+                  <a:lnTo>
+                    <a:pt x="0" y="0"/>
+                  </a:lnTo>
+                  <a:lnTo>
+                    <a:pt x="115004" y="6331"/>
+                  </a:lnTo>
+                  <a:cubicBezTo>
+                    <a:pt x="1332146" y="141087"/>
+                    <a:pt x="2299773" y="1195988"/>
+                    <a:pt x="2423380" y="2522908"/>
+                  </a:cubicBezTo>
+                  <a:lnTo>
+                    <a:pt x="2431751" y="2703641"/>
+                  </a:lnTo>
+                  <a:close/>
+                </a:path>
+              </a:pathLst>
+            </a:custGeom>
+          </p:spPr>
+          <p:style>
+            <a:lnRef idx="2">
+              <a:schemeClr val="accent1">
+                <a:shade val="15000"/>
+              </a:schemeClr>
+            </a:lnRef>
+            <a:fillRef idx="1">
+              <a:schemeClr val="accent1"/>
+            </a:fillRef>
+            <a:effectRef idx="0">
+              <a:schemeClr val="accent1"/>
+            </a:effectRef>
+            <a:fontRef idx="minor">
+              <a:schemeClr val="lt1"/>
+            </a:fontRef>
+          </p:style>
+          <p:txBody>
+            <a:bodyPr wrap="square" rtlCol="0" anchor="ctr">
+              <a:noAutofit/>
+            </a:bodyPr>
+            <a:lstStyle/>
+            <a:p>
+              <a:pPr algn="ctr"/>
+              <a:endParaRPr lang="es-MX" noProof="0" dirty="0"/>
+            </a:p>
+          </p:txBody>
+        </p:sp>
+        <p:sp>
+          <p:nvSpPr>
+            <p:cNvPr id="22" name="Forma libre: forma 21">
+              <a:extLst>
+                <a:ext uri="{FF2B5EF4-FFF2-40B4-BE49-F238E27FC236}">
+                  <a16:creationId xmlns:a16="http://schemas.microsoft.com/office/drawing/2014/main" id="{1B783F74-6088-1085-09F9-6CD9D9CB1590}"/>
+                </a:ext>
+              </a:extLst>
+            </p:cNvPr>
+            <p:cNvSpPr/>
+            <p:nvPr/>
+          </p:nvSpPr>
+          <p:spPr>
+            <a:xfrm rot="16200000">
+              <a:off x="3289913" y="3306143"/>
+              <a:ext cx="2515515" cy="2708252"/>
+            </a:xfrm>
+            <a:custGeom>
+              <a:avLst/>
+              <a:gdLst>
+                <a:gd name="csX0" fmla="*/ 2515515 w 2515515"/>
+                <a:gd name="csY0" fmla="*/ 0 h 2708252"/>
+                <a:gd name="csX1" fmla="*/ 2515515 w 2515515"/>
+                <a:gd name="csY1" fmla="*/ 644670 h 2708252"/>
+                <a:gd name="csX2" fmla="*/ 2382651 w 2515515"/>
+                <a:gd name="csY2" fmla="*/ 652185 h 2708252"/>
+                <a:gd name="csX3" fmla="*/ 649615 w 2515515"/>
+                <a:gd name="csY3" fmla="*/ 2593422 h 2708252"/>
+                <a:gd name="csX4" fmla="*/ 644439 w 2515515"/>
+                <a:gd name="csY4" fmla="*/ 2708252 h 2708252"/>
+                <a:gd name="csX5" fmla="*/ 0 w 2515515"/>
+                <a:gd name="csY5" fmla="*/ 2708252 h 2708252"/>
+                <a:gd name="csX6" fmla="*/ 8371 w 2515515"/>
+                <a:gd name="csY6" fmla="*/ 2527519 h 2708252"/>
+                <a:gd name="csX7" fmla="*/ 2316747 w 2515515"/>
+                <a:gd name="csY7" fmla="*/ 10942 h 2708252"/>
+                <a:gd name="csX8" fmla="*/ 2515515 w 2515515"/>
+                <a:gd name="csY8" fmla="*/ 0 h 2708252"/>
+              </a:gdLst>
+              <a:ahLst/>
+              <a:cxnLst>
+                <a:cxn ang="0">
+                  <a:pos x="csX0" y="csY0"/>
+                </a:cxn>
+                <a:cxn ang="0">
+                  <a:pos x="csX1" y="csY1"/>
+                </a:cxn>
+                <a:cxn ang="0">
+                  <a:pos x="csX2" y="csY2"/>
+                </a:cxn>
+                <a:cxn ang="0">
+                  <a:pos x="csX3" y="csY3"/>
+                </a:cxn>
+                <a:cxn ang="0">
+                  <a:pos x="csX4" y="csY4"/>
+                </a:cxn>
+                <a:cxn ang="0">
+                  <a:pos x="csX5" y="csY5"/>
+                </a:cxn>
+                <a:cxn ang="0">
+                  <a:pos x="csX6" y="csY6"/>
+                </a:cxn>
+                <a:cxn ang="0">
+                  <a:pos x="csX7" y="csY7"/>
+                </a:cxn>
+                <a:cxn ang="0">
+                  <a:pos x="csX8" y="csY8"/>
+                </a:cxn>
+              </a:cxnLst>
+              <a:rect l="l" t="t" r="r" b="b"/>
+              <a:pathLst>
+                <a:path w="2515515" h="2708252">
+                  <a:moveTo>
+                    <a:pt x="2515515" y="0"/>
+                  </a:moveTo>
+                  <a:lnTo>
+                    <a:pt x="2515515" y="644670"/>
+                  </a:lnTo>
+                  <a:lnTo>
+                    <a:pt x="2382651" y="652185"/>
+                  </a:lnTo>
+                  <a:cubicBezTo>
+                    <a:pt x="1468871" y="756133"/>
+                    <a:pt x="742415" y="1569863"/>
+                    <a:pt x="649615" y="2593422"/>
+                  </a:cubicBezTo>
+                  <a:lnTo>
+                    <a:pt x="644439" y="2708252"/>
+                  </a:lnTo>
+                  <a:lnTo>
+                    <a:pt x="0" y="2708252"/>
+                  </a:lnTo>
+                  <a:lnTo>
+                    <a:pt x="8371" y="2527519"/>
+                  </a:lnTo>
+                  <a:cubicBezTo>
+                    <a:pt x="131979" y="1200599"/>
+                    <a:pt x="1099606" y="145698"/>
+                    <a:pt x="2316747" y="10942"/>
+                  </a:cubicBezTo>
+                  <a:lnTo>
+                    <a:pt x="2515515" y="0"/>
+                  </a:lnTo>
+                  <a:close/>
+                </a:path>
+              </a:pathLst>
+            </a:custGeom>
+          </p:spPr>
+          <p:style>
+            <a:lnRef idx="2">
+              <a:schemeClr val="accent1">
+                <a:shade val="15000"/>
+              </a:schemeClr>
+            </a:lnRef>
+            <a:fillRef idx="1">
+              <a:schemeClr val="accent1"/>
+            </a:fillRef>
+            <a:effectRef idx="0">
+              <a:schemeClr val="accent1"/>
+            </a:effectRef>
+            <a:fontRef idx="minor">
+              <a:schemeClr val="lt1"/>
+            </a:fontRef>
+          </p:style>
+          <p:txBody>
+            <a:bodyPr wrap="square" rtlCol="0" anchor="ctr">
+              <a:noAutofit/>
+            </a:bodyPr>
+            <a:lstStyle/>
+            <a:p>
+              <a:pPr algn="ctr"/>
+              <a:endParaRPr lang="es-MX" noProof="0" dirty="0"/>
+            </a:p>
+          </p:txBody>
+        </p:sp>
+        <p:sp>
+          <p:nvSpPr>
+            <p:cNvPr id="23" name="Forma libre: forma 22">
+              <a:extLst>
+                <a:ext uri="{FF2B5EF4-FFF2-40B4-BE49-F238E27FC236}">
+                  <a16:creationId xmlns:a16="http://schemas.microsoft.com/office/drawing/2014/main" id="{1F426615-2249-A1EA-22D6-9BAAED5A947D}"/>
+                </a:ext>
+              </a:extLst>
+            </p:cNvPr>
+            <p:cNvSpPr/>
+            <p:nvPr/>
+          </p:nvSpPr>
+          <p:spPr>
+            <a:xfrm rot="16200000">
+              <a:off x="6213232" y="3306142"/>
+              <a:ext cx="2515515" cy="2708254"/>
+            </a:xfrm>
+            <a:custGeom>
+              <a:avLst/>
+              <a:gdLst>
+                <a:gd name="csX0" fmla="*/ 2515515 w 2515515"/>
+                <a:gd name="csY0" fmla="*/ 2063582 h 2708254"/>
+                <a:gd name="csX1" fmla="*/ 2515515 w 2515515"/>
+                <a:gd name="csY1" fmla="*/ 2708254 h 2708254"/>
+                <a:gd name="csX2" fmla="*/ 2316747 w 2515515"/>
+                <a:gd name="csY2" fmla="*/ 2697312 h 2708254"/>
+                <a:gd name="csX3" fmla="*/ 8371 w 2515515"/>
+                <a:gd name="csY3" fmla="*/ 180735 h 2708254"/>
+                <a:gd name="csX4" fmla="*/ 0 w 2515515"/>
+                <a:gd name="csY4" fmla="*/ 0 h 2708254"/>
+                <a:gd name="csX5" fmla="*/ 644439 w 2515515"/>
+                <a:gd name="csY5" fmla="*/ 0 h 2708254"/>
+                <a:gd name="csX6" fmla="*/ 649615 w 2515515"/>
+                <a:gd name="csY6" fmla="*/ 114830 h 2708254"/>
+                <a:gd name="csX7" fmla="*/ 2382651 w 2515515"/>
+                <a:gd name="csY7" fmla="*/ 2056067 h 2708254"/>
+                <a:gd name="csX8" fmla="*/ 2515515 w 2515515"/>
+                <a:gd name="csY8" fmla="*/ 2063582 h 2708254"/>
+              </a:gdLst>
+              <a:ahLst/>
+              <a:cxnLst>
+                <a:cxn ang="0">
+                  <a:pos x="csX0" y="csY0"/>
+                </a:cxn>
+                <a:cxn ang="0">
+                  <a:pos x="csX1" y="csY1"/>
+                </a:cxn>
+                <a:cxn ang="0">
+                  <a:pos x="csX2" y="csY2"/>
+                </a:cxn>
+                <a:cxn ang="0">
+                  <a:pos x="csX3" y="csY3"/>
+                </a:cxn>
+                <a:cxn ang="0">
+                  <a:pos x="csX4" y="csY4"/>
+                </a:cxn>
+                <a:cxn ang="0">
+                  <a:pos x="csX5" y="csY5"/>
+                </a:cxn>
+                <a:cxn ang="0">
+                  <a:pos x="csX6" y="csY6"/>
+                </a:cxn>
+                <a:cxn ang="0">
+                  <a:pos x="csX7" y="csY7"/>
+                </a:cxn>
+                <a:cxn ang="0">
+                  <a:pos x="csX8" y="csY8"/>
+                </a:cxn>
+              </a:cxnLst>
+              <a:rect l="l" t="t" r="r" b="b"/>
+              <a:pathLst>
+                <a:path w="2515515" h="2708254">
+                  <a:moveTo>
+                    <a:pt x="2515515" y="2063582"/>
+                  </a:moveTo>
+                  <a:lnTo>
+                    <a:pt x="2515515" y="2708254"/>
+                  </a:lnTo>
+                  <a:lnTo>
+                    <a:pt x="2316747" y="2697312"/>
+                  </a:lnTo>
+                  <a:cubicBezTo>
+                    <a:pt x="1099605" y="2562556"/>
+                    <a:pt x="131978" y="1507655"/>
+                    <a:pt x="8371" y="180735"/>
+                  </a:cubicBezTo>
+                  <a:lnTo>
+                    <a:pt x="0" y="0"/>
+                  </a:lnTo>
+                  <a:lnTo>
+                    <a:pt x="644439" y="0"/>
+                  </a:lnTo>
+                  <a:lnTo>
+                    <a:pt x="649615" y="114830"/>
+                  </a:lnTo>
+                  <a:cubicBezTo>
+                    <a:pt x="742415" y="1138389"/>
+                    <a:pt x="1468870" y="1952119"/>
+                    <a:pt x="2382651" y="2056067"/>
+                  </a:cubicBezTo>
+                  <a:lnTo>
+                    <a:pt x="2515515" y="2063582"/>
+                  </a:lnTo>
+                  <a:close/>
+                </a:path>
+              </a:pathLst>
+            </a:custGeom>
+          </p:spPr>
+          <p:style>
+            <a:lnRef idx="2">
+              <a:schemeClr val="accent1">
+                <a:shade val="15000"/>
+              </a:schemeClr>
+            </a:lnRef>
+            <a:fillRef idx="1">
+              <a:schemeClr val="accent1"/>
+            </a:fillRef>
+            <a:effectRef idx="0">
+              <a:schemeClr val="accent1"/>
+            </a:effectRef>
+            <a:fontRef idx="minor">
+              <a:schemeClr val="lt1"/>
+            </a:fontRef>
+          </p:style>
+          <p:txBody>
+            <a:bodyPr wrap="square" rtlCol="0" anchor="ctr">
+              <a:noAutofit/>
+            </a:bodyPr>
+            <a:lstStyle/>
+            <a:p>
+              <a:pPr algn="ctr"/>
+              <a:endParaRPr lang="es-MX" noProof="0" dirty="0"/>
+            </a:p>
+          </p:txBody>
+        </p:sp>
+      </p:grpSp>
+      <p:pic>
+        <p:nvPicPr>
+          <p:cNvPr id="3" name="Imagen 2">
+            <a:extLst>
+              <a:ext uri="{FF2B5EF4-FFF2-40B4-BE49-F238E27FC236}">
+                <a16:creationId xmlns:a16="http://schemas.microsoft.com/office/drawing/2014/main" id="{A4F4B5E2-C275-1273-7D9A-71AE3FD2E874}"/>
+              </a:ext>
+            </a:extLst>
+          </p:cNvPr>
+          <p:cNvPicPr>
+            <a:picLocks noChangeAspect="1"/>
+          </p:cNvPicPr>
+          <p:nvPr/>
+        </p:nvPicPr>
+        <p:blipFill>
+          <a:blip r:embed="rId3">
+            <a:extLst>
+              <a:ext uri="{28A0092B-C50C-407E-A947-70E740481C1C}">
+                <a14:useLocalDpi xmlns:a14="http://schemas.microsoft.com/office/drawing/2010/main" val="0"/>
+              </a:ext>
+            </a:extLst>
+          </a:blip>
+          <a:srcRect/>
+          <a:stretch/>
+        </p:blipFill>
+        <p:spPr>
+          <a:xfrm>
+            <a:off x="5842000" y="2298848"/>
+            <a:ext cx="6210649" cy="2889203"/>
+          </a:xfrm>
+          <a:prstGeom prst="rect">
+            <a:avLst/>
+          </a:prstGeom>
+        </p:spPr>
+      </p:pic>
+      <p:grpSp>
+        <p:nvGrpSpPr>
+          <p:cNvPr id="4" name="Grupo 3">
+            <a:extLst>
+              <a:ext uri="{FF2B5EF4-FFF2-40B4-BE49-F238E27FC236}">
+                <a16:creationId xmlns:a16="http://schemas.microsoft.com/office/drawing/2014/main" id="{35D86C10-92B6-ABE0-5490-4357FDA4DD6C}"/>
+              </a:ext>
+            </a:extLst>
+          </p:cNvPr>
+          <p:cNvGrpSpPr/>
+          <p:nvPr/>
+        </p:nvGrpSpPr>
+        <p:grpSpPr>
+          <a:xfrm>
+            <a:off x="6379029" y="497882"/>
+            <a:ext cx="9650911" cy="1143288"/>
+            <a:chOff x="6480629" y="550482"/>
+            <a:chExt cx="9650911" cy="1143288"/>
+          </a:xfrm>
+        </p:grpSpPr>
+        <p:sp>
+          <p:nvSpPr>
+            <p:cNvPr id="5" name="CuadroTexto 4">
+              <a:extLst>
+                <a:ext uri="{FF2B5EF4-FFF2-40B4-BE49-F238E27FC236}">
+                  <a16:creationId xmlns:a16="http://schemas.microsoft.com/office/drawing/2014/main" id="{419E9726-2780-3F32-F9B2-6E070170D75A}"/>
+                </a:ext>
+              </a:extLst>
+            </p:cNvPr>
+            <p:cNvSpPr txBox="1"/>
+            <p:nvPr/>
+          </p:nvSpPr>
+          <p:spPr>
+            <a:xfrm>
+              <a:off x="7934230" y="550482"/>
+              <a:ext cx="8197310" cy="584775"/>
+            </a:xfrm>
+            <a:prstGeom prst="rect">
+              <a:avLst/>
+            </a:prstGeom>
+            <a:noFill/>
+          </p:spPr>
+          <p:txBody>
+            <a:bodyPr wrap="square" rtlCol="0">
+              <a:spAutoFit/>
+            </a:bodyPr>
+            <a:lstStyle/>
+            <a:p>
+              <a:r>
+                <a:rPr lang="en-US" sz="3200" b="1" noProof="0" dirty="0" err="1">
+                  <a:solidFill>
+                    <a:schemeClr val="bg1"/>
+                  </a:solidFill>
+                </a:rPr>
+                <a:t>Asignacion</a:t>
+              </a:r>
+              <a:r>
+                <a:rPr lang="en-US" sz="3200" b="1" noProof="0" dirty="0">
+                  <a:solidFill>
+                    <a:schemeClr val="bg1"/>
+                  </a:solidFill>
+                </a:rPr>
+                <a:t> </a:t>
+              </a:r>
+              <a:r>
+                <a:rPr lang="en-US" sz="3200" b="1" noProof="0" dirty="0" err="1">
+                  <a:solidFill>
+                    <a:schemeClr val="bg1"/>
+                  </a:solidFill>
+                </a:rPr>
+                <a:t>deMaterias</a:t>
+              </a:r>
+              <a:endParaRPr lang="es-MX" sz="3200" b="1" noProof="0" dirty="0">
+                <a:solidFill>
+                  <a:schemeClr val="bg1"/>
+                </a:solidFill>
+              </a:endParaRPr>
+            </a:p>
+          </p:txBody>
+        </p:sp>
+        <p:sp>
+          <p:nvSpPr>
+            <p:cNvPr id="6" name="Signo menos 5">
+              <a:extLst>
+                <a:ext uri="{FF2B5EF4-FFF2-40B4-BE49-F238E27FC236}">
+                  <a16:creationId xmlns:a16="http://schemas.microsoft.com/office/drawing/2014/main" id="{9B587D28-C3CD-2D27-5F0F-889BFF94E088}"/>
+                </a:ext>
+              </a:extLst>
+            </p:cNvPr>
+            <p:cNvSpPr/>
+            <p:nvPr/>
+          </p:nvSpPr>
+          <p:spPr>
+            <a:xfrm>
+              <a:off x="6480629" y="842870"/>
+              <a:ext cx="6714671" cy="850900"/>
+            </a:xfrm>
+            <a:prstGeom prst="mathMinus">
+              <a:avLst/>
+            </a:prstGeom>
+            <a:solidFill>
+              <a:schemeClr val="bg1"/>
+            </a:solidFill>
+          </p:spPr>
+          <p:style>
+            <a:lnRef idx="2">
+              <a:schemeClr val="accent1">
+                <a:shade val="15000"/>
+              </a:schemeClr>
+            </a:lnRef>
+            <a:fillRef idx="1">
+              <a:schemeClr val="accent1"/>
+            </a:fillRef>
+            <a:effectRef idx="0">
+              <a:schemeClr val="accent1"/>
+            </a:effectRef>
+            <a:fontRef idx="minor">
+              <a:schemeClr val="lt1"/>
+            </a:fontRef>
+          </p:style>
+          <p:txBody>
+            <a:bodyPr rtlCol="0" anchor="ctr"/>
+            <a:lstStyle/>
+            <a:p>
+              <a:pPr algn="ctr"/>
+              <a:endParaRPr lang="es-MX" noProof="0" dirty="0"/>
+            </a:p>
+          </p:txBody>
+        </p:sp>
+      </p:grpSp>
+      <p:sp>
+        <p:nvSpPr>
+          <p:cNvPr id="7" name="CuadroTexto 6">
+            <a:extLst>
+              <a:ext uri="{FF2B5EF4-FFF2-40B4-BE49-F238E27FC236}">
+                <a16:creationId xmlns:a16="http://schemas.microsoft.com/office/drawing/2014/main" id="{722A1C00-8FAD-FA8F-F959-A70EAF9F4868}"/>
+              </a:ext>
+            </a:extLst>
+          </p:cNvPr>
+          <p:cNvSpPr txBox="1"/>
+          <p:nvPr/>
+        </p:nvSpPr>
+        <p:spPr>
+          <a:xfrm>
+            <a:off x="1395171" y="2298848"/>
+            <a:ext cx="4255482" cy="3139321"/>
+          </a:xfrm>
+          <a:prstGeom prst="rect">
+            <a:avLst/>
+          </a:prstGeom>
+          <a:noFill/>
+        </p:spPr>
+        <p:txBody>
+          <a:bodyPr wrap="square" rtlCol="0">
+            <a:spAutoFit/>
+          </a:bodyPr>
+          <a:lstStyle/>
+          <a:p>
+            <a:r>
+              <a:rPr lang="en-US" b="1" noProof="0" dirty="0">
+                <a:solidFill>
+                  <a:schemeClr val="bg1"/>
+                </a:solidFill>
+              </a:rPr>
+              <a:t>La </a:t>
+            </a:r>
+            <a:r>
+              <a:rPr lang="en-US" b="1" noProof="0" dirty="0" err="1">
+                <a:solidFill>
+                  <a:schemeClr val="bg1"/>
+                </a:solidFill>
+              </a:rPr>
+              <a:t>página</a:t>
+            </a:r>
+            <a:r>
+              <a:rPr lang="en-US" b="1" noProof="0" dirty="0">
+                <a:solidFill>
+                  <a:schemeClr val="bg1"/>
+                </a:solidFill>
+              </a:rPr>
+              <a:t> de </a:t>
+            </a:r>
+            <a:r>
+              <a:rPr lang="en-US" b="1" dirty="0" err="1">
+                <a:solidFill>
+                  <a:schemeClr val="bg1"/>
+                </a:solidFill>
+              </a:rPr>
+              <a:t>asignación</a:t>
+            </a:r>
+            <a:r>
+              <a:rPr lang="en-US" b="1" noProof="0" dirty="0">
+                <a:solidFill>
+                  <a:schemeClr val="bg1"/>
+                </a:solidFill>
+              </a:rPr>
+              <a:t> de </a:t>
+            </a:r>
+            <a:r>
+              <a:rPr lang="en-US" b="1" noProof="0" dirty="0" err="1">
+                <a:solidFill>
+                  <a:schemeClr val="bg1"/>
+                </a:solidFill>
+              </a:rPr>
+              <a:t>materias</a:t>
+            </a:r>
+            <a:r>
+              <a:rPr lang="en-US" b="1" dirty="0">
+                <a:solidFill>
+                  <a:schemeClr val="bg1"/>
+                </a:solidFill>
+              </a:rPr>
+              <a:t> </a:t>
+            </a:r>
+            <a:r>
+              <a:rPr lang="en-US" b="1" dirty="0" err="1">
+                <a:solidFill>
+                  <a:schemeClr val="bg1"/>
+                </a:solidFill>
+              </a:rPr>
+              <a:t>cuenta</a:t>
+            </a:r>
+            <a:r>
+              <a:rPr lang="en-US" b="1" dirty="0">
+                <a:solidFill>
+                  <a:schemeClr val="bg1"/>
+                </a:solidFill>
+              </a:rPr>
+              <a:t> con:</a:t>
+            </a:r>
+          </a:p>
+          <a:p>
+            <a:r>
+              <a:rPr lang="en-US" b="1" noProof="0" dirty="0">
+                <a:solidFill>
+                  <a:schemeClr val="bg1"/>
+                </a:solidFill>
+              </a:rPr>
+              <a:t>U</a:t>
+            </a:r>
+            <a:r>
+              <a:rPr lang="en-US" b="1" dirty="0" err="1">
+                <a:solidFill>
+                  <a:schemeClr val="bg1"/>
+                </a:solidFill>
+              </a:rPr>
+              <a:t>na</a:t>
+            </a:r>
+            <a:r>
+              <a:rPr lang="en-US" b="1" dirty="0">
+                <a:solidFill>
+                  <a:schemeClr val="bg1"/>
+                </a:solidFill>
+              </a:rPr>
+              <a:t> barra lateral al </a:t>
+            </a:r>
+            <a:r>
+              <a:rPr lang="en-US" b="1" dirty="0" err="1">
+                <a:solidFill>
+                  <a:schemeClr val="bg1"/>
+                </a:solidFill>
+              </a:rPr>
+              <a:t>lado</a:t>
+            </a:r>
+            <a:r>
+              <a:rPr lang="en-US" b="1" dirty="0">
+                <a:solidFill>
+                  <a:schemeClr val="bg1"/>
+                </a:solidFill>
+              </a:rPr>
+              <a:t> Izquierdo para la </a:t>
+            </a:r>
+            <a:r>
+              <a:rPr lang="en-US" b="1" dirty="0" err="1">
+                <a:solidFill>
+                  <a:schemeClr val="bg1"/>
+                </a:solidFill>
+              </a:rPr>
+              <a:t>navegacion</a:t>
+            </a:r>
+            <a:r>
+              <a:rPr lang="en-US" b="1" dirty="0">
+                <a:solidFill>
+                  <a:schemeClr val="bg1"/>
+                </a:solidFill>
+              </a:rPr>
+              <a:t> entre las </a:t>
+            </a:r>
+            <a:r>
+              <a:rPr lang="en-US" b="1" dirty="0" err="1">
+                <a:solidFill>
+                  <a:schemeClr val="bg1"/>
+                </a:solidFill>
+              </a:rPr>
+              <a:t>distintas</a:t>
+            </a:r>
+            <a:r>
+              <a:rPr lang="en-US" b="1" dirty="0">
+                <a:solidFill>
+                  <a:schemeClr val="bg1"/>
+                </a:solidFill>
+              </a:rPr>
+              <a:t> </a:t>
+            </a:r>
+            <a:r>
+              <a:rPr lang="en-US" b="1" dirty="0" err="1">
+                <a:solidFill>
+                  <a:schemeClr val="bg1"/>
+                </a:solidFill>
+              </a:rPr>
+              <a:t>paginas</a:t>
+            </a:r>
+            <a:r>
+              <a:rPr lang="en-US" b="1" dirty="0">
+                <a:solidFill>
+                  <a:schemeClr val="bg1"/>
+                </a:solidFill>
+              </a:rPr>
+              <a:t> del portal, un header </a:t>
+            </a:r>
+            <a:r>
+              <a:rPr lang="en-US" b="1" dirty="0" err="1">
+                <a:solidFill>
+                  <a:schemeClr val="bg1"/>
+                </a:solidFill>
+              </a:rPr>
+              <a:t>en</a:t>
+            </a:r>
+            <a:r>
+              <a:rPr lang="en-US" b="1" dirty="0">
+                <a:solidFill>
+                  <a:schemeClr val="bg1"/>
+                </a:solidFill>
+              </a:rPr>
+              <a:t> el </a:t>
+            </a:r>
+            <a:r>
+              <a:rPr lang="en-US" b="1" dirty="0" err="1">
+                <a:solidFill>
+                  <a:schemeClr val="bg1"/>
+                </a:solidFill>
+              </a:rPr>
+              <a:t>cual</a:t>
+            </a:r>
+            <a:r>
+              <a:rPr lang="en-US" b="1" dirty="0">
+                <a:solidFill>
+                  <a:schemeClr val="bg1"/>
+                </a:solidFill>
+              </a:rPr>
+              <a:t> se </a:t>
+            </a:r>
+            <a:r>
+              <a:rPr lang="en-US" b="1" dirty="0" err="1">
+                <a:solidFill>
+                  <a:schemeClr val="bg1"/>
+                </a:solidFill>
+              </a:rPr>
+              <a:t>muestra</a:t>
+            </a:r>
+            <a:r>
+              <a:rPr lang="en-US" b="1" dirty="0">
+                <a:solidFill>
+                  <a:schemeClr val="bg1"/>
+                </a:solidFill>
+              </a:rPr>
+              <a:t> el </a:t>
+            </a:r>
+            <a:r>
+              <a:rPr lang="en-US" b="1" dirty="0" err="1">
+                <a:solidFill>
+                  <a:schemeClr val="bg1"/>
+                </a:solidFill>
+              </a:rPr>
+              <a:t>nombre</a:t>
+            </a:r>
+            <a:r>
+              <a:rPr lang="en-US" b="1" dirty="0">
+                <a:solidFill>
+                  <a:schemeClr val="bg1"/>
+                </a:solidFill>
+              </a:rPr>
+              <a:t> de la pagina </a:t>
+            </a:r>
+            <a:r>
+              <a:rPr lang="en-US" b="1" dirty="0" err="1">
+                <a:solidFill>
+                  <a:schemeClr val="bg1"/>
+                </a:solidFill>
+              </a:rPr>
+              <a:t>en</a:t>
+            </a:r>
+            <a:r>
+              <a:rPr lang="en-US" b="1" dirty="0">
+                <a:solidFill>
+                  <a:schemeClr val="bg1"/>
+                </a:solidFill>
+              </a:rPr>
+              <a:t> la </a:t>
+            </a:r>
+            <a:r>
+              <a:rPr lang="en-US" b="1" dirty="0" err="1">
+                <a:solidFill>
+                  <a:schemeClr val="bg1"/>
+                </a:solidFill>
+              </a:rPr>
+              <a:t>que</a:t>
+            </a:r>
+            <a:r>
+              <a:rPr lang="en-US" b="1" dirty="0">
+                <a:solidFill>
+                  <a:schemeClr val="bg1"/>
+                </a:solidFill>
+              </a:rPr>
+              <a:t> </a:t>
+            </a:r>
+            <a:r>
+              <a:rPr lang="en-US" b="1" dirty="0" err="1">
+                <a:solidFill>
+                  <a:schemeClr val="bg1"/>
+                </a:solidFill>
+              </a:rPr>
+              <a:t>estamos</a:t>
+            </a:r>
+            <a:r>
+              <a:rPr lang="en-US" b="1" dirty="0">
+                <a:solidFill>
+                  <a:schemeClr val="bg1"/>
+                </a:solidFill>
+              </a:rPr>
+              <a:t> y el logo de la Universidad </a:t>
+            </a:r>
+            <a:r>
+              <a:rPr lang="en-US" b="1" dirty="0" err="1">
+                <a:solidFill>
+                  <a:schemeClr val="bg1"/>
+                </a:solidFill>
+              </a:rPr>
+              <a:t>en</a:t>
+            </a:r>
+            <a:r>
+              <a:rPr lang="en-US" b="1" dirty="0">
+                <a:solidFill>
+                  <a:schemeClr val="bg1"/>
+                </a:solidFill>
+              </a:rPr>
+              <a:t> el </a:t>
+            </a:r>
+            <a:r>
+              <a:rPr lang="en-US" b="1" dirty="0" err="1">
+                <a:solidFill>
+                  <a:schemeClr val="bg1"/>
+                </a:solidFill>
+              </a:rPr>
+              <a:t>lado</a:t>
+            </a:r>
+            <a:r>
+              <a:rPr lang="en-US" b="1" dirty="0">
+                <a:solidFill>
+                  <a:schemeClr val="bg1"/>
+                </a:solidFill>
+              </a:rPr>
+              <a:t> Izquierdo.</a:t>
+            </a:r>
+          </a:p>
+          <a:p>
+            <a:r>
+              <a:rPr lang="en-US" b="1" dirty="0">
+                <a:solidFill>
+                  <a:schemeClr val="bg1"/>
+                </a:solidFill>
+              </a:rPr>
+              <a:t>En </a:t>
+            </a:r>
+            <a:r>
+              <a:rPr lang="en-US" b="1" dirty="0" err="1">
+                <a:solidFill>
+                  <a:schemeClr val="bg1"/>
+                </a:solidFill>
+              </a:rPr>
+              <a:t>esta</a:t>
+            </a:r>
+            <a:r>
+              <a:rPr lang="en-US" b="1" dirty="0">
+                <a:solidFill>
+                  <a:schemeClr val="bg1"/>
+                </a:solidFill>
+              </a:rPr>
+              <a:t> pagina se </a:t>
+            </a:r>
+            <a:r>
+              <a:rPr lang="en-US" b="1" dirty="0" err="1">
+                <a:solidFill>
+                  <a:schemeClr val="bg1"/>
+                </a:solidFill>
+              </a:rPr>
+              <a:t>asignan</a:t>
+            </a:r>
+            <a:r>
+              <a:rPr lang="en-US" b="1" dirty="0">
+                <a:solidFill>
+                  <a:schemeClr val="bg1"/>
+                </a:solidFill>
+              </a:rPr>
+              <a:t> las </a:t>
+            </a:r>
+            <a:r>
+              <a:rPr lang="en-US" b="1" dirty="0" err="1">
+                <a:solidFill>
+                  <a:schemeClr val="bg1"/>
+                </a:solidFill>
+              </a:rPr>
+              <a:t>materias</a:t>
+            </a:r>
+            <a:r>
+              <a:rPr lang="en-US" b="1" dirty="0">
+                <a:solidFill>
+                  <a:schemeClr val="bg1"/>
+                </a:solidFill>
+              </a:rPr>
+              <a:t> a </a:t>
+            </a:r>
+            <a:r>
+              <a:rPr lang="en-US" b="1" dirty="0" err="1">
+                <a:solidFill>
+                  <a:schemeClr val="bg1"/>
+                </a:solidFill>
+              </a:rPr>
+              <a:t>los</a:t>
+            </a:r>
+            <a:r>
+              <a:rPr lang="en-US" b="1" dirty="0">
+                <a:solidFill>
+                  <a:schemeClr val="bg1"/>
+                </a:solidFill>
+              </a:rPr>
+              <a:t> maestros.</a:t>
+            </a:r>
+          </a:p>
+          <a:p>
+            <a:endParaRPr lang="en-US" b="1" dirty="0">
+              <a:solidFill>
+                <a:schemeClr val="bg1"/>
+              </a:solidFill>
+            </a:endParaRPr>
+          </a:p>
+        </p:txBody>
+      </p:sp>
+    </p:spTree>
+    <p:extLst>
+      <p:ext uri="{BB962C8B-B14F-4D97-AF65-F5344CB8AC3E}">
+        <p14:creationId xmlns:p14="http://schemas.microsoft.com/office/powerpoint/2010/main" val="2505261689"/>
+      </p:ext>
+    </p:extLst>
+  </p:cSld>
+  <p:clrMapOvr>
+    <a:masterClrMapping/>
+  </p:clrMapOvr>
+  <mc:AlternateContent xmlns:mc="http://schemas.openxmlformats.org/markup-compatibility/2006" xmlns:p159="http://schemas.microsoft.com/office/powerpoint/2015/09/main">
+    <mc:Choice Requires="p159">
+      <p:transition xmlns:p14="http://schemas.microsoft.com/office/powerpoint/2010/main" spd="slow" p14:dur="2000">
+        <p159:morph option="byObject"/>
+      </p:transition>
+    </mc:Choice>
+    <mc:Fallback xmlns="">
+      <p:transition spd="slow">
+        <p:fade/>
+      </p:transition>
+    </mc:Fallback>
+  </mc:AlternateContent>
+</p:sld>
+</file>
+
+<file path=ppt/slides/slide5.xml><?xml version="1.0" encoding="utf-8"?>
+<p:sld xmlns:a="http://schemas.openxmlformats.org/drawingml/2006/main" xmlns:r="http://schemas.openxmlformats.org/officeDocument/2006/relationships" xmlns:p="http://schemas.openxmlformats.org/presentationml/2006/main">
+  <p:cSld>
+    <p:spTree>
+      <p:nvGrpSpPr>
+        <p:cNvPr id="1" name=""/>
+        <p:cNvGrpSpPr/>
+        <p:nvPr/>
+      </p:nvGrpSpPr>
+      <p:grpSpPr>
+        <a:xfrm>
+          <a:off x="0" y="0"/>
+          <a:ext cx="0" cy="0"/>
+          <a:chOff x="0" y="0"/>
+          <a:chExt cx="0" cy="0"/>
+        </a:xfrm>
+      </p:grpSpPr>
+      <p:pic>
+        <p:nvPicPr>
+          <p:cNvPr id="4" name="Imagen 3">
+            <a:extLst>
+              <a:ext uri="{FF2B5EF4-FFF2-40B4-BE49-F238E27FC236}">
+                <a16:creationId xmlns:a16="http://schemas.microsoft.com/office/drawing/2014/main" id="{A56D9129-FEF9-F77B-DEC3-3DEF300319B4}"/>
+              </a:ext>
+            </a:extLst>
+          </p:cNvPr>
+          <p:cNvPicPr>
+            <a:picLocks noChangeAspect="1"/>
+          </p:cNvPicPr>
+          <p:nvPr/>
+        </p:nvPicPr>
+        <p:blipFill>
+          <a:blip r:embed="rId2">
+            <a:extLst>
+              <a:ext uri="{28A0092B-C50C-407E-A947-70E740481C1C}">
+                <a14:useLocalDpi xmlns:a14="http://schemas.microsoft.com/office/drawing/2010/main" val="0"/>
+              </a:ext>
+            </a:extLst>
+          </a:blip>
+          <a:srcRect/>
+          <a:stretch/>
+        </p:blipFill>
+        <p:spPr>
+          <a:xfrm>
+            <a:off x="294969" y="360231"/>
+            <a:ext cx="11413552" cy="5309601"/>
+          </a:xfrm>
+          <a:prstGeom prst="roundRect">
+            <a:avLst>
+              <a:gd name="adj" fmla="val 8594"/>
+            </a:avLst>
+          </a:prstGeom>
+          <a:solidFill>
+            <a:srgbClr val="FFFFFF">
+              <a:shade val="85000"/>
+            </a:srgbClr>
+          </a:solidFill>
+          <a:ln>
+            <a:noFill/>
+          </a:ln>
+          <a:effectLst>
+            <a:reflection blurRad="12700" stA="38000" endPos="28000" dist="5000" dir="5400000" sy="-100000" algn="bl" rotWithShape="0"/>
+          </a:effectLst>
+        </p:spPr>
+      </p:pic>
+    </p:spTree>
+    <p:extLst>
+      <p:ext uri="{BB962C8B-B14F-4D97-AF65-F5344CB8AC3E}">
+        <p14:creationId xmlns:p14="http://schemas.microsoft.com/office/powerpoint/2010/main" val="830105480"/>
+      </p:ext>
+    </p:extLst>
+  </p:cSld>
+  <p:clrMapOvr>
+    <a:masterClrMapping/>
+  </p:clrMapOvr>
+</p:sld>
+</file>
+
+<file path=ppt/slides/slide6.xml><?xml version="1.0" encoding="utf-8"?>
+<p:sld xmlns:a="http://schemas.openxmlformats.org/drawingml/2006/main" xmlns:r="http://schemas.openxmlformats.org/officeDocument/2006/relationships" xmlns:p="http://schemas.openxmlformats.org/presentationml/2006/main">
+  <p:cSld>
+    <p:spTree>
+      <p:nvGrpSpPr>
         <p:cNvPr id="1" name=""/>
         <p:cNvGrpSpPr/>
         <p:nvPr/>
@@ -7089,7 +8476,7 @@
 </p:sld>
 </file>
 
-<file path=ppt/slides/slide5.xml><?xml version="1.0" encoding="utf-8"?>
+<file path=ppt/slides/slide7.xml><?xml version="1.0" encoding="utf-8"?>
 <p:sld xmlns:a="http://schemas.openxmlformats.org/drawingml/2006/main" xmlns:r="http://schemas.openxmlformats.org/officeDocument/2006/relationships" xmlns:p="http://schemas.openxmlformats.org/presentationml/2006/main">
   <p:cSld>
     <p:spTree>
@@ -7174,7 +8561,7 @@
 </p:sld>
 </file>
 
-<file path=ppt/slides/slide6.xml><?xml version="1.0" encoding="utf-8"?>
+<file path=ppt/slides/slide8.xml><?xml version="1.0" encoding="utf-8"?>
 <p:sld xmlns:a="http://schemas.openxmlformats.org/drawingml/2006/main" xmlns:r="http://schemas.openxmlformats.org/officeDocument/2006/relationships" xmlns:p="http://schemas.openxmlformats.org/presentationml/2006/main">
   <p:cSld>
     <p:spTree>
